--- a/黃家朗新人報告.pptx
+++ b/黃家朗新人報告.pptx
@@ -21825,20 +21825,43 @@
           </a:p>
         </p:txBody>
       </p:sp>
-      <p:sp>
-        <p:nvSpPr>
-          <p:cNvPr id="4" name="Shape 2"/>
+      <p:pic>
+        <p:nvPicPr>
+          <p:cNvPr id="4" name="Image 0" descr="/home/user/freshman-report/report/assets/profile.jpg">    </p:cNvPr>
+          <p:cNvPicPr>
+            <a:picLocks noChangeAspect="1"/>
+          </p:cNvPicPr>
+          <p:nvPr/>
+        </p:nvPicPr>
+        <p:blipFill>
+          <a:blip r:embed="rId1"/>
+          <a:srcRect l="0" r="0" t="0" b="0"/>
+          <a:stretch/>
+        </p:blipFill>
+        <p:spPr>
+          <a:xfrm>
+            <a:off x="8570671" y="1874520"/>
+            <a:ext cx="2980944" cy="3977640"/>
+          </a:xfrm>
+          <a:prstGeom prst="rect">
+            <a:avLst/>
+          </a:prstGeom>
+        </p:spPr>
+      </p:pic>
+      <p:sp>
+        <p:nvSpPr>
+          <p:cNvPr id="5" name="Shape 2"/>
           <p:cNvSpPr/>
           <p:nvPr/>
         </p:nvSpPr>
         <p:spPr>
           <a:xfrm>
             <a:off x="640080" y="1874520"/>
-            <a:ext cx="5272888" cy="1874520"/>
+            <a:ext cx="3576676" cy="1851660"/>
           </a:xfrm>
           <a:prstGeom prst="roundRect">
             <a:avLst>
-              <a:gd name="adj" fmla="val 2927"/>
+              <a:gd name="adj" fmla="val 2963"/>
             </a:avLst>
           </a:prstGeom>
           <a:solidFill>
@@ -21861,14 +21884,14 @@
       </p:sp>
       <p:sp>
         <p:nvSpPr>
-          <p:cNvPr id="5" name="Text 3"/>
+          <p:cNvPr id="6" name="Text 3"/>
           <p:cNvSpPr/>
           <p:nvPr/>
         </p:nvSpPr>
         <p:spPr>
           <a:xfrm>
             <a:off x="932688" y="2093976"/>
-            <a:ext cx="4687672" cy="384048"/>
+            <a:ext cx="2991460" cy="384048"/>
           </a:xfrm>
           <a:prstGeom prst="rect">
             <a:avLst/>
@@ -21900,14 +21923,14 @@
       </p:sp>
       <p:sp>
         <p:nvSpPr>
-          <p:cNvPr id="6" name="Text 4"/>
+          <p:cNvPr id="7" name="Text 4"/>
           <p:cNvSpPr/>
           <p:nvPr/>
         </p:nvSpPr>
         <p:spPr>
           <a:xfrm>
             <a:off x="932688" y="2532888"/>
-            <a:ext cx="4687672" cy="978408"/>
+            <a:ext cx="2991460" cy="955548"/>
           </a:xfrm>
           <a:prstGeom prst="rect">
             <a:avLst/>
@@ -21942,18 +21965,18 @@
       </p:sp>
       <p:sp>
         <p:nvSpPr>
-          <p:cNvPr id="7" name="Shape 5"/>
-          <p:cNvSpPr/>
-          <p:nvPr/>
-        </p:nvSpPr>
-        <p:spPr>
-          <a:xfrm>
-            <a:off x="6278728" y="1874520"/>
-            <a:ext cx="5272888" cy="1874520"/>
+          <p:cNvPr id="8" name="Shape 5"/>
+          <p:cNvSpPr/>
+          <p:nvPr/>
+        </p:nvSpPr>
+        <p:spPr>
+          <a:xfrm>
+            <a:off x="4582516" y="1874520"/>
+            <a:ext cx="3576676" cy="1851660"/>
           </a:xfrm>
           <a:prstGeom prst="roundRect">
             <a:avLst>
-              <a:gd name="adj" fmla="val 2927"/>
+              <a:gd name="adj" fmla="val 2963"/>
             </a:avLst>
           </a:prstGeom>
           <a:solidFill>
@@ -21976,14 +21999,14 @@
       </p:sp>
       <p:sp>
         <p:nvSpPr>
-          <p:cNvPr id="8" name="Text 6"/>
-          <p:cNvSpPr/>
-          <p:nvPr/>
-        </p:nvSpPr>
-        <p:spPr>
-          <a:xfrm>
-            <a:off x="6571336" y="2093976"/>
-            <a:ext cx="4687672" cy="384048"/>
+          <p:cNvPr id="9" name="Text 6"/>
+          <p:cNvSpPr/>
+          <p:nvPr/>
+        </p:nvSpPr>
+        <p:spPr>
+          <a:xfrm>
+            <a:off x="4875124" y="2093976"/>
+            <a:ext cx="2991460" cy="384048"/>
           </a:xfrm>
           <a:prstGeom prst="rect">
             <a:avLst/>
@@ -22015,14 +22038,14 @@
       </p:sp>
       <p:sp>
         <p:nvSpPr>
-          <p:cNvPr id="9" name="Text 7"/>
-          <p:cNvSpPr/>
-          <p:nvPr/>
-        </p:nvSpPr>
-        <p:spPr>
-          <a:xfrm>
-            <a:off x="6571336" y="2532888"/>
-            <a:ext cx="4687672" cy="978408"/>
+          <p:cNvPr id="10" name="Text 7"/>
+          <p:cNvSpPr/>
+          <p:nvPr/>
+        </p:nvSpPr>
+        <p:spPr>
+          <a:xfrm>
+            <a:off x="4875124" y="2532888"/>
+            <a:ext cx="2991460" cy="955548"/>
           </a:xfrm>
           <a:prstGeom prst="rect">
             <a:avLst/>
@@ -22057,18 +22080,18 @@
       </p:sp>
       <p:sp>
         <p:nvSpPr>
-          <p:cNvPr id="10" name="Shape 8"/>
-          <p:cNvSpPr/>
-          <p:nvPr/>
-        </p:nvSpPr>
-        <p:spPr>
-          <a:xfrm>
-            <a:off x="640080" y="3977640"/>
-            <a:ext cx="5272888" cy="1874520"/>
+          <p:cNvPr id="11" name="Shape 8"/>
+          <p:cNvSpPr/>
+          <p:nvPr/>
+        </p:nvSpPr>
+        <p:spPr>
+          <a:xfrm>
+            <a:off x="640080" y="4000500"/>
+            <a:ext cx="3576676" cy="1851660"/>
           </a:xfrm>
           <a:prstGeom prst="roundRect">
             <a:avLst>
-              <a:gd name="adj" fmla="val 2927"/>
+              <a:gd name="adj" fmla="val 2963"/>
             </a:avLst>
           </a:prstGeom>
           <a:solidFill>
@@ -22091,14 +22114,14 @@
       </p:sp>
       <p:sp>
         <p:nvSpPr>
-          <p:cNvPr id="11" name="Text 9"/>
-          <p:cNvSpPr/>
-          <p:nvPr/>
-        </p:nvSpPr>
-        <p:spPr>
-          <a:xfrm>
-            <a:off x="932688" y="4197096"/>
-            <a:ext cx="4687672" cy="384048"/>
+          <p:cNvPr id="12" name="Text 9"/>
+          <p:cNvSpPr/>
+          <p:nvPr/>
+        </p:nvSpPr>
+        <p:spPr>
+          <a:xfrm>
+            <a:off x="932688" y="4219956"/>
+            <a:ext cx="2991460" cy="384048"/>
           </a:xfrm>
           <a:prstGeom prst="rect">
             <a:avLst/>
@@ -22130,14 +22153,14 @@
       </p:sp>
       <p:sp>
         <p:nvSpPr>
-          <p:cNvPr id="12" name="Text 10"/>
-          <p:cNvSpPr/>
-          <p:nvPr/>
-        </p:nvSpPr>
-        <p:spPr>
-          <a:xfrm>
-            <a:off x="932688" y="4636008"/>
-            <a:ext cx="4687672" cy="978408"/>
+          <p:cNvPr id="13" name="Text 10"/>
+          <p:cNvSpPr/>
+          <p:nvPr/>
+        </p:nvSpPr>
+        <p:spPr>
+          <a:xfrm>
+            <a:off x="932688" y="4658868"/>
+            <a:ext cx="2991460" cy="955548"/>
           </a:xfrm>
           <a:prstGeom prst="rect">
             <a:avLst/>
@@ -22192,18 +22215,18 @@
       </p:sp>
       <p:sp>
         <p:nvSpPr>
-          <p:cNvPr id="13" name="Shape 11"/>
-          <p:cNvSpPr/>
-          <p:nvPr/>
-        </p:nvSpPr>
-        <p:spPr>
-          <a:xfrm>
-            <a:off x="6278728" y="3977640"/>
-            <a:ext cx="5272888" cy="1874520"/>
+          <p:cNvPr id="14" name="Shape 11"/>
+          <p:cNvSpPr/>
+          <p:nvPr/>
+        </p:nvSpPr>
+        <p:spPr>
+          <a:xfrm>
+            <a:off x="4582516" y="4000500"/>
+            <a:ext cx="3576676" cy="1851660"/>
           </a:xfrm>
           <a:prstGeom prst="roundRect">
             <a:avLst>
-              <a:gd name="adj" fmla="val 2927"/>
+              <a:gd name="adj" fmla="val 2963"/>
             </a:avLst>
           </a:prstGeom>
           <a:solidFill>
@@ -22226,14 +22249,14 @@
       </p:sp>
       <p:sp>
         <p:nvSpPr>
-          <p:cNvPr id="14" name="Text 12"/>
-          <p:cNvSpPr/>
-          <p:nvPr/>
-        </p:nvSpPr>
-        <p:spPr>
-          <a:xfrm>
-            <a:off x="6571336" y="4197096"/>
-            <a:ext cx="4687672" cy="384048"/>
+          <p:cNvPr id="15" name="Text 12"/>
+          <p:cNvSpPr/>
+          <p:nvPr/>
+        </p:nvSpPr>
+        <p:spPr>
+          <a:xfrm>
+            <a:off x="4875124" y="4219956"/>
+            <a:ext cx="2991460" cy="384048"/>
           </a:xfrm>
           <a:prstGeom prst="rect">
             <a:avLst/>
@@ -22265,14 +22288,14 @@
       </p:sp>
       <p:sp>
         <p:nvSpPr>
-          <p:cNvPr id="15" name="Text 13"/>
-          <p:cNvSpPr/>
-          <p:nvPr/>
-        </p:nvSpPr>
-        <p:spPr>
-          <a:xfrm>
-            <a:off x="6571336" y="4636008"/>
-            <a:ext cx="4687672" cy="978408"/>
+          <p:cNvPr id="16" name="Text 13"/>
+          <p:cNvSpPr/>
+          <p:nvPr/>
+        </p:nvSpPr>
+        <p:spPr>
+          <a:xfrm>
+            <a:off x="4875124" y="4658868"/>
+            <a:ext cx="2991460" cy="955548"/>
           </a:xfrm>
           <a:prstGeom prst="rect">
             <a:avLst/>
@@ -22307,7 +22330,7 @@
       </p:sp>
       <p:sp>
         <p:nvSpPr>
-          <p:cNvPr id="16" name="Text 14"/>
+          <p:cNvPr id="17" name="Text 14"/>
           <p:cNvSpPr/>
           <p:nvPr/>
         </p:nvSpPr>

--- a/黃家朗新人報告.pptx
+++ b/黃家朗新人報告.pptx
@@ -1033,7 +1033,11 @@
 下一頁之後講的內容，都是在這個前提下。
 我覺得這個組合對新人來說滿好的——
 寫教材讓我必須把一個主題徹底搞懂才寫得出來，
-上台試教則讓我馬上知道學員會在哪裡卡住。這兩件事是互相回饋的。</a:t>
+上台試教則讓我馬上知道學員會在哪裡卡住。這兩件事是互相回饋的。
+另外補充一下，這不是我第一次做 AI 培訓。
+我在台北數位廣告的時候就在策劃 AI 工具選用的內部課程，
+做過主流 AGI 工具的對比分析，也教過 Lovable 這類 prompt-driven 的開發工具。
+所以四門課的教材我不是從零摸索，是把做過的方法帶過來用。</a:t>
             </a:r>
             <a:endParaRPr lang="en-US" dirty="0"/>
           </a:p>
@@ -2632,7 +2636,14 @@
 因為我發現使用者常常不是不願意寫，是不知道該寫什麼。
 面對一份空白文件很痛苦，但回答問題容易多了。
 這個設計其實也回到我前面講的換位思考——
-我沒有假設使用者應該要會寫規格，而是設計成他不會也沒關係。</a:t>
+我沒有假設使用者應該要會寫規格，而是設計成他不會也沒關係。
+補充一件事：這個「反問」的做法不是我憑空想的。
+我在攸你資訊當 AI 提示工程師的時候，
+工作就是一個一個去訪談同事的工作流程、畫成流程圖，
+再為每個人客製他專用的指令集。
+那時候是我用人力在做這件事，一次只能服務一個人。
+PRD 機器人等於是把當年那套訪談流程自動化，
+讓它可以同時服務很多人，而且不需要我在場。</a:t>
             </a:r>
             <a:endParaRPr lang="en-US" dirty="0"/>
           </a:p>
@@ -2907,12 +2918,18 @@
           <a:p>
             <a:r>
               <a:rPr lang="en-US" dirty="0"/>
-              <a:t>先簡單介紹我自己。我是【待補：學校科系】畢業，
-進程曦之前有一段工作經驗，在【待補：前職】。
-我不是一畢業就做 AI 的，是工作一段時間之後才轉進 AI 跟教育訓練這個領域。
-這個轉職經驗對我現在的工作滿有幫助的，
+              <a:t>先簡單介紹我自己。
+我是清華大學科技管理學院學士班畢業，主修管理跟經濟雙專長。
+進程曦之前在台北數位廣告的產品企劃部擔任產品企劃專員。
+我不是一畢業就做 AI 的，是工作幾年之後才轉進 AI 跟教育訓練這個領域。
+這個轉職經驗對我現在的工作很有幫助，
 因為我很知道一個沒有技術背景的上班族，第一次接觸 AI 工具的時候會卡在哪裡——
-這剛好就是我現在在做的事：把 AI 工具教給不懂技術的人。</a:t>
+這剛好就是我現在在做的事：把 AI 工具教給不懂技術的人。
+興趣的部分，我喜歡音樂、攝影、旅行，也會主持 TRPG 跟寫遊戲劇本。
+最後一行想特別提一下：我在工作以外參與一個粉絲團體的營運，
+在那裡我一樣是用 AI 在解決問題——用 AI 輔助數據分析寫市場洞察報告，
+也建了客製化的術語庫來做字幕翻譯校對。
+我講這個是想說明，用 AI 解決問題對我來說不是工作要求，是習慣。</a:t>
             </a:r>
             <a:endParaRPr lang="en-US" dirty="0"/>
           </a:p>
@@ -3300,7 +3317,10 @@
 從題目發想、需求訪談，一路到上線跟維運，
 並且把那套方法真的用在第三、第四個專案上，驗證它站得住。
 長期三到五年，目標是成為能同時掌握對外課程產品跟對內系統落地的產品負責人，
-讓 AI 導入在公司裡變成一件標準的事，而不是每次都從零開始的個案。</a:t>
+讓 AI 導入在公司裡變成一件標準的事，而不是每次都從零開始的個案。
+這個長期目標其實跟我當初應徵時寫的一樣——
+我說我想為下一個十年的「辦公室 AI 化」做準備。
+四個多月下來我更確定這件事值得做，而且程曦是可以做這件事的地方。</a:t>
             </a:r>
             <a:endParaRPr lang="en-US" dirty="0"/>
           </a:p>
@@ -3397,6 +3417,10 @@
 第二個，建議各部門列一份自己每月重複作業的清單。
 神秘客這套流程本來不在任何待辦清單上，老實說是碰巧發現的。
 如果有這樣一份清單，我們部門就可以有系統地評估哪些該先做，而不是等人來說。
+這個做法我在前公司實際跑過——
+我在台北數位廣告導入 Notion 的時候，就是先盤點各部門重複的作業，
+再依需求建自動化工作流，最後把跨部門溝通耗時降了大約 35%。
+所以這不是我隨口提的想法，是驗證過會有效的做法。
 第三個，內部工具做完之後要有交接跟維護機制。
 我自己做完這兩套系統之後最擔心的就是這件事——
 系統上線只是開始，如果沒有指定的維護窗口跟使用說明，
@@ -3577,9 +3601,22 @@
           <a:p>
             <a:r>
               <a:rPr lang="en-US" dirty="0"/>
-              <a:t>這是我的工作歷程。
-【待補：這裡補一句前職在做什麼】。
-今年四月十號到職程曦，進創新研發部擔任產品工程師，到今天大概四個多月。</a:t>
+              <a:t>這是我的工作歷程，四個節點。
+2020 年我在攸你資訊當共同創辦人，負責一個叫 UniLife 的 APP，
+從功能設計到使用者旅程都是我做的，帶五個人的團隊，
+產品拿過 Appworks 加速器的投資，也入選教育部的 U-start。
+2024 年五月我回攸你資訊，職稱變成 AI 提示工程師——
+這是我第一次專職做 AI，用 Custom GPTs 幫同事做內部工具。
+2024 年十月到台北數位廣告當產品企劃專員，
+主要做前沿 AI 工具的調研跟內部培訓，測評過十幾款工具。
+今年四月十號到職程曦，到今天大概四個多月。
+各位可以看到這條線的方向：做產品、做 AI 工具、做 AI 培訓，
+到現在對外做課程、對內做系統，兩件事同時做。
+我現在的工作不是轉行，是這條線的延續。
+下面這句是我當初應徵程曦時寫在履歷上的：
+我想成為連結業務需求與工程開發的 AI 實踐者，
+為下一個十年的「辦公室 AI 化」做準備。
+這也是我這四個多月一直在做的事。</a:t>
             </a:r>
             <a:endParaRPr lang="en-US" dirty="0"/>
           </a:p>
@@ -3672,8 +3709,14 @@
 所以每一個特質我都直接配一件我真的做過的事。
 解決力：看到問題我的反應不是回報給主管就結束，是直接把工具做出來。
 自學力：那些系統用到的東西有很多我原本不會，我是靠 AI 工具邊做邊學做完的。
+到目前為止我摸過的生成式 AI 工具超過十款，現在還在自學 n8n 跟 Claude Skills。
 換位思考：等一下講的 PRD 機器人，核心就是先搞懂對方要什麼。
-系統思維跟交付到底，後面的成果會自己說明，這裡先不展開。</a:t>
+系統思維跟交付到底，後面的成果會自己說明，這裡先不展開。
+（如果被問到「這些是不是第一次做」，可以補：
+在攸你資訊我就在訪談每位同事的工作流程、畫流程圖，
+然後為他們客製指令集——PRD 機器人其實是把這件事自動化。
+在台北數位我導入過 Notion 建自動化工作流，
+把跨部門溝通耗時降了 35%，那跟神秘客系統是同一種思路。）</a:t>
             </a:r>
             <a:endParaRPr lang="en-US" dirty="0"/>
           </a:p>
@@ -21949,7 +21992,7 @@
               <a:buNone/>
             </a:pPr>
             <a:r>
-              <a:rPr lang="en-US" sz="1350" dirty="0">
+              <a:rPr lang="en-US" sz="1250" dirty="0">
                 <a:solidFill>
                   <a:srgbClr val="2B2D5C"/>
                 </a:solidFill>
@@ -21957,9 +22000,49 @@
                 <a:ea typeface="微軟正黑體" pitchFamily="34" charset="-122"/>
                 <a:cs typeface="微軟正黑體" pitchFamily="34" charset="-120"/>
               </a:rPr>
-              <a:t>【待補：學校／科系／畢業年】</a:t>
-            </a:r>
-            <a:endParaRPr lang="en-US" sz="1350" dirty="0"/>
+              <a:t>國立清華大學 科技管理學院學士班</a:t>
+            </a:r>
+            <a:endParaRPr lang="en-US" sz="1250" dirty="0"/>
+          </a:p>
+          <a:p>
+            <a:pPr indent="0" marL="0">
+              <a:lnSpc>
+                <a:spcPct val="125000"/>
+              </a:lnSpc>
+              <a:buNone/>
+            </a:pPr>
+            <a:r>
+              <a:rPr lang="en-US" sz="1250" dirty="0">
+                <a:solidFill>
+                  <a:srgbClr val="2B2D5C"/>
+                </a:solidFill>
+                <a:latin typeface="微軟正黑體" pitchFamily="34" charset="0"/>
+                <a:ea typeface="微軟正黑體" pitchFamily="34" charset="-122"/>
+                <a:cs typeface="微軟正黑體" pitchFamily="34" charset="-120"/>
+              </a:rPr>
+              <a:t>管理＋經濟雙專長</a:t>
+            </a:r>
+            <a:endParaRPr lang="en-US" sz="1250" dirty="0"/>
+          </a:p>
+          <a:p>
+            <a:pPr indent="0" marL="0">
+              <a:lnSpc>
+                <a:spcPct val="125000"/>
+              </a:lnSpc>
+              <a:buNone/>
+            </a:pPr>
+            <a:r>
+              <a:rPr lang="en-US" sz="1250" dirty="0">
+                <a:solidFill>
+                  <a:srgbClr val="2B2D5C"/>
+                </a:solidFill>
+                <a:latin typeface="微軟正黑體" pitchFamily="34" charset="0"/>
+                <a:ea typeface="微軟正黑體" pitchFamily="34" charset="-122"/>
+                <a:cs typeface="微軟正黑體" pitchFamily="34" charset="-120"/>
+              </a:rPr>
+              <a:t>2018.09 – 2023.06</a:t>
+            </a:r>
+            <a:endParaRPr lang="en-US" sz="1250" dirty="0"/>
           </a:p>
         </p:txBody>
       </p:sp>
@@ -22064,7 +22147,7 @@
               <a:buNone/>
             </a:pPr>
             <a:r>
-              <a:rPr lang="en-US" sz="1350" dirty="0">
+              <a:rPr lang="en-US" sz="1250" dirty="0">
                 <a:solidFill>
                   <a:srgbClr val="2B2D5C"/>
                 </a:solidFill>
@@ -22072,9 +22155,49 @@
                 <a:ea typeface="微軟正黑體" pitchFamily="34" charset="-122"/>
                 <a:cs typeface="微軟正黑體" pitchFamily="34" charset="-120"/>
               </a:rPr>
-              <a:t>【待補：公司／職稱】</a:t>
-            </a:r>
-            <a:endParaRPr lang="en-US" sz="1350" dirty="0"/>
+              <a:t>台北數位廣告股份有限公司</a:t>
+            </a:r>
+            <a:endParaRPr lang="en-US" sz="1250" dirty="0"/>
+          </a:p>
+          <a:p>
+            <a:pPr indent="0" marL="0">
+              <a:lnSpc>
+                <a:spcPct val="125000"/>
+              </a:lnSpc>
+              <a:buNone/>
+            </a:pPr>
+            <a:r>
+              <a:rPr lang="en-US" sz="1250" dirty="0">
+                <a:solidFill>
+                  <a:srgbClr val="2B2D5C"/>
+                </a:solidFill>
+                <a:latin typeface="微軟正黑體" pitchFamily="34" charset="0"/>
+                <a:ea typeface="微軟正黑體" pitchFamily="34" charset="-122"/>
+                <a:cs typeface="微軟正黑體" pitchFamily="34" charset="-120"/>
+              </a:rPr>
+              <a:t>產品企劃部｜產品企劃專員</a:t>
+            </a:r>
+            <a:endParaRPr lang="en-US" sz="1250" dirty="0"/>
+          </a:p>
+          <a:p>
+            <a:pPr indent="0" marL="0">
+              <a:lnSpc>
+                <a:spcPct val="125000"/>
+              </a:lnSpc>
+              <a:buNone/>
+            </a:pPr>
+            <a:r>
+              <a:rPr lang="en-US" sz="1250" dirty="0">
+                <a:solidFill>
+                  <a:srgbClr val="2B2D5C"/>
+                </a:solidFill>
+                <a:latin typeface="微軟正黑體" pitchFamily="34" charset="0"/>
+                <a:ea typeface="微軟正黑體" pitchFamily="34" charset="-122"/>
+                <a:cs typeface="微軟正黑體" pitchFamily="34" charset="-120"/>
+              </a:rPr>
+              <a:t>2024.10 – 2026.03</a:t>
+            </a:r>
+            <a:endParaRPr lang="en-US" sz="1250" dirty="0"/>
           </a:p>
         </p:txBody>
       </p:sp>
@@ -22179,7 +22302,7 @@
               <a:buNone/>
             </a:pPr>
             <a:r>
-              <a:rPr lang="en-US" sz="1350" dirty="0">
+              <a:rPr lang="en-US" sz="1250" dirty="0">
                 <a:solidFill>
                   <a:srgbClr val="2B2D5C"/>
                 </a:solidFill>
@@ -22189,7 +22312,7 @@
               </a:rPr>
               <a:t>程曦資訊整合股份有限公司</a:t>
             </a:r>
-            <a:endParaRPr lang="en-US" sz="1350" dirty="0"/>
+            <a:endParaRPr lang="en-US" sz="1250" dirty="0"/>
           </a:p>
           <a:p>
             <a:pPr indent="0" marL="0">
@@ -22199,7 +22322,7 @@
               <a:buNone/>
             </a:pPr>
             <a:r>
-              <a:rPr lang="en-US" sz="1350" dirty="0">
+              <a:rPr lang="en-US" sz="1250" dirty="0">
                 <a:solidFill>
                   <a:srgbClr val="2B2D5C"/>
                 </a:solidFill>
@@ -22209,7 +22332,27 @@
               </a:rPr>
               <a:t>創新研發部｜產品工程師</a:t>
             </a:r>
-            <a:endParaRPr lang="en-US" sz="1350" dirty="0"/>
+            <a:endParaRPr lang="en-US" sz="1250" dirty="0"/>
+          </a:p>
+          <a:p>
+            <a:pPr indent="0" marL="0">
+              <a:lnSpc>
+                <a:spcPct val="125000"/>
+              </a:lnSpc>
+              <a:buNone/>
+            </a:pPr>
+            <a:r>
+              <a:rPr lang="en-US" sz="1250" dirty="0">
+                <a:solidFill>
+                  <a:srgbClr val="2B2D5C"/>
+                </a:solidFill>
+                <a:latin typeface="微軟正黑體" pitchFamily="34" charset="0"/>
+                <a:ea typeface="微軟正黑體" pitchFamily="34" charset="-122"/>
+                <a:cs typeface="微軟正黑體" pitchFamily="34" charset="-120"/>
+              </a:rPr>
+              <a:t>2026.04 –</a:t>
+            </a:r>
+            <a:endParaRPr lang="en-US" sz="1250" dirty="0"/>
           </a:p>
         </p:txBody>
       </p:sp>
@@ -22314,7 +22457,7 @@
               <a:buNone/>
             </a:pPr>
             <a:r>
-              <a:rPr lang="en-US" sz="1350" dirty="0">
+              <a:rPr lang="en-US" sz="1250" dirty="0">
                 <a:solidFill>
                   <a:srgbClr val="2B2D5C"/>
                 </a:solidFill>
@@ -22322,9 +22465,49 @@
                 <a:ea typeface="微軟正黑體" pitchFamily="34" charset="-122"/>
                 <a:cs typeface="微軟正黑體" pitchFamily="34" charset="-120"/>
               </a:rPr>
-              <a:t>【待補：興趣】</a:t>
-            </a:r>
-            <a:endParaRPr lang="en-US" sz="1350" dirty="0"/>
+              <a:t>音樂（龐克搖滾／重金屬）、攝影、旅行</a:t>
+            </a:r>
+            <a:endParaRPr lang="en-US" sz="1250" dirty="0"/>
+          </a:p>
+          <a:p>
+            <a:pPr indent="0" marL="0">
+              <a:lnSpc>
+                <a:spcPct val="125000"/>
+              </a:lnSpc>
+              <a:buNone/>
+            </a:pPr>
+            <a:r>
+              <a:rPr lang="en-US" sz="1250" dirty="0">
+                <a:solidFill>
+                  <a:srgbClr val="2B2D5C"/>
+                </a:solidFill>
+                <a:latin typeface="微軟正黑體" pitchFamily="34" charset="0"/>
+                <a:ea typeface="微軟正黑體" pitchFamily="34" charset="-122"/>
+                <a:cs typeface="微軟正黑體" pitchFamily="34" charset="-120"/>
+              </a:rPr>
+              <a:t>TRPG 主持與劇本創作</a:t>
+            </a:r>
+            <a:endParaRPr lang="en-US" sz="1250" dirty="0"/>
+          </a:p>
+          <a:p>
+            <a:pPr indent="0" marL="0">
+              <a:lnSpc>
+                <a:spcPct val="125000"/>
+              </a:lnSpc>
+              <a:buNone/>
+            </a:pPr>
+            <a:r>
+              <a:rPr lang="en-US" sz="1250" dirty="0">
+                <a:solidFill>
+                  <a:srgbClr val="2B2D5C"/>
+                </a:solidFill>
+                <a:latin typeface="微軟正黑體" pitchFamily="34" charset="0"/>
+                <a:ea typeface="微軟正黑體" pitchFamily="34" charset="-122"/>
+                <a:cs typeface="微軟正黑體" pitchFamily="34" charset="-120"/>
+              </a:rPr>
+              <a:t>工作之外也用 AI 做數據分析與翻譯</a:t>
+            </a:r>
+            <a:endParaRPr lang="en-US" sz="1250" dirty="0"/>
           </a:p>
         </p:txBody>
       </p:sp>
@@ -25789,8 +25972,8 @@
         </p:nvSpPr>
         <p:spPr>
           <a:xfrm>
-            <a:off x="914400" y="3063240"/>
-            <a:ext cx="10362895" cy="41148"/>
+            <a:off x="960120" y="2816352"/>
+            <a:ext cx="10271455" cy="41148"/>
           </a:xfrm>
           <a:prstGeom prst="rect">
             <a:avLst/>
@@ -25809,8 +25992,8 @@
         </p:nvSpPr>
         <p:spPr>
           <a:xfrm>
-            <a:off x="2779776" y="2926080"/>
-            <a:ext cx="310896" cy="310896"/>
+            <a:off x="1857718" y="2688336"/>
+            <a:ext cx="301752" cy="301752"/>
           </a:xfrm>
           <a:prstGeom prst="ellipse">
             <a:avLst/>
@@ -25829,8 +26012,8 @@
         </p:nvSpPr>
         <p:spPr>
           <a:xfrm>
-            <a:off x="1097280" y="2240280"/>
-            <a:ext cx="3657600" cy="365760"/>
+            <a:off x="640080" y="2121408"/>
+            <a:ext cx="2727884" cy="384048"/>
           </a:xfrm>
           <a:prstGeom prst="rect">
             <a:avLst/>
@@ -25846,7 +26029,7 @@
               <a:buNone/>
             </a:pPr>
             <a:r>
-              <a:rPr lang="en-US" sz="1700" b="1" dirty="0">
+              <a:rPr lang="en-US" sz="1600" b="1" dirty="0">
                 <a:solidFill>
                   <a:srgbClr val="2B2D5C"/>
                 </a:solidFill>
@@ -25854,9 +26037,9 @@
                 <a:ea typeface="微軟正黑體" pitchFamily="34" charset="-122"/>
                 <a:cs typeface="微軟正黑體" pitchFamily="34" charset="-120"/>
               </a:rPr>
-              <a:t>【待補：年月】</a:t>
-            </a:r>
-            <a:endParaRPr lang="en-US" sz="1700" dirty="0"/>
+              <a:t>2020.05</a:t>
+            </a:r>
+            <a:endParaRPr lang="en-US" sz="1600" dirty="0"/>
           </a:p>
         </p:txBody>
       </p:sp>
@@ -25868,8 +26051,8 @@
         </p:nvSpPr>
         <p:spPr>
           <a:xfrm>
-            <a:off x="731520" y="3520440"/>
-            <a:ext cx="4389120" cy="402336"/>
+            <a:off x="640080" y="3108960"/>
+            <a:ext cx="2727884" cy="402336"/>
           </a:xfrm>
           <a:prstGeom prst="rect">
             <a:avLst/>
@@ -25893,7 +26076,7 @@
                 <a:ea typeface="微軟正黑體" pitchFamily="34" charset="-122"/>
                 <a:cs typeface="微軟正黑體" pitchFamily="34" charset="-120"/>
               </a:rPr>
-              <a:t>【待補：前職公司】</a:t>
+              <a:t>攸你資訊</a:t>
             </a:r>
             <a:endParaRPr lang="en-US" sz="1500" dirty="0"/>
           </a:p>
@@ -25907,24 +26090,66 @@
         </p:nvSpPr>
         <p:spPr>
           <a:xfrm>
-            <a:off x="731520" y="3913632"/>
-            <a:ext cx="4389120" cy="365760"/>
-          </a:xfrm>
-          <a:prstGeom prst="rect">
-            <a:avLst/>
-          </a:prstGeom>
-          <a:noFill/>
-          <a:ln/>
-        </p:spPr>
-        <p:txBody>
-          <a:bodyPr wrap="square" lIns="0" tIns="0" rIns="0" bIns="0" rtlCol="0" anchor="ctr"/>
+            <a:off x="731520" y="3511296"/>
+            <a:ext cx="2545004" cy="384048"/>
+          </a:xfrm>
+          <a:prstGeom prst="rect">
+            <a:avLst/>
+          </a:prstGeom>
+          <a:noFill/>
+          <a:ln/>
+        </p:spPr>
+        <p:txBody>
+          <a:bodyPr wrap="square" lIns="0" tIns="0" rIns="0" bIns="0" rtlCol="0" anchor="t"/>
           <a:lstStyle/>
           <a:p>
             <a:pPr algn="ctr" indent="0" marL="0">
               <a:buNone/>
             </a:pPr>
             <a:r>
-              <a:rPr lang="en-US" sz="1250" dirty="0">
+              <a:rPr lang="en-US" sz="1200" dirty="0">
+                <a:solidFill>
+                  <a:srgbClr val="4A4F7A"/>
+                </a:solidFill>
+                <a:latin typeface="微軟正黑體" pitchFamily="34" charset="0"/>
+                <a:ea typeface="微軟正黑體" pitchFamily="34" charset="-122"/>
+                <a:cs typeface="微軟正黑體" pitchFamily="34" charset="-120"/>
+              </a:rPr>
+              <a:t>共同創辦人／PM</a:t>
+            </a:r>
+            <a:endParaRPr lang="en-US" sz="1200" dirty="0"/>
+          </a:p>
+        </p:txBody>
+      </p:sp>
+      <p:sp>
+        <p:nvSpPr>
+          <p:cNvPr id="9" name="Text 7"/>
+          <p:cNvSpPr/>
+          <p:nvPr/>
+        </p:nvSpPr>
+        <p:spPr>
+          <a:xfrm>
+            <a:off x="731520" y="3950208"/>
+            <a:ext cx="2545004" cy="731520"/>
+          </a:xfrm>
+          <a:prstGeom prst="rect">
+            <a:avLst/>
+          </a:prstGeom>
+          <a:noFill/>
+          <a:ln/>
+        </p:spPr>
+        <p:txBody>
+          <a:bodyPr wrap="square" lIns="0" tIns="0" rIns="0" bIns="0" rtlCol="0" anchor="t"/>
+          <a:lstStyle/>
+          <a:p>
+            <a:pPr algn="ctr" indent="0" marL="0">
+              <a:lnSpc>
+                <a:spcPct val="125000"/>
+              </a:lnSpc>
+              <a:buNone/>
+            </a:pPr>
+            <a:r>
+              <a:rPr lang="en-US" sz="1150" dirty="0">
                 <a:solidFill>
                   <a:srgbClr val="6E7191"/>
                 </a:solidFill>
@@ -25932,22 +26157,440 @@
                 <a:ea typeface="微軟正黑體" pitchFamily="34" charset="-122"/>
                 <a:cs typeface="微軟正黑體" pitchFamily="34" charset="-120"/>
               </a:rPr>
-              <a:t>【待補：職稱】</a:t>
-            </a:r>
-            <a:endParaRPr lang="en-US" sz="1250" dirty="0"/>
-          </a:p>
-        </p:txBody>
-      </p:sp>
-      <p:sp>
-        <p:nvSpPr>
-          <p:cNvPr id="9" name="Shape 7"/>
-          <p:cNvSpPr/>
-          <p:nvPr/>
-        </p:nvSpPr>
-        <p:spPr>
-          <a:xfrm>
-            <a:off x="8631936" y="2926080"/>
-            <a:ext cx="310896" cy="310896"/>
+              <a:t>APP 產品從 0 到 1</a:t>
+            </a:r>
+            <a:endParaRPr lang="en-US" sz="1150" dirty="0"/>
+          </a:p>
+          <a:p>
+            <a:pPr algn="ctr" indent="0" marL="0">
+              <a:lnSpc>
+                <a:spcPct val="125000"/>
+              </a:lnSpc>
+              <a:buNone/>
+            </a:pPr>
+            <a:r>
+              <a:rPr lang="en-US" sz="1150" dirty="0">
+                <a:solidFill>
+                  <a:srgbClr val="6E7191"/>
+                </a:solidFill>
+                <a:latin typeface="微軟正黑體" pitchFamily="34" charset="0"/>
+                <a:ea typeface="微軟正黑體" pitchFamily="34" charset="-122"/>
+                <a:cs typeface="微軟正黑體" pitchFamily="34" charset="-120"/>
+              </a:rPr>
+              <a:t>領導 5 人團隊</a:t>
+            </a:r>
+            <a:endParaRPr lang="en-US" sz="1150" dirty="0"/>
+          </a:p>
+        </p:txBody>
+      </p:sp>
+      <p:sp>
+        <p:nvSpPr>
+          <p:cNvPr id="10" name="Shape 8"/>
+          <p:cNvSpPr/>
+          <p:nvPr/>
+        </p:nvSpPr>
+        <p:spPr>
+          <a:xfrm>
+            <a:off x="4585602" y="2688336"/>
+            <a:ext cx="301752" cy="301752"/>
+          </a:xfrm>
+          <a:prstGeom prst="ellipse">
+            <a:avLst/>
+          </a:prstGeom>
+          <a:solidFill>
+            <a:srgbClr val="AEB4E4"/>
+          </a:solidFill>
+          <a:ln/>
+        </p:spPr>
+      </p:sp>
+      <p:sp>
+        <p:nvSpPr>
+          <p:cNvPr id="11" name="Text 9"/>
+          <p:cNvSpPr/>
+          <p:nvPr/>
+        </p:nvSpPr>
+        <p:spPr>
+          <a:xfrm>
+            <a:off x="3367964" y="2121408"/>
+            <a:ext cx="2727884" cy="384048"/>
+          </a:xfrm>
+          <a:prstGeom prst="rect">
+            <a:avLst/>
+          </a:prstGeom>
+          <a:noFill/>
+          <a:ln/>
+        </p:spPr>
+        <p:txBody>
+          <a:bodyPr wrap="square" lIns="0" tIns="0" rIns="0" bIns="0" rtlCol="0" anchor="ctr"/>
+          <a:lstStyle/>
+          <a:p>
+            <a:pPr algn="ctr" indent="0" marL="0">
+              <a:buNone/>
+            </a:pPr>
+            <a:r>
+              <a:rPr lang="en-US" sz="1600" b="1" dirty="0">
+                <a:solidFill>
+                  <a:srgbClr val="2B2D5C"/>
+                </a:solidFill>
+                <a:latin typeface="微軟正黑體" pitchFamily="34" charset="0"/>
+                <a:ea typeface="微軟正黑體" pitchFamily="34" charset="-122"/>
+                <a:cs typeface="微軟正黑體" pitchFamily="34" charset="-120"/>
+              </a:rPr>
+              <a:t>2024.05</a:t>
+            </a:r>
+            <a:endParaRPr lang="en-US" sz="1600" dirty="0"/>
+          </a:p>
+        </p:txBody>
+      </p:sp>
+      <p:sp>
+        <p:nvSpPr>
+          <p:cNvPr id="12" name="Text 10"/>
+          <p:cNvSpPr/>
+          <p:nvPr/>
+        </p:nvSpPr>
+        <p:spPr>
+          <a:xfrm>
+            <a:off x="3367964" y="3108960"/>
+            <a:ext cx="2727884" cy="402336"/>
+          </a:xfrm>
+          <a:prstGeom prst="rect">
+            <a:avLst/>
+          </a:prstGeom>
+          <a:noFill/>
+          <a:ln/>
+        </p:spPr>
+        <p:txBody>
+          <a:bodyPr wrap="square" lIns="0" tIns="0" rIns="0" bIns="0" rtlCol="0" anchor="ctr"/>
+          <a:lstStyle/>
+          <a:p>
+            <a:pPr algn="ctr" indent="0" marL="0">
+              <a:buNone/>
+            </a:pPr>
+            <a:r>
+              <a:rPr lang="en-US" sz="1500" b="1" dirty="0">
+                <a:solidFill>
+                  <a:srgbClr val="2B2D5C"/>
+                </a:solidFill>
+                <a:latin typeface="微軟正黑體" pitchFamily="34" charset="0"/>
+                <a:ea typeface="微軟正黑體" pitchFamily="34" charset="-122"/>
+                <a:cs typeface="微軟正黑體" pitchFamily="34" charset="-120"/>
+              </a:rPr>
+              <a:t>攸你資訊</a:t>
+            </a:r>
+            <a:endParaRPr lang="en-US" sz="1500" dirty="0"/>
+          </a:p>
+        </p:txBody>
+      </p:sp>
+      <p:sp>
+        <p:nvSpPr>
+          <p:cNvPr id="13" name="Text 11"/>
+          <p:cNvSpPr/>
+          <p:nvPr/>
+        </p:nvSpPr>
+        <p:spPr>
+          <a:xfrm>
+            <a:off x="3459404" y="3511296"/>
+            <a:ext cx="2545004" cy="384048"/>
+          </a:xfrm>
+          <a:prstGeom prst="rect">
+            <a:avLst/>
+          </a:prstGeom>
+          <a:noFill/>
+          <a:ln/>
+        </p:spPr>
+        <p:txBody>
+          <a:bodyPr wrap="square" lIns="0" tIns="0" rIns="0" bIns="0" rtlCol="0" anchor="t"/>
+          <a:lstStyle/>
+          <a:p>
+            <a:pPr algn="ctr" indent="0" marL="0">
+              <a:buNone/>
+            </a:pPr>
+            <a:r>
+              <a:rPr lang="en-US" sz="1200" dirty="0">
+                <a:solidFill>
+                  <a:srgbClr val="4A4F7A"/>
+                </a:solidFill>
+                <a:latin typeface="微軟正黑體" pitchFamily="34" charset="0"/>
+                <a:ea typeface="微軟正黑體" pitchFamily="34" charset="-122"/>
+                <a:cs typeface="微軟正黑體" pitchFamily="34" charset="-120"/>
+              </a:rPr>
+              <a:t>PM／AI 提示工程師</a:t>
+            </a:r>
+            <a:endParaRPr lang="en-US" sz="1200" dirty="0"/>
+          </a:p>
+        </p:txBody>
+      </p:sp>
+      <p:sp>
+        <p:nvSpPr>
+          <p:cNvPr id="14" name="Text 12"/>
+          <p:cNvSpPr/>
+          <p:nvPr/>
+        </p:nvSpPr>
+        <p:spPr>
+          <a:xfrm>
+            <a:off x="3459404" y="3950208"/>
+            <a:ext cx="2545004" cy="731520"/>
+          </a:xfrm>
+          <a:prstGeom prst="rect">
+            <a:avLst/>
+          </a:prstGeom>
+          <a:noFill/>
+          <a:ln/>
+        </p:spPr>
+        <p:txBody>
+          <a:bodyPr wrap="square" lIns="0" tIns="0" rIns="0" bIns="0" rtlCol="0" anchor="t"/>
+          <a:lstStyle/>
+          <a:p>
+            <a:pPr algn="ctr" indent="0" marL="0">
+              <a:lnSpc>
+                <a:spcPct val="125000"/>
+              </a:lnSpc>
+              <a:buNone/>
+            </a:pPr>
+            <a:r>
+              <a:rPr lang="en-US" sz="1150" dirty="0">
+                <a:solidFill>
+                  <a:srgbClr val="6E7191"/>
+                </a:solidFill>
+                <a:latin typeface="微軟正黑體" pitchFamily="34" charset="0"/>
+                <a:ea typeface="微軟正黑體" pitchFamily="34" charset="-122"/>
+                <a:cs typeface="微軟正黑體" pitchFamily="34" charset="-120"/>
+              </a:rPr>
+              <a:t>用 Custom GPTs</a:t>
+            </a:r>
+            <a:endParaRPr lang="en-US" sz="1150" dirty="0"/>
+          </a:p>
+          <a:p>
+            <a:pPr algn="ctr" indent="0" marL="0">
+              <a:lnSpc>
+                <a:spcPct val="125000"/>
+              </a:lnSpc>
+              <a:buNone/>
+            </a:pPr>
+            <a:r>
+              <a:rPr lang="en-US" sz="1150" dirty="0">
+                <a:solidFill>
+                  <a:srgbClr val="6E7191"/>
+                </a:solidFill>
+                <a:latin typeface="微軟正黑體" pitchFamily="34" charset="0"/>
+                <a:ea typeface="微軟正黑體" pitchFamily="34" charset="-122"/>
+                <a:cs typeface="微軟正黑體" pitchFamily="34" charset="-120"/>
+              </a:rPr>
+              <a:t>做內部工具</a:t>
+            </a:r>
+            <a:endParaRPr lang="en-US" sz="1150" dirty="0"/>
+          </a:p>
+        </p:txBody>
+      </p:sp>
+      <p:sp>
+        <p:nvSpPr>
+          <p:cNvPr id="15" name="Shape 13"/>
+          <p:cNvSpPr/>
+          <p:nvPr/>
+        </p:nvSpPr>
+        <p:spPr>
+          <a:xfrm>
+            <a:off x="7313486" y="2688336"/>
+            <a:ext cx="301752" cy="301752"/>
+          </a:xfrm>
+          <a:prstGeom prst="ellipse">
+            <a:avLst/>
+          </a:prstGeom>
+          <a:solidFill>
+            <a:srgbClr val="AEB4E4"/>
+          </a:solidFill>
+          <a:ln/>
+        </p:spPr>
+      </p:sp>
+      <p:sp>
+        <p:nvSpPr>
+          <p:cNvPr id="16" name="Text 14"/>
+          <p:cNvSpPr/>
+          <p:nvPr/>
+        </p:nvSpPr>
+        <p:spPr>
+          <a:xfrm>
+            <a:off x="6095848" y="2121408"/>
+            <a:ext cx="2727884" cy="384048"/>
+          </a:xfrm>
+          <a:prstGeom prst="rect">
+            <a:avLst/>
+          </a:prstGeom>
+          <a:noFill/>
+          <a:ln/>
+        </p:spPr>
+        <p:txBody>
+          <a:bodyPr wrap="square" lIns="0" tIns="0" rIns="0" bIns="0" rtlCol="0" anchor="ctr"/>
+          <a:lstStyle/>
+          <a:p>
+            <a:pPr algn="ctr" indent="0" marL="0">
+              <a:buNone/>
+            </a:pPr>
+            <a:r>
+              <a:rPr lang="en-US" sz="1600" b="1" dirty="0">
+                <a:solidFill>
+                  <a:srgbClr val="2B2D5C"/>
+                </a:solidFill>
+                <a:latin typeface="微軟正黑體" pitchFamily="34" charset="0"/>
+                <a:ea typeface="微軟正黑體" pitchFamily="34" charset="-122"/>
+                <a:cs typeface="微軟正黑體" pitchFamily="34" charset="-120"/>
+              </a:rPr>
+              <a:t>2024.10</a:t>
+            </a:r>
+            <a:endParaRPr lang="en-US" sz="1600" dirty="0"/>
+          </a:p>
+        </p:txBody>
+      </p:sp>
+      <p:sp>
+        <p:nvSpPr>
+          <p:cNvPr id="17" name="Text 15"/>
+          <p:cNvSpPr/>
+          <p:nvPr/>
+        </p:nvSpPr>
+        <p:spPr>
+          <a:xfrm>
+            <a:off x="6095848" y="3108960"/>
+            <a:ext cx="2727884" cy="402336"/>
+          </a:xfrm>
+          <a:prstGeom prst="rect">
+            <a:avLst/>
+          </a:prstGeom>
+          <a:noFill/>
+          <a:ln/>
+        </p:spPr>
+        <p:txBody>
+          <a:bodyPr wrap="square" lIns="0" tIns="0" rIns="0" bIns="0" rtlCol="0" anchor="ctr"/>
+          <a:lstStyle/>
+          <a:p>
+            <a:pPr algn="ctr" indent="0" marL="0">
+              <a:buNone/>
+            </a:pPr>
+            <a:r>
+              <a:rPr lang="en-US" sz="1500" b="1" dirty="0">
+                <a:solidFill>
+                  <a:srgbClr val="2B2D5C"/>
+                </a:solidFill>
+                <a:latin typeface="微軟正黑體" pitchFamily="34" charset="0"/>
+                <a:ea typeface="微軟正黑體" pitchFamily="34" charset="-122"/>
+                <a:cs typeface="微軟正黑體" pitchFamily="34" charset="-120"/>
+              </a:rPr>
+              <a:t>台北數位廣告</a:t>
+            </a:r>
+            <a:endParaRPr lang="en-US" sz="1500" dirty="0"/>
+          </a:p>
+        </p:txBody>
+      </p:sp>
+      <p:sp>
+        <p:nvSpPr>
+          <p:cNvPr id="18" name="Text 16"/>
+          <p:cNvSpPr/>
+          <p:nvPr/>
+        </p:nvSpPr>
+        <p:spPr>
+          <a:xfrm>
+            <a:off x="6187288" y="3511296"/>
+            <a:ext cx="2545004" cy="384048"/>
+          </a:xfrm>
+          <a:prstGeom prst="rect">
+            <a:avLst/>
+          </a:prstGeom>
+          <a:noFill/>
+          <a:ln/>
+        </p:spPr>
+        <p:txBody>
+          <a:bodyPr wrap="square" lIns="0" tIns="0" rIns="0" bIns="0" rtlCol="0" anchor="t"/>
+          <a:lstStyle/>
+          <a:p>
+            <a:pPr algn="ctr" indent="0" marL="0">
+              <a:buNone/>
+            </a:pPr>
+            <a:r>
+              <a:rPr lang="en-US" sz="1200" dirty="0">
+                <a:solidFill>
+                  <a:srgbClr val="4A4F7A"/>
+                </a:solidFill>
+                <a:latin typeface="微軟正黑體" pitchFamily="34" charset="0"/>
+                <a:ea typeface="微軟正黑體" pitchFamily="34" charset="-122"/>
+                <a:cs typeface="微軟正黑體" pitchFamily="34" charset="-120"/>
+              </a:rPr>
+              <a:t>產品企劃專員</a:t>
+            </a:r>
+            <a:endParaRPr lang="en-US" sz="1200" dirty="0"/>
+          </a:p>
+        </p:txBody>
+      </p:sp>
+      <p:sp>
+        <p:nvSpPr>
+          <p:cNvPr id="19" name="Text 17"/>
+          <p:cNvSpPr/>
+          <p:nvPr/>
+        </p:nvSpPr>
+        <p:spPr>
+          <a:xfrm>
+            <a:off x="6187288" y="3950208"/>
+            <a:ext cx="2545004" cy="731520"/>
+          </a:xfrm>
+          <a:prstGeom prst="rect">
+            <a:avLst/>
+          </a:prstGeom>
+          <a:noFill/>
+          <a:ln/>
+        </p:spPr>
+        <p:txBody>
+          <a:bodyPr wrap="square" lIns="0" tIns="0" rIns="0" bIns="0" rtlCol="0" anchor="t"/>
+          <a:lstStyle/>
+          <a:p>
+            <a:pPr algn="ctr" indent="0" marL="0">
+              <a:lnSpc>
+                <a:spcPct val="125000"/>
+              </a:lnSpc>
+              <a:buNone/>
+            </a:pPr>
+            <a:r>
+              <a:rPr lang="en-US" sz="1150" dirty="0">
+                <a:solidFill>
+                  <a:srgbClr val="6E7191"/>
+                </a:solidFill>
+                <a:latin typeface="微軟正黑體" pitchFamily="34" charset="0"/>
+                <a:ea typeface="微軟正黑體" pitchFamily="34" charset="-122"/>
+                <a:cs typeface="微軟正黑體" pitchFamily="34" charset="-120"/>
+              </a:rPr>
+              <a:t>AI 工具調研</a:t>
+            </a:r>
+            <a:endParaRPr lang="en-US" sz="1150" dirty="0"/>
+          </a:p>
+          <a:p>
+            <a:pPr algn="ctr" indent="0" marL="0">
+              <a:lnSpc>
+                <a:spcPct val="125000"/>
+              </a:lnSpc>
+              <a:buNone/>
+            </a:pPr>
+            <a:r>
+              <a:rPr lang="en-US" sz="1150" dirty="0">
+                <a:solidFill>
+                  <a:srgbClr val="6E7191"/>
+                </a:solidFill>
+                <a:latin typeface="微軟正黑體" pitchFamily="34" charset="0"/>
+                <a:ea typeface="微軟正黑體" pitchFamily="34" charset="-122"/>
+                <a:cs typeface="微軟正黑體" pitchFamily="34" charset="-120"/>
+              </a:rPr>
+              <a:t>與內部培訓</a:t>
+            </a:r>
+            <a:endParaRPr lang="en-US" sz="1150" dirty="0"/>
+          </a:p>
+        </p:txBody>
+      </p:sp>
+      <p:sp>
+        <p:nvSpPr>
+          <p:cNvPr id="20" name="Shape 18"/>
+          <p:cNvSpPr/>
+          <p:nvPr/>
+        </p:nvSpPr>
+        <p:spPr>
+          <a:xfrm>
+            <a:off x="10041369" y="2688336"/>
+            <a:ext cx="301752" cy="301752"/>
           </a:xfrm>
           <a:prstGeom prst="ellipse">
             <a:avLst/>
@@ -25960,14 +26603,14 @@
       </p:sp>
       <p:sp>
         <p:nvSpPr>
-          <p:cNvPr id="10" name="Text 8"/>
-          <p:cNvSpPr/>
-          <p:nvPr/>
-        </p:nvSpPr>
-        <p:spPr>
-          <a:xfrm>
-            <a:off x="6949440" y="2240280"/>
-            <a:ext cx="3657600" cy="365760"/>
+          <p:cNvPr id="21" name="Text 19"/>
+          <p:cNvSpPr/>
+          <p:nvPr/>
+        </p:nvSpPr>
+        <p:spPr>
+          <a:xfrm>
+            <a:off x="8823731" y="2121408"/>
+            <a:ext cx="2727884" cy="384048"/>
           </a:xfrm>
           <a:prstGeom prst="rect">
             <a:avLst/>
@@ -25983,7 +26626,46 @@
               <a:buNone/>
             </a:pPr>
             <a:r>
-              <a:rPr lang="en-US" sz="1700" b="1" dirty="0">
+              <a:rPr lang="en-US" sz="1600" b="1" dirty="0">
+                <a:solidFill>
+                  <a:srgbClr val="D95F2B"/>
+                </a:solidFill>
+                <a:latin typeface="微軟正黑體" pitchFamily="34" charset="0"/>
+                <a:ea typeface="微軟正黑體" pitchFamily="34" charset="-122"/>
+                <a:cs typeface="微軟正黑體" pitchFamily="34" charset="-120"/>
+              </a:rPr>
+              <a:t>2026.04</a:t>
+            </a:r>
+            <a:endParaRPr lang="en-US" sz="1600" dirty="0"/>
+          </a:p>
+        </p:txBody>
+      </p:sp>
+      <p:sp>
+        <p:nvSpPr>
+          <p:cNvPr id="22" name="Text 20"/>
+          <p:cNvSpPr/>
+          <p:nvPr/>
+        </p:nvSpPr>
+        <p:spPr>
+          <a:xfrm>
+            <a:off x="8823731" y="3108960"/>
+            <a:ext cx="2727884" cy="402336"/>
+          </a:xfrm>
+          <a:prstGeom prst="rect">
+            <a:avLst/>
+          </a:prstGeom>
+          <a:noFill/>
+          <a:ln/>
+        </p:spPr>
+        <p:txBody>
+          <a:bodyPr wrap="square" lIns="0" tIns="0" rIns="0" bIns="0" rtlCol="0" anchor="ctr"/>
+          <a:lstStyle/>
+          <a:p>
+            <a:pPr algn="ctr" indent="0" marL="0">
+              <a:buNone/>
+            </a:pPr>
+            <a:r>
+              <a:rPr lang="en-US" sz="1500" b="1" dirty="0">
                 <a:solidFill>
                   <a:srgbClr val="2B2D5C"/>
                 </a:solidFill>
@@ -25991,77 +26673,80 @@
                 <a:ea typeface="微軟正黑體" pitchFamily="34" charset="-122"/>
                 <a:cs typeface="微軟正黑體" pitchFamily="34" charset="-120"/>
               </a:rPr>
-              <a:t>2026.04</a:t>
-            </a:r>
-            <a:endParaRPr lang="en-US" sz="1700" dirty="0"/>
-          </a:p>
-        </p:txBody>
-      </p:sp>
-      <p:sp>
-        <p:nvSpPr>
-          <p:cNvPr id="11" name="Text 9"/>
-          <p:cNvSpPr/>
-          <p:nvPr/>
-        </p:nvSpPr>
-        <p:spPr>
-          <a:xfrm>
-            <a:off x="6583680" y="3520440"/>
-            <a:ext cx="4389120" cy="402336"/>
-          </a:xfrm>
-          <a:prstGeom prst="rect">
-            <a:avLst/>
-          </a:prstGeom>
-          <a:noFill/>
-          <a:ln/>
-        </p:spPr>
-        <p:txBody>
-          <a:bodyPr wrap="square" lIns="0" tIns="0" rIns="0" bIns="0" rtlCol="0" anchor="ctr"/>
+              <a:t>程曦資訊</a:t>
+            </a:r>
+            <a:endParaRPr lang="en-US" sz="1500" dirty="0"/>
+          </a:p>
+        </p:txBody>
+      </p:sp>
+      <p:sp>
+        <p:nvSpPr>
+          <p:cNvPr id="23" name="Text 21"/>
+          <p:cNvSpPr/>
+          <p:nvPr/>
+        </p:nvSpPr>
+        <p:spPr>
+          <a:xfrm>
+            <a:off x="8915171" y="3511296"/>
+            <a:ext cx="2545004" cy="384048"/>
+          </a:xfrm>
+          <a:prstGeom prst="rect">
+            <a:avLst/>
+          </a:prstGeom>
+          <a:noFill/>
+          <a:ln/>
+        </p:spPr>
+        <p:txBody>
+          <a:bodyPr wrap="square" lIns="0" tIns="0" rIns="0" bIns="0" rtlCol="0" anchor="t"/>
           <a:lstStyle/>
           <a:p>
             <a:pPr algn="ctr" indent="0" marL="0">
               <a:buNone/>
             </a:pPr>
             <a:r>
-              <a:rPr lang="en-US" sz="1500" b="1" dirty="0">
-                <a:solidFill>
-                  <a:srgbClr val="2B2D5C"/>
-                </a:solidFill>
-                <a:latin typeface="微軟正黑體" pitchFamily="34" charset="0"/>
-                <a:ea typeface="微軟正黑體" pitchFamily="34" charset="-122"/>
-                <a:cs typeface="微軟正黑體" pitchFamily="34" charset="-120"/>
-              </a:rPr>
-              <a:t>程曦資訊整合股份有限公司</a:t>
-            </a:r>
-            <a:endParaRPr lang="en-US" sz="1500" dirty="0"/>
-          </a:p>
-        </p:txBody>
-      </p:sp>
-      <p:sp>
-        <p:nvSpPr>
-          <p:cNvPr id="12" name="Text 10"/>
-          <p:cNvSpPr/>
-          <p:nvPr/>
-        </p:nvSpPr>
-        <p:spPr>
-          <a:xfrm>
-            <a:off x="6583680" y="3913632"/>
-            <a:ext cx="4389120" cy="365760"/>
-          </a:xfrm>
-          <a:prstGeom prst="rect">
-            <a:avLst/>
-          </a:prstGeom>
-          <a:noFill/>
-          <a:ln/>
-        </p:spPr>
-        <p:txBody>
-          <a:bodyPr wrap="square" lIns="0" tIns="0" rIns="0" bIns="0" rtlCol="0" anchor="ctr"/>
+              <a:rPr lang="en-US" sz="1200" dirty="0">
+                <a:solidFill>
+                  <a:srgbClr val="4A4F7A"/>
+                </a:solidFill>
+                <a:latin typeface="微軟正黑體" pitchFamily="34" charset="0"/>
+                <a:ea typeface="微軟正黑體" pitchFamily="34" charset="-122"/>
+                <a:cs typeface="微軟正黑體" pitchFamily="34" charset="-120"/>
+              </a:rPr>
+              <a:t>創新研發部 產品工程師</a:t>
+            </a:r>
+            <a:endParaRPr lang="en-US" sz="1200" dirty="0"/>
+          </a:p>
+        </p:txBody>
+      </p:sp>
+      <p:sp>
+        <p:nvSpPr>
+          <p:cNvPr id="24" name="Text 22"/>
+          <p:cNvSpPr/>
+          <p:nvPr/>
+        </p:nvSpPr>
+        <p:spPr>
+          <a:xfrm>
+            <a:off x="8915171" y="3950208"/>
+            <a:ext cx="2545004" cy="731520"/>
+          </a:xfrm>
+          <a:prstGeom prst="rect">
+            <a:avLst/>
+          </a:prstGeom>
+          <a:noFill/>
+          <a:ln/>
+        </p:spPr>
+        <p:txBody>
+          <a:bodyPr wrap="square" lIns="0" tIns="0" rIns="0" bIns="0" rtlCol="0" anchor="t"/>
           <a:lstStyle/>
           <a:p>
             <a:pPr algn="ctr" indent="0" marL="0">
-              <a:buNone/>
-            </a:pPr>
-            <a:r>
-              <a:rPr lang="en-US" sz="1250" dirty="0">
+              <a:lnSpc>
+                <a:spcPct val="125000"/>
+              </a:lnSpc>
+              <a:buNone/>
+            </a:pPr>
+            <a:r>
+              <a:rPr lang="en-US" sz="1150" dirty="0">
                 <a:solidFill>
                   <a:srgbClr val="6E7191"/>
                 </a:solidFill>
@@ -26069,26 +26754,46 @@
                 <a:ea typeface="微軟正黑體" pitchFamily="34" charset="-122"/>
                 <a:cs typeface="微軟正黑體" pitchFamily="34" charset="-120"/>
               </a:rPr>
-              <a:t>創新研發部｜產品工程師</a:t>
-            </a:r>
-            <a:endParaRPr lang="en-US" sz="1250" dirty="0"/>
-          </a:p>
-        </p:txBody>
-      </p:sp>
-      <p:sp>
-        <p:nvSpPr>
-          <p:cNvPr id="13" name="Text 11"/>
-          <p:cNvSpPr/>
-          <p:nvPr/>
-        </p:nvSpPr>
-        <p:spPr>
-          <a:xfrm>
-            <a:off x="640080" y="4983480"/>
-            <a:ext cx="10911535" cy="621792"/>
+              <a:t>對外課程</a:t>
+            </a:r>
+            <a:endParaRPr lang="en-US" sz="1150" dirty="0"/>
+          </a:p>
+          <a:p>
+            <a:pPr algn="ctr" indent="0" marL="0">
+              <a:lnSpc>
+                <a:spcPct val="125000"/>
+              </a:lnSpc>
+              <a:buNone/>
+            </a:pPr>
+            <a:r>
+              <a:rPr lang="en-US" sz="1150" dirty="0">
+                <a:solidFill>
+                  <a:srgbClr val="6E7191"/>
+                </a:solidFill>
+                <a:latin typeface="微軟正黑體" pitchFamily="34" charset="0"/>
+                <a:ea typeface="微軟正黑體" pitchFamily="34" charset="-122"/>
+                <a:cs typeface="微軟正黑體" pitchFamily="34" charset="-120"/>
+              </a:rPr>
+              <a:t>＋ 對內系統</a:t>
+            </a:r>
+            <a:endParaRPr lang="en-US" sz="1150" dirty="0"/>
+          </a:p>
+        </p:txBody>
+      </p:sp>
+      <p:sp>
+        <p:nvSpPr>
+          <p:cNvPr id="25" name="Text 23"/>
+          <p:cNvSpPr/>
+          <p:nvPr/>
+        </p:nvSpPr>
+        <p:spPr>
+          <a:xfrm>
+            <a:off x="640080" y="4937760"/>
+            <a:ext cx="10911535" cy="713232"/>
           </a:xfrm>
           <a:prstGeom prst="roundRect">
             <a:avLst>
-              <a:gd name="adj" fmla="val 11765"/>
+              <a:gd name="adj" fmla="val 10256"/>
             </a:avLst>
           </a:prstGeom>
           <a:solidFill>
@@ -26112,7 +26817,7 @@
                 <a:ea typeface="微軟正黑體" pitchFamily="34" charset="-122"/>
                 <a:cs typeface="微軟正黑體" pitchFamily="34" charset="-120"/>
               </a:rPr>
-              <a:t>轉職動機：從【待補：前職領域】轉進 AI／教育訓練領域</a:t>
+              <a:t>轉職動機：成為連結業務需求與工程開發的 AI 實踐者，為下一個十年的「辦公室 AI 化」做準備。</a:t>
             </a:r>
             <a:endParaRPr lang="en-US" sz="1500" dirty="0"/>
           </a:p>
@@ -26120,7 +26825,7 @@
       </p:sp>
       <p:sp>
         <p:nvSpPr>
-          <p:cNvPr id="14" name="Text 12"/>
+          <p:cNvPr id="26" name="Text 24"/>
           <p:cNvSpPr/>
           <p:nvPr/>
         </p:nvSpPr>

--- a/黃家朗新人報告.pptx
+++ b/黃家朗新人報告.pptx
@@ -5,7 +5,7 @@
     <p:sldMasterId id="2147483648" r:id="rId1"/>
   </p:sldMasterIdLst>
   <p:notesMasterIdLst>
-    <p:notesMasterId r:id="rId28"/>
+    <p:notesMasterId r:id="rId31"/>
   </p:notesMasterIdLst>
   <p:sldIdLst>
     <p:sldId id="256" r:id="rId2"/>
@@ -31,12 +31,10 @@
     <p:sldId id="281" r:id="rId22"/>
     <p:sldId id="282" r:id="rId23"/>
     <p:sldId id="287" r:id="rId24"/>
-    <p:sldId id="295" r:id="rId35"/>
-    <p:sldId id="294" r:id="rId34"/>
-    <p:sldId id="293" r:id="rId33"/>
-    <p:sldId id="288" r:id="rId25"/>
-    <p:sldId id="289" r:id="rId26"/>
-    <p:sldId id="290" r:id="rId27"/>
+    <p:sldId id="297" r:id="rId37"/>
+    <p:sldId id="296" r:id="rId36"/>
+    <p:sldId id="289" r:id="rId29"/>
+    <p:sldId id="290" r:id="rId30"/>
   </p:sldIdLst>
   <p:sldSz cx="12192000" cy="6858000"/>
   <p:notesSz cx="6858000" cy="12192000"/>
@@ -847,15 +845,13 @@
               <a:rPr lang="en-US"/>
               <a:t>第四門是 AI 輔助 vibe-coding 程式開發。
 這門課我負責現場教學、案例講解跟簡報內容製作。
-主題是零基礎的人怎麼用 GPT 這類線上大語言模型，
-開發網頁的前後端。
+主題是零基礎的人怎麼用 GPT 這類線上大語言模型，開發網頁的前後端。
 規模是四門課裡最大的：預計十六小時，教材四百多頁，
 涵蓋 Codex、Claude Code、VS Code、GitHub 這些工具的混合實戰操作。
-左邊這張是教材裡的一個實際案例，
-比較地端跟雲端架構的差異——
+左邊這張是教材裡的一個實際案例，比較地端跟雲端架構的差異——
 因為學員要真的把東西部署出去，這一段不能跳過。
-這門課對我個人的意義我等一下講困難的時候會提到：
-我自己開發神秘客系統跟 PRD 機器人用的就是這套方法。</a:t>
+這門課對我個人的意義，等一下講困難的時候會提到：
+我自己開發神秘客系統跟 PRD 機器人，用的就是這套方法。</a:t>
             </a:fld>
             <a:endParaRPr lang="en-US"/>
           </a:p>
@@ -1765,404 +1761,11 @@
           <a:p>
             <a:r>
               <a:rPr lang="en-US" dirty="0"/>
-              <a:t>接下來這一章，我想講的跟前面不一樣。
-前面二十幾頁講的都是「我做到了什麼」，
-但我自己覺得，更值得講的是「過程中我卡在哪、後來怎麼過去的」。
-接下來三頁，一頁一個困難。
-我盡量誠實講，包括我一開始有多不會。</a:t>
-            </a:r>
-          </a:p>
-        </p:txBody>
-      </p:sp>
-      <p:sp>
-        <p:nvSpPr>
-          <p:cNvPr id="4" name="Slide Number Placeholder 3"/>
-          <p:cNvSpPr>
-            <a:spLocks noGrp="1"/>
-          </p:cNvSpPr>
-          <p:nvPr>
-            <p:ph type="sldNum" sz="quarter" idx="10"/>
-          </p:nvPr>
-        </p:nvSpPr>
-        <p:spPr/>
-        <p:txBody>
-          <a:bodyPr/>
-          <a:lstStyle/>
-          <a:p>
-            <a:fld id="{F7021451-1387-4CA6-816F-3879F97B5CBC}" type="slidenum">
-              <a:rPr lang="en-US"/>
-              <a:t>23</a:t>
-            </a:fld>
-            <a:endParaRPr lang="en-US"/>
-          </a:p>
-        </p:txBody>
-      </p:sp>
-    </p:spTree>
-    <p:extLst>
-      <p:ext uri="{BB962C8B-B14F-4D97-AF65-F5344CB8AC3E}">
-        <p14:creationId xmlns:p14="http://schemas.microsoft.com/office/powerpoint/2010/main" val="1024086991"/>
-      </p:ext>
-    </p:extLst>
-  </p:cSld>
-  <p:clrMapOvr>
-    <a:masterClrMapping/>
-  </p:clrMapOvr>
-</p:notes>
-</file>
-
-<file path=ppt/notesSlides/notesSlide24.xml><?xml version="1.0" encoding="utf-8"?>
-<p:notes xmlns:a="http://schemas.openxmlformats.org/drawingml/2006/main" xmlns:r="http://schemas.openxmlformats.org/officeDocument/2006/relationships" xmlns:p="http://schemas.openxmlformats.org/presentationml/2006/main">
-  <p:cSld>
-    <p:spTree>
-      <p:nvGrpSpPr>
-        <p:cNvPr id="1" name=""/>
-        <p:cNvGrpSpPr/>
-        <p:nvPr/>
-      </p:nvGrpSpPr>
-      <p:grpSpPr>
-        <a:xfrm>
-          <a:off x="0" y="0"/>
-          <a:ext cx="0" cy="0"/>
-          <a:chOff x="0" y="0"/>
-          <a:chExt cx="0" cy="0"/>
-        </a:xfrm>
-      </p:grpSpPr>
-      <p:sp>
-        <p:nvSpPr>
-          <p:cNvPr id="2" name="Slide Image Placeholder 1"/>
-          <p:cNvSpPr>
-            <a:spLocks noGrp="1" noRot="1" noChangeAspect="1"/>
-          </p:cNvSpPr>
-          <p:nvPr>
-            <p:ph type="sldImg"/>
-          </p:nvPr>
-        </p:nvSpPr>
-        <p:spPr/>
-      </p:sp>
-      <p:sp>
-        <p:nvSpPr>
-          <p:cNvPr id="3" name="Notes Placeholder 2"/>
-          <p:cNvSpPr>
-            <a:spLocks noGrp="1"/>
-          </p:cNvSpPr>
-          <p:nvPr>
-            <p:ph type="body" idx="1"/>
-          </p:nvPr>
-        </p:nvSpPr>
-        <p:spPr/>
-        <p:txBody>
-          <a:bodyPr/>
-          <a:lstStyle/>
-          <a:p>
-            <a:r>
-              <a:rPr lang="en-US" dirty="0"/>
-              <a:t>職涯規劃分短中長期。
-短期半年有四件事。
-第一，我想持續主動去探索 AI 的新工具跟新做法。
-這個領域變得很快，我不想只會我現在會的這些。
-第二，把手上這兩套工具從「能用」做到「穩定」——
-權限、資料、錯誤處理、維運，這些現在都還不夠硬。
-第三，對外課程正式開賣之後，我希望能擔任主力講師，
-並且把教材推到定稿。
-第四，開始把這兩個專案的經驗沉澱成可複製的方法。
-中期一年，我希望能獨立負責一條完整的產品線，
-從題目發想、需求訪談，一路到上線跟維運，
-並且把那套方法真的用在第三、第四個專案上，驗證它站得住。
-長期三到五年，目標是成為能同時掌握對外課程產品跟對內系統落地的產品負責人，
-讓 AI 導入在公司裡變成一件標準的事，而不是每次都從零開始的個案。
-這個長期目標其實跟我當初應徵時寫的一樣——
-我說我想為下一個十年的「辦公室 AI 化」做準備。
-四個多月下來我更確定這件事值得做，而且程曦是可以做這件事的地方。</a:t>
-            </a:r>
-          </a:p>
-        </p:txBody>
-      </p:sp>
-      <p:sp>
-        <p:nvSpPr>
-          <p:cNvPr id="4" name="Slide Number Placeholder 3"/>
-          <p:cNvSpPr>
-            <a:spLocks noGrp="1"/>
-          </p:cNvSpPr>
-          <p:nvPr>
-            <p:ph type="sldNum" sz="quarter" idx="10"/>
-          </p:nvPr>
-        </p:nvSpPr>
-        <p:spPr/>
-        <p:txBody>
-          <a:bodyPr/>
-          <a:lstStyle/>
-          <a:p>
-            <a:fld id="{F7021451-1387-4CA6-816F-3879F97B5CBC}" type="slidenum">
-              <a:rPr lang="en-US"/>
-              <a:t>24</a:t>
-            </a:fld>
-            <a:endParaRPr lang="en-US"/>
-          </a:p>
-        </p:txBody>
-      </p:sp>
-    </p:spTree>
-    <p:extLst>
-      <p:ext uri="{BB962C8B-B14F-4D97-AF65-F5344CB8AC3E}">
-        <p14:creationId xmlns:p14="http://schemas.microsoft.com/office/powerpoint/2010/main" val="1024086991"/>
-      </p:ext>
-    </p:extLst>
-  </p:cSld>
-  <p:clrMapOvr>
-    <a:masterClrMapping/>
-  </p:clrMapOvr>
-</p:notes>
-</file>
-
-<file path=ppt/notesSlides/notesSlide25.xml><?xml version="1.0" encoding="utf-8"?>
-<p:notes xmlns:a="http://schemas.openxmlformats.org/drawingml/2006/main" xmlns:r="http://schemas.openxmlformats.org/officeDocument/2006/relationships" xmlns:p="http://schemas.openxmlformats.org/presentationml/2006/main">
-  <p:cSld>
-    <p:spTree>
-      <p:nvGrpSpPr>
-        <p:cNvPr id="1" name=""/>
-        <p:cNvGrpSpPr/>
-        <p:nvPr/>
-      </p:nvGrpSpPr>
-      <p:grpSpPr>
-        <a:xfrm>
-          <a:off x="0" y="0"/>
-          <a:ext cx="0" cy="0"/>
-          <a:chOff x="0" y="0"/>
-          <a:chExt cx="0" cy="0"/>
-        </a:xfrm>
-      </p:grpSpPr>
-      <p:sp>
-        <p:nvSpPr>
-          <p:cNvPr id="2" name="Slide Image Placeholder 1"/>
-          <p:cNvSpPr>
-            <a:spLocks noGrp="1" noRot="1" noChangeAspect="1"/>
-          </p:cNvSpPr>
-          <p:nvPr>
-            <p:ph type="sldImg"/>
-          </p:nvPr>
-        </p:nvSpPr>
-        <p:spPr/>
-      </p:sp>
-      <p:sp>
-        <p:nvSpPr>
-          <p:cNvPr id="3" name="Notes Placeholder 2"/>
-          <p:cNvSpPr>
-            <a:spLocks noGrp="1"/>
-          </p:cNvSpPr>
-          <p:nvPr>
-            <p:ph type="body" idx="1"/>
-          </p:nvPr>
-        </p:nvSpPr>
-        <p:spPr/>
-        <p:txBody>
-          <a:bodyPr/>
-          <a:lstStyle/>
-          <a:p>
-            <a:r>
-              <a:rPr lang="en-US" dirty="0"/>
-              <a:t>最後是給公司的三個建議，主題是新人入職跟知識傳承。
-第一個，新人報告的目標建議由主管跟新人一起確認。
-我理解目前的十二週目標表是為了讓新人有依循，
-但它是所有新人共用的版本，跟實際派的工作常常會有落差。
-我的建議是到職第一週由主管跟新人一起確認個人化的目標，中間再對一次，
-這樣新人會更清楚自己被期待什麼。
-第二個，建議各部門列一份自己每月重複作業的清單。
-神秘客這套流程本來不在任何待辦清單上，老實說是碰巧發現的。
-如果有這樣一份清單，我們部門就可以有系統地評估哪些該先做，而不是等人來說。
-這個做法我在前公司實際跑過——
-我在台北數位廣告導入 Notion 的時候，就是先盤點各部門重複的作業，
-再依需求建自動化工作流，最後把跨部門溝通耗時降了大約 35%。
-所以這不是我隨口提的想法，是驗證過會有效的做法。
-第三個，內部工具做完之後要有交接跟維護機制。
-我自己做完這兩套系統之後最擔心的就是這件事——
-系統上線只是開始，如果沒有指定的維護窗口跟使用說明，
-它遲早會變成只有我看得懂的黑箱。</a:t>
-            </a:r>
-          </a:p>
-        </p:txBody>
-      </p:sp>
-      <p:sp>
-        <p:nvSpPr>
-          <p:cNvPr id="4" name="Slide Number Placeholder 3"/>
-          <p:cNvSpPr>
-            <a:spLocks noGrp="1"/>
-          </p:cNvSpPr>
-          <p:nvPr>
-            <p:ph type="sldNum" sz="quarter" idx="10"/>
-          </p:nvPr>
-        </p:nvSpPr>
-        <p:spPr/>
-        <p:txBody>
-          <a:bodyPr/>
-          <a:lstStyle/>
-          <a:p>
-            <a:fld id="{F7021451-1387-4CA6-816F-3879F97B5CBC}" type="slidenum">
-              <a:rPr lang="en-US"/>
-              <a:t>25</a:t>
-            </a:fld>
-            <a:endParaRPr lang="en-US"/>
-          </a:p>
-        </p:txBody>
-      </p:sp>
-    </p:spTree>
-    <p:extLst>
-      <p:ext uri="{BB962C8B-B14F-4D97-AF65-F5344CB8AC3E}">
-        <p14:creationId xmlns:p14="http://schemas.microsoft.com/office/powerpoint/2010/main" val="1024086991"/>
-      </p:ext>
-    </p:extLst>
-  </p:cSld>
-  <p:clrMapOvr>
-    <a:masterClrMapping/>
-  </p:clrMapOvr>
-</p:notes>
-</file>
-
-<file path=ppt/notesSlides/notesSlide26.xml><?xml version="1.0" encoding="utf-8"?>
-<p:notes xmlns:a="http://schemas.openxmlformats.org/drawingml/2006/main" xmlns:r="http://schemas.openxmlformats.org/officeDocument/2006/relationships" xmlns:p="http://schemas.openxmlformats.org/presentationml/2006/main">
-  <p:cSld>
-    <p:spTree>
-      <p:nvGrpSpPr>
-        <p:cNvPr id="1" name=""/>
-        <p:cNvGrpSpPr/>
-        <p:nvPr/>
-      </p:nvGrpSpPr>
-      <p:grpSpPr>
-        <a:xfrm>
-          <a:off x="0" y="0"/>
-          <a:ext cx="0" cy="0"/>
-          <a:chOff x="0" y="0"/>
-          <a:chExt cx="0" cy="0"/>
-        </a:xfrm>
-      </p:grpSpPr>
-      <p:sp>
-        <p:nvSpPr>
-          <p:cNvPr id="2" name="Slide Image Placeholder 1"/>
-          <p:cNvSpPr>
-            <a:spLocks noGrp="1" noRot="1" noChangeAspect="1"/>
-          </p:cNvSpPr>
-          <p:nvPr>
-            <p:ph type="sldImg"/>
-          </p:nvPr>
-        </p:nvSpPr>
-        <p:spPr/>
-      </p:sp>
-      <p:sp>
-        <p:nvSpPr>
-          <p:cNvPr id="3" name="Notes Placeholder 2"/>
-          <p:cNvSpPr>
-            <a:spLocks noGrp="1"/>
-          </p:cNvSpPr>
-          <p:nvPr>
-            <p:ph type="body" idx="1"/>
-          </p:nvPr>
-        </p:nvSpPr>
-        <p:spPr/>
-        <p:txBody>
-          <a:bodyPr/>
-          <a:lstStyle/>
-          <a:p>
-            <a:r>
-              <a:rPr lang="en-US" dirty="0"/>
-              <a:t>以上就是我這四個多月的報告，謝謝各位的聆聽。
-有任何問題都歡迎提出。</a:t>
-            </a:r>
-          </a:p>
-        </p:txBody>
-      </p:sp>
-      <p:sp>
-        <p:nvSpPr>
-          <p:cNvPr id="4" name="Slide Number Placeholder 3"/>
-          <p:cNvSpPr>
-            <a:spLocks noGrp="1"/>
-          </p:cNvSpPr>
-          <p:nvPr>
-            <p:ph type="sldNum" sz="quarter" idx="10"/>
-          </p:nvPr>
-        </p:nvSpPr>
-        <p:spPr/>
-        <p:txBody>
-          <a:bodyPr/>
-          <a:lstStyle/>
-          <a:p>
-            <a:fld id="{F7021451-1387-4CA6-816F-3879F97B5CBC}" type="slidenum">
-              <a:rPr lang="en-US"/>
-              <a:t>26</a:t>
-            </a:fld>
-            <a:endParaRPr lang="en-US"/>
-          </a:p>
-        </p:txBody>
-      </p:sp>
-    </p:spTree>
-    <p:extLst>
-      <p:ext uri="{BB962C8B-B14F-4D97-AF65-F5344CB8AC3E}">
-        <p14:creationId xmlns:p14="http://schemas.microsoft.com/office/powerpoint/2010/main" val="1024086991"/>
-      </p:ext>
-    </p:extLst>
-  </p:cSld>
-  <p:clrMapOvr>
-    <a:masterClrMapping/>
-  </p:clrMapOvr>
-</p:notes>
-</file>
-
-<file path=ppt/notesSlides/notesSlide27.xml><?xml version="1.0" encoding="utf-8"?>
-<p:notes xmlns:a="http://schemas.openxmlformats.org/drawingml/2006/main" xmlns:r="http://schemas.openxmlformats.org/officeDocument/2006/relationships" xmlns:p="http://schemas.openxmlformats.org/presentationml/2006/main">
-  <p:cSld>
-    <p:spTree>
-      <p:nvGrpSpPr>
-        <p:cNvPr id="1" name=""/>
-        <p:cNvGrpSpPr/>
-        <p:nvPr/>
-      </p:nvGrpSpPr>
-      <p:grpSpPr>
-        <a:xfrm>
-          <a:off x="0" y="0"/>
-          <a:ext cx="0" cy="0"/>
-          <a:chOff x="0" y="0"/>
-          <a:chExt cx="0" cy="0"/>
-        </a:xfrm>
-      </p:grpSpPr>
-      <p:sp>
-        <p:nvSpPr>
-          <p:cNvPr id="2" name="Slide Image Placeholder 1"/>
-          <p:cNvSpPr>
-            <a:spLocks noGrp="1" noRot="1" noChangeAspect="1"/>
-          </p:cNvSpPr>
-          <p:nvPr>
-            <p:ph type="sldImg"/>
-          </p:nvPr>
-        </p:nvSpPr>
-        <p:spPr/>
-      </p:sp>
-      <p:sp>
-        <p:nvSpPr>
-          <p:cNvPr id="3" name="Notes Placeholder 2"/>
-          <p:cNvSpPr>
-            <a:spLocks noGrp="1"/>
-          </p:cNvSpPr>
-          <p:nvPr>
-            <p:ph type="body" idx="1"/>
-          </p:nvPr>
-        </p:nvSpPr>
-        <p:spPr/>
-        <p:txBody>
-          <a:bodyPr/>
-          <a:lstStyle/>
-          <a:p>
-            <a:r>
-              <a:rPr lang="en-US" dirty="0"/>
-              <a:t>這一段我想講的不是公司派給我的任務，是我自己撞到的牆。
-第一個困難最實在：我不會的東西比我以為的多。
-我進來之前做過產品、也用過不少 AI 工具，
-以為開發一套內部系統應該不會太難。
-結果第一個月，我連 GitLab、PR、merge 這些協作的基本概念都不熟。
-卡住我的不是寫不出功能，是連怎麼把東西交出去、
-怎麼跟別人的版本合併，都要從頭學。
-我的處理方式很土法煉鋼：沒有停下專案去上一套完整的課，
-而是邊做邊補，每次卡住就查、就問、就試，
-把每一次卡關當成一次補課。
-四個多月後，神秘客評分系統從無到有完成並正式上線。
-我覺得我真正學到的不是 Git 指令——那些查得到。
-是「遇到完全不會的東西時，怎麼在不停下專案的前提下把它補起來」。</a:t>
+              <a:t>接下來這一章，我用 4F 的架構回顧這四個多月。
+Facts 是實際發生了什麼，Feelings 是過程中的感受，
+Findings 是我從中發現了什麼，Future 是接下來要怎麼做。
+先說結論：這四個多月最大的意義，是我第一次完整走完從需求到上線的流程。
+前面講的都是「做到了什麼」，這一章我想講的是「我自己變成什麼樣子」。</a:t>
             </a:r>
           </a:p>
         </p:txBody>
@@ -2249,22 +1852,23 @@
           <a:p>
             <a:r>
               <a:rPr lang="en-US" dirty="0"/>
-              <a:t>第二個困難是我覺得最難講、但也最重要的一個。
-做 PRD 機器人的時候，我常常看得出來 AI 給的結果很差，
-但我講不出為什麼差。
-講不出為什麼差，就不知道要改哪裡，
-所以我那時候的做法其實就是一直重新生成——說白了是在碰運氣。
-後來我意識到問題不在 AI，在我自己少了一套判斷的語言。
-所以我回頭去補模型本身的原理：
-生圖那邊我去讀生成模型怎麼理解描述、提示詞的結構怎麼影響結果；
-文字這邊我拆解它問了什麼、漏了什麼。
-目的是把「感覺不對」翻譯成「具體哪一段不對」。
-我從這件事學到的是：
-跟 AI 一起工作，真正的門檻不是會不會下指令，
-是能不能判斷它給的東西對不對。
-這也直接變成我教材的核心——
-AI 圖片生成課我刻意不給一堆可以複製的提示詞範本，
-而是教怎麼描述、怎麼修正。因為範本會過期，方法不會。</a:t>
+              <a:t>最後是給公司的三個建議，主題是新人入職跟知識傳承。
+第一個，新人報告的目標建議由主管跟新人一起確認。
+我理解目前的十二週目標表是為了讓新人有依循，
+但它是所有新人共用的版本，跟實際派的工作常常會有落差。
+我的建議是到職第一週由主管跟新人一起確認個人化的目標，中間再對一次，
+這樣新人會更清楚自己被期待什麼。
+第二個，建議各部門列一份自己每月重複作業的清單。
+神秘客這套流程本來不在任何待辦清單上，老實說是碰巧發現的。
+如果有這樣一份清單，我們部門就可以有系統地評估哪些該先做，而不是等人來說。
+這個做法我在前公司實際跑過——
+我在台北數位廣告導入 Notion 的時候，就是先盤點各部門重複的作業，
+再依需求建自動化工作流，最後把跨部門溝通耗時降了大約 35%。
+所以這不是我隨口提的想法，是驗證過會有效的做法。
+第三個，內部工具做完之後要有交接跟維護機制。
+我自己做完這兩套系統之後最擔心的就是這件事——
+系統上線只是開始，如果沒有指定的維護窗口跟使用說明，
+它遲早會變成只有我看得懂的黑箱。</a:t>
             </a:r>
           </a:p>
         </p:txBody>
@@ -2286,7 +1890,7 @@
           <a:p>
             <a:fld id="{F7021451-1387-4CA6-816F-3879F97B5CBC}" type="slidenum">
               <a:rPr lang="en-US"/>
-              <a:t>23</a:t>
+              <a:t>28</a:t>
             </a:fld>
             <a:endParaRPr lang="en-US"/>
           </a:p>
@@ -2351,23 +1955,8 @@
           <a:p>
             <a:r>
               <a:rPr lang="en-US" dirty="0"/>
-              <a:t>第三個困難不是技術問題，是思維上的。
-我原本以為需求文件寫什麼，我就照著做什麼。
-但實際上，向解題小組提需求的人，
-常常沒辦法解釋清楚自己真正卡在哪裡。
-最好的例子是神秘客系統的申覆功能——
-它不在任何一份需求文件上，
-是我把整個流程走過一遍之後，才發現這個非做不可。
-如果我只照文件做，那個功能就不會存在。
-所以我的做法變成先去理解業務，再定規格。
-後來乾脆把這件事本身做成工具，那就是 PRD 機器人——
-用大量反問，幫人把說不清楚的想法問出來。
-我學到的是：需求文件是討論的結果，不是起點。
-而且東西做完不等於結束。
-最後補一句：這四個多月我補的這些東西，
-沒有一項是有人要求我去學的。
-我下班後也在用 AI 幫自己開發 TRPG 的規則書。
-對我來說，用 AI 解決問題不是工作要求，是習慣。</a:t>
+              <a:t>以上就是我這四個多月的報告，謝謝各位的聆聽。
+有任何問題都歡迎提出。</a:t>
             </a:r>
           </a:p>
         </p:txBody>
@@ -2389,7 +1978,7 @@
           <a:p>
             <a:fld id="{F7021451-1387-4CA6-816F-3879F97B5CBC}" type="slidenum">
               <a:rPr lang="en-US"/>
-              <a:t>23</a:t>
+              <a:t>29</a:t>
             </a:fld>
             <a:endParaRPr lang="en-US"/>
           </a:p>
@@ -2488,6 +2077,214 @@
             <a:fld id="{F7021451-1387-4CA6-816F-3879F97B5CBC}" type="slidenum">
               <a:rPr lang="en-US"/>
               <a:t>3</a:t>
+            </a:fld>
+            <a:endParaRPr lang="en-US"/>
+          </a:p>
+        </p:txBody>
+      </p:sp>
+    </p:spTree>
+    <p:extLst>
+      <p:ext uri="{BB962C8B-B14F-4D97-AF65-F5344CB8AC3E}">
+        <p14:creationId xmlns:p14="http://schemas.microsoft.com/office/powerpoint/2010/main" val="1024086991"/>
+      </p:ext>
+    </p:extLst>
+  </p:cSld>
+  <p:clrMapOvr>
+    <a:masterClrMapping/>
+  </p:clrMapOvr>
+</p:notes>
+</file>
+
+<file path=ppt/notesSlides/notesSlide30.xml><?xml version="1.0" encoding="utf-8"?>
+<p:notes xmlns:a="http://schemas.openxmlformats.org/drawingml/2006/main" xmlns:r="http://schemas.openxmlformats.org/officeDocument/2006/relationships" xmlns:p="http://schemas.openxmlformats.org/presentationml/2006/main">
+  <p:cSld>
+    <p:spTree>
+      <p:nvGrpSpPr>
+        <p:cNvPr id="1" name=""/>
+        <p:cNvGrpSpPr/>
+        <p:nvPr/>
+      </p:nvGrpSpPr>
+      <p:grpSpPr>
+        <a:xfrm>
+          <a:off x="0" y="0"/>
+          <a:ext cx="0" cy="0"/>
+          <a:chOff x="0" y="0"/>
+          <a:chExt cx="0" cy="0"/>
+        </a:xfrm>
+      </p:grpSpPr>
+      <p:sp>
+        <p:nvSpPr>
+          <p:cNvPr id="2" name="Slide Image Placeholder 1"/>
+          <p:cNvSpPr>
+            <a:spLocks noGrp="1" noRot="1" noChangeAspect="1"/>
+          </p:cNvSpPr>
+          <p:nvPr>
+            <p:ph type="sldImg"/>
+          </p:nvPr>
+        </p:nvSpPr>
+        <p:spPr/>
+      </p:sp>
+      <p:sp>
+        <p:nvSpPr>
+          <p:cNvPr id="3" name="Notes Placeholder 2"/>
+          <p:cNvSpPr>
+            <a:spLocks noGrp="1"/>
+          </p:cNvSpPr>
+          <p:nvPr>
+            <p:ph type="body" idx="1"/>
+          </p:nvPr>
+        </p:nvSpPr>
+        <p:spPr/>
+        <p:txBody>
+          <a:bodyPr/>
+          <a:lstStyle/>
+          <a:p>
+            <a:r>
+              <a:rPr lang="en-US" dirty="0"/>
+              <a:t>先講 Facts，就是實際發生的事。
+神秘客評分系統，把原本散在五份以上 Excel 的流程整併進單一後台，
+完成三層權限、評分、報表匯出、檢討與申覆、帳號移轉這些機制，已經正式上線在用。
+PRD 機器人用大量反問把模糊想法收斂成 PRD 初稿跟技術文件，
+現在大約十位跨部門同事在測試。
+對外四門 AI 應用課，我寫了兩門教材、講了兩門，都完成內部試教。
+但我覺得比這些條列更重要的是最後一行：
+這是我第一次完整走完需求訪談、開發、版本協作、排錯、驗證，到正式交付。
+（Feelings 這段請放慢講，這是全篇唯一講感受的地方）
+Feelings 的部分我想誠實說。
+一開始最強烈的感受是失控感——東西能跑，但不是我掌控的。
+我看得出 AI 給的結果很差，卻講不出為什麼差；
+改不動就只能反覆重新生成，說白了是在碰運氣。
+功能會動，但我說不出它為什麼會動，那種感覺其實不太好。
+轉折點是我不再只想著把眼前的錯誤修掉，
+而是回頭去補模型本身的原理。
+當我能說出「是這一段描述不夠具體」，而不是「感覺怪怪的」，
+主導權才回到我手上。</a:t>
+            </a:r>
+          </a:p>
+        </p:txBody>
+      </p:sp>
+      <p:sp>
+        <p:nvSpPr>
+          <p:cNvPr id="4" name="Slide Number Placeholder 3"/>
+          <p:cNvSpPr>
+            <a:spLocks noGrp="1"/>
+          </p:cNvSpPr>
+          <p:nvPr>
+            <p:ph type="sldNum" sz="quarter" idx="10"/>
+          </p:nvPr>
+        </p:nvSpPr>
+        <p:spPr/>
+        <p:txBody>
+          <a:bodyPr/>
+          <a:lstStyle/>
+          <a:p>
+            <a:fld id="{F7021451-1387-4CA6-816F-3879F97B5CBC}" type="slidenum">
+              <a:rPr lang="en-US"/>
+              <a:t>23</a:t>
+            </a:fld>
+            <a:endParaRPr lang="en-US"/>
+          </a:p>
+        </p:txBody>
+      </p:sp>
+    </p:spTree>
+    <p:extLst>
+      <p:ext uri="{BB962C8B-B14F-4D97-AF65-F5344CB8AC3E}">
+        <p14:creationId xmlns:p14="http://schemas.microsoft.com/office/powerpoint/2010/main" val="1024086991"/>
+      </p:ext>
+    </p:extLst>
+  </p:cSld>
+  <p:clrMapOvr>
+    <a:masterClrMapping/>
+  </p:clrMapOvr>
+</p:notes>
+</file>
+
+<file path=ppt/notesSlides/notesSlide31.xml><?xml version="1.0" encoding="utf-8"?>
+<p:notes xmlns:a="http://schemas.openxmlformats.org/drawingml/2006/main" xmlns:r="http://schemas.openxmlformats.org/officeDocument/2006/relationships" xmlns:p="http://schemas.openxmlformats.org/presentationml/2006/main">
+  <p:cSld>
+    <p:spTree>
+      <p:nvGrpSpPr>
+        <p:cNvPr id="1" name=""/>
+        <p:cNvGrpSpPr/>
+        <p:nvPr/>
+      </p:nvGrpSpPr>
+      <p:grpSpPr>
+        <a:xfrm>
+          <a:off x="0" y="0"/>
+          <a:ext cx="0" cy="0"/>
+          <a:chOff x="0" y="0"/>
+          <a:chExt cx="0" cy="0"/>
+        </a:xfrm>
+      </p:grpSpPr>
+      <p:sp>
+        <p:nvSpPr>
+          <p:cNvPr id="2" name="Slide Image Placeholder 1"/>
+          <p:cNvSpPr>
+            <a:spLocks noGrp="1" noRot="1" noChangeAspect="1"/>
+          </p:cNvSpPr>
+          <p:nvPr>
+            <p:ph type="sldImg"/>
+          </p:nvPr>
+        </p:nvSpPr>
+        <p:spPr/>
+      </p:sp>
+      <p:sp>
+        <p:nvSpPr>
+          <p:cNvPr id="3" name="Notes Placeholder 2"/>
+          <p:cNvSpPr>
+            <a:spLocks noGrp="1"/>
+          </p:cNvSpPr>
+          <p:nvPr>
+            <p:ph type="body" idx="1"/>
+          </p:nvPr>
+        </p:nvSpPr>
+        <p:spPr/>
+        <p:txBody>
+          <a:bodyPr/>
+          <a:lstStyle/>
+          <a:p>
+            <a:r>
+              <a:rPr lang="en-US" dirty="0"/>
+              <a:t>Findings 我整理成三個。
+第一，交付不等於寫完功能。
+還包含需求釐清、版本協作、環境設定、問題排查，以及對最終結果負責。
+第二，用 AI 的門檻不是會不會下指令，是能不能判斷它給的東西對不對。
+這個發現後來直接變成我教材的核心——
+AI 圖片生成課我刻意不給一堆可以複製的提示詞範本，只教怎麼描述、怎麼修正。
+因為範本會過期，方法不會。
+第三，需求文件是結果，不是起點。
+神秘客的申覆功能不在任何一份文件上，是我走過整個流程才發現非做不可的。
+如果我只照文件做，那個功能就不會存在。
+右邊 Future 是我接下來的規劃。
+半年內，把兩套系統從「能用」推到「穩定」——權限、資料、錯誤處理、維運；
+對外課程開賣之後擔任主力講師，並且把教材推到定稿。
+一年內，希望能獨立負責一條完整的產品線，從題目發想、需求訪談到上線維運。
+三到五年，成為能同時掌握對外課程產品跟對內系統落地的產品負責人，
+讓 AI 導入在公司裡變成可複製的標準做法。
+最後這句話是我對下一階段的定位：
+下一階段，我要把個人的解題經驗，沉澱成團隊可以複製的產品交付方式。</a:t>
+            </a:r>
+          </a:p>
+        </p:txBody>
+      </p:sp>
+      <p:sp>
+        <p:nvSpPr>
+          <p:cNvPr id="4" name="Slide Number Placeholder 3"/>
+          <p:cNvSpPr>
+            <a:spLocks noGrp="1"/>
+          </p:cNvSpPr>
+          <p:nvPr>
+            <p:ph type="sldNum" sz="quarter" idx="10"/>
+          </p:nvPr>
+        </p:nvSpPr>
+        <p:spPr/>
+        <p:txBody>
+          <a:bodyPr/>
+          <a:lstStyle/>
+          <a:p>
+            <a:fld id="{F7021451-1387-4CA6-816F-3879F97B5CBC}" type="slidenum">
+              <a:rPr lang="en-US"/>
+              <a:t>23</a:t>
             </a:fld>
             <a:endParaRPr lang="en-US"/>
           </a:p>
@@ -4942,7 +4739,7 @@
                 <a:ea typeface="微軟正黑體" pitchFamily="34" charset="-122"/>
                 <a:cs typeface="微軟正黑體" pitchFamily="34" charset="-120"/>
               </a:rPr>
-              <a:t>11</a:t>
+              <a:t>10</a:t>
             </a:fld>
             <a:endParaRPr lang="en-US" sz="1100" dirty="0"/>
           </a:p>
@@ -5587,7 +5384,7 @@
                 <a:ea typeface="微軟正黑體" pitchFamily="34" charset="-122"/>
                 <a:cs typeface="微軟正黑體" pitchFamily="34" charset="-120"/>
               </a:rPr>
-              <a:t>12</a:t>
+              <a:t>11</a:t>
             </a:fld>
             <a:endParaRPr lang="en-US" sz="1100" dirty="0"/>
           </a:p>
@@ -6309,7 +6106,7 @@
                 <a:ea typeface="微軟正黑體" pitchFamily="34" charset="-122"/>
                 <a:cs typeface="微軟正黑體" pitchFamily="34" charset="-120"/>
               </a:rPr>
-              <a:t>13</a:t>
+              <a:t>12</a:t>
             </a:fld>
             <a:endParaRPr lang="en-US" sz="1100" dirty="0"/>
           </a:p>
@@ -7122,7 +6919,7 @@
                 <a:ea typeface="微軟正黑體" pitchFamily="34" charset="-122"/>
                 <a:cs typeface="微軟正黑體" pitchFamily="34" charset="-120"/>
               </a:rPr>
-              <a:t>12</a:t>
+              <a:t>13</a:t>
             </a:fld>
             <a:endParaRPr lang="en-US" sz="1100" dirty="0"/>
           </a:p>
@@ -7939,7 +7736,7 @@
                 <a:ea typeface="微軟正黑體" pitchFamily="34" charset="-122"/>
                 <a:cs typeface="微軟正黑體" pitchFamily="34" charset="-120"/>
               </a:rPr>
-              <a:t>13</a:t>
+              <a:t>14</a:t>
             </a:fld>
             <a:endParaRPr lang="en-US" sz="1100" dirty="0"/>
           </a:p>
@@ -8124,7 +7921,7 @@
                 <a:ea typeface="微軟正黑體" pitchFamily="34" charset="-122"/>
                 <a:cs typeface="微軟正黑體" pitchFamily="34" charset="-120"/>
               </a:rPr>
-              <a:t>17</a:t>
+              <a:t>15</a:t>
             </a:fld>
             <a:endParaRPr lang="en-US" sz="1100" dirty="0"/>
           </a:p>
@@ -9130,7 +8927,7 @@
                 <a:ea typeface="微軟正黑體" pitchFamily="34" charset="-122"/>
                 <a:cs typeface="微軟正黑體" pitchFamily="34" charset="-120"/>
               </a:rPr>
-              <a:t>18</a:t>
+              <a:t>16</a:t>
             </a:fld>
             <a:endParaRPr lang="en-US" sz="1100" dirty="0"/>
           </a:p>
@@ -9791,7 +9588,7 @@
                 <a:ea typeface="微軟正黑體" pitchFamily="34" charset="-122"/>
                 <a:cs typeface="微軟正黑體" pitchFamily="34" charset="-120"/>
               </a:rPr>
-              <a:t>19</a:t>
+              <a:t>17</a:t>
             </a:fld>
             <a:endParaRPr lang="en-US" sz="1100" dirty="0"/>
           </a:p>
@@ -10512,7 +10309,7 @@
                 <a:ea typeface="微軟正黑體" pitchFamily="34" charset="-122"/>
                 <a:cs typeface="微軟正黑體" pitchFamily="34" charset="-120"/>
               </a:rPr>
-              <a:t>20</a:t>
+              <a:t>18</a:t>
             </a:fld>
             <a:endParaRPr lang="en-US" sz="1100" dirty="0"/>
           </a:p>
@@ -11628,7 +11425,7 @@
                 <a:ea typeface="微軟正黑體" pitchFamily="34" charset="-122"/>
                 <a:cs typeface="微軟正黑體" pitchFamily="34" charset="-120"/>
               </a:rPr>
-              <a:t>21</a:t>
+              <a:t>19</a:t>
             </a:fld>
             <a:endParaRPr lang="en-US" sz="1100" dirty="0"/>
           </a:p>
@@ -11931,7 +11728,7 @@
             <a:pPr marL="0" indent="0" algn="ctr">
               <a:buNone/>
             </a:pPr>
-            <a:fld id="{D9A3248E-D2B8-4884-AA36-050CB3E34636}" type="slidenum">
+            <a:r>
               <a:rPr lang="en-US" sz="1600" b="1" dirty="0">
                 <a:solidFill>
                   <a:srgbClr val="2B2D5C"/>
@@ -11941,7 +11738,7 @@
                 <a:cs typeface="微軟正黑體" pitchFamily="34" charset="-120"/>
               </a:rPr>
               <a:t>2</a:t>
-            </a:fld>
+            </a:r>
             <a:endParaRPr lang="en-US" sz="1600" dirty="0"/>
           </a:p>
         </p:txBody>
@@ -12411,7 +12208,7 @@
                 <a:ea typeface="微軟正黑體" pitchFamily="34" charset="-122"/>
                 <a:cs typeface="微軟正黑體" pitchFamily="34" charset="-120"/>
               </a:rPr>
-              <a:t>學習心得</a:t>
+              <a:t>學習心得與展望</a:t>
             </a:r>
             <a:endParaRPr lang="en-US" sz="1800" dirty="0"/>
           </a:p>
@@ -12450,7 +12247,7 @@
                 <a:ea typeface="微軟正黑體" pitchFamily="34" charset="-122"/>
                 <a:cs typeface="微軟正黑體" pitchFamily="34" charset="-120"/>
               </a:rPr>
-              <a:t>收穫、成就感與挑戰</a:t>
+              <a:t>以 4F 回顧：事實・感受・發現・未來</a:t>
             </a:r>
             <a:endParaRPr lang="en-US" sz="1200" dirty="0"/>
           </a:p>
@@ -12555,7 +12352,7 @@
                 <a:ea typeface="微軟正黑體" pitchFamily="34" charset="-122"/>
                 <a:cs typeface="微軟正黑體" pitchFamily="34" charset="-120"/>
               </a:rPr>
-              <a:t>職涯規劃</a:t>
+              <a:t>對公司的建議</a:t>
             </a:r>
             <a:endParaRPr lang="en-US" sz="1800" dirty="0"/>
           </a:p>
@@ -12594,150 +12391,6 @@
                 <a:ea typeface="微軟正黑體" pitchFamily="34" charset="-122"/>
                 <a:cs typeface="微軟正黑體" pitchFamily="34" charset="-120"/>
               </a:rPr>
-              <a:t>短、中、長期目標</a:t>
-            </a:r>
-            <a:endParaRPr lang="en-US" sz="1200" dirty="0"/>
-          </a:p>
-        </p:txBody>
-      </p:sp>
-      <p:sp>
-        <p:nvSpPr>
-          <p:cNvPr id="27" name="Shape 25"/>
-          <p:cNvSpPr/>
-          <p:nvPr/>
-        </p:nvSpPr>
-        <p:spPr>
-          <a:xfrm>
-            <a:off x="6324448" y="3922776"/>
-            <a:ext cx="475488" cy="475488"/>
-          </a:xfrm>
-          <a:prstGeom prst="ellipse">
-            <a:avLst/>
-          </a:prstGeom>
-          <a:solidFill>
-            <a:srgbClr val="D6D9F0"/>
-          </a:solidFill>
-          <a:ln/>
-        </p:spPr>
-        <p:txBody>
-          <a:bodyPr/>
-          <a:lstStyle/>
-          <a:p>
-            <a:endParaRPr lang="zh-TW" altLang="en-US"/>
-          </a:p>
-        </p:txBody>
-      </p:sp>
-      <p:sp>
-        <p:nvSpPr>
-          <p:cNvPr id="28" name="Text 26"/>
-          <p:cNvSpPr/>
-          <p:nvPr/>
-        </p:nvSpPr>
-        <p:spPr>
-          <a:xfrm>
-            <a:off x="6324448" y="3922776"/>
-            <a:ext cx="475488" cy="475488"/>
-          </a:xfrm>
-          <a:prstGeom prst="rect">
-            <a:avLst/>
-          </a:prstGeom>
-          <a:noFill/>
-          <a:ln/>
-        </p:spPr>
-        <p:txBody>
-          <a:bodyPr wrap="square" lIns="0" tIns="0" rIns="0" bIns="0" rtlCol="0" anchor="ctr"/>
-          <a:lstStyle/>
-          <a:p>
-            <a:pPr marL="0" indent="0" algn="ctr">
-              <a:buNone/>
-            </a:pPr>
-            <a:r>
-              <a:rPr lang="en-US" sz="1600" b="1" dirty="0">
-                <a:solidFill>
-                  <a:srgbClr val="2B2D5C"/>
-                </a:solidFill>
-                <a:latin typeface="微軟正黑體" pitchFamily="34" charset="0"/>
-                <a:ea typeface="微軟正黑體" pitchFamily="34" charset="-122"/>
-                <a:cs typeface="微軟正黑體" pitchFamily="34" charset="-120"/>
-              </a:rPr>
-              <a:t>7</a:t>
-            </a:r>
-            <a:endParaRPr lang="en-US" sz="1600" dirty="0"/>
-          </a:p>
-        </p:txBody>
-      </p:sp>
-      <p:sp>
-        <p:nvSpPr>
-          <p:cNvPr id="29" name="Text 27"/>
-          <p:cNvSpPr/>
-          <p:nvPr/>
-        </p:nvSpPr>
-        <p:spPr>
-          <a:xfrm>
-            <a:off x="6982816" y="3849624"/>
-            <a:ext cx="4541368" cy="384048"/>
-          </a:xfrm>
-          <a:prstGeom prst="rect">
-            <a:avLst/>
-          </a:prstGeom>
-          <a:noFill/>
-          <a:ln/>
-        </p:spPr>
-        <p:txBody>
-          <a:bodyPr wrap="square" lIns="0" tIns="0" rIns="0" bIns="0" rtlCol="0" anchor="ctr"/>
-          <a:lstStyle/>
-          <a:p>
-            <a:pPr marL="0" indent="0">
-              <a:buNone/>
-            </a:pPr>
-            <a:r>
-              <a:rPr lang="en-US" sz="1800" b="1" dirty="0">
-                <a:solidFill>
-                  <a:srgbClr val="2B2D5C"/>
-                </a:solidFill>
-                <a:latin typeface="微軟正黑體" pitchFamily="34" charset="0"/>
-                <a:ea typeface="微軟正黑體" pitchFamily="34" charset="-122"/>
-                <a:cs typeface="微軟正黑體" pitchFamily="34" charset="-120"/>
-              </a:rPr>
-              <a:t>對公司的建議</a:t>
-            </a:r>
-            <a:endParaRPr lang="en-US" sz="1800" dirty="0"/>
-          </a:p>
-        </p:txBody>
-      </p:sp>
-      <p:sp>
-        <p:nvSpPr>
-          <p:cNvPr id="30" name="Text 28"/>
-          <p:cNvSpPr/>
-          <p:nvPr/>
-        </p:nvSpPr>
-        <p:spPr>
-          <a:xfrm>
-            <a:off x="6982816" y="4233672"/>
-            <a:ext cx="4541368" cy="310896"/>
-          </a:xfrm>
-          <a:prstGeom prst="rect">
-            <a:avLst/>
-          </a:prstGeom>
-          <a:noFill/>
-          <a:ln/>
-        </p:spPr>
-        <p:txBody>
-          <a:bodyPr wrap="square" lIns="0" tIns="0" rIns="0" bIns="0" rtlCol="0" anchor="ctr"/>
-          <a:lstStyle/>
-          <a:p>
-            <a:pPr marL="0" indent="0">
-              <a:buNone/>
-            </a:pPr>
-            <a:r>
-              <a:rPr lang="en-US" sz="1200" dirty="0">
-                <a:solidFill>
-                  <a:srgbClr val="6E7191"/>
-                </a:solidFill>
-                <a:latin typeface="微軟正黑體" pitchFamily="34" charset="0"/>
-                <a:ea typeface="微軟正黑體" pitchFamily="34" charset="-122"/>
-                <a:cs typeface="微軟正黑體" pitchFamily="34" charset="-120"/>
-              </a:rPr>
               <a:t>新人入職與知識傳承</a:t>
             </a:r>
             <a:endParaRPr lang="en-US" sz="1200" dirty="0"/>
@@ -12768,7 +12421,7 @@
             <a:pPr marL="0" indent="0" algn="r">
               <a:buNone/>
             </a:pPr>
-            <a:r>
+            <a:fld id="{15703702-E623-4DEA-A7D6-FA8E0BEF01D3}" type="slidenum">
               <a:rPr lang="en-US" sz="1100" dirty="0">
                 <a:solidFill>
                   <a:srgbClr val="6E7191"/>
@@ -12778,7 +12431,7 @@
                 <a:cs typeface="微軟正黑體" pitchFamily="34" charset="-120"/>
               </a:rPr>
               <a:t>2</a:t>
-            </a:r>
+            </a:fld>
             <a:endParaRPr lang="en-US" sz="1100" dirty="0"/>
           </a:p>
         </p:txBody>
@@ -14485,7 +14138,7 @@
                 <a:ea typeface="微軟正黑體" pitchFamily="34" charset="-122"/>
                 <a:cs typeface="微軟正黑體" pitchFamily="34" charset="-120"/>
               </a:rPr>
-              <a:t>24</a:t>
+              <a:t>20</a:t>
             </a:fld>
             <a:endParaRPr lang="en-US" sz="1100" dirty="0"/>
           </a:p>
@@ -15184,7 +14837,7 @@
                 <a:ea typeface="微軟正黑體" pitchFamily="34" charset="-122"/>
                 <a:cs typeface="微軟正黑體" pitchFamily="34" charset="-120"/>
               </a:rPr>
-              <a:t>26</a:t>
+              <a:t>21</a:t>
             </a:fld>
             <a:endParaRPr lang="en-US" sz="1100" dirty="0"/>
           </a:p>
@@ -15966,7 +15619,7 @@
                 <a:ea typeface="微軟正黑體" pitchFamily="34" charset="-122"/>
                 <a:cs typeface="微軟正黑體" pitchFamily="34" charset="-120"/>
               </a:rPr>
-              <a:t>27</a:t>
+              <a:t>22</a:t>
             </a:fld>
             <a:endParaRPr lang="en-US" sz="1100" dirty="0"/>
           </a:p>
@@ -16013,156 +15666,6 @@
 <file path=ppt/slides/slide23.xml><?xml version="1.0" encoding="utf-8"?>
 <p:sld xmlns:a="http://schemas.openxmlformats.org/drawingml/2006/main" xmlns:r="http://schemas.openxmlformats.org/officeDocument/2006/relationships" xmlns:p="http://schemas.openxmlformats.org/presentationml/2006/main">
   <p:cSld name="Slide 32">
-    <p:bg>
-      <p:bgPr>
-        <a:solidFill>
-          <a:srgbClr val="1E2048"/>
-        </a:solidFill>
-        <a:effectLst/>
-      </p:bgPr>
-    </p:bg>
-    <p:spTree>
-      <p:nvGrpSpPr>
-        <p:cNvPr id="1" name=""/>
-        <p:cNvGrpSpPr/>
-        <p:nvPr/>
-      </p:nvGrpSpPr>
-      <p:grpSpPr>
-        <a:xfrm>
-          <a:off x="0" y="0"/>
-          <a:ext cx="0" cy="0"/>
-          <a:chOff x="0" y="0"/>
-          <a:chExt cx="0" cy="0"/>
-        </a:xfrm>
-      </p:grpSpPr>
-      <p:sp>
-        <p:nvSpPr>
-          <p:cNvPr id="2" name="Text 0"/>
-          <p:cNvSpPr/>
-          <p:nvPr/>
-        </p:nvSpPr>
-        <p:spPr>
-          <a:xfrm>
-            <a:off x="640080" y="1051560"/>
-            <a:ext cx="4572000" cy="457200"/>
-          </a:xfrm>
-          <a:prstGeom prst="rect">
-            <a:avLst/>
-          </a:prstGeom>
-          <a:noFill/>
-          <a:ln/>
-        </p:spPr>
-        <p:txBody>
-          <a:bodyPr wrap="square" lIns="0" tIns="0" rIns="0" bIns="0" rtlCol="0" anchor="ctr"/>
-          <a:lstStyle/>
-          <a:p>
-            <a:pPr marL="0" indent="0">
-              <a:buNone/>
-            </a:pPr>
-            <a:r>
-              <a:rPr lang="en-US" sz="1500" b="1" dirty="0">
-                <a:solidFill>
-                  <a:srgbClr val="AEB4E4"/>
-                </a:solidFill>
-                <a:latin typeface="微軟正黑體" pitchFamily="34" charset="0"/>
-                <a:ea typeface="微軟正黑體" pitchFamily="34" charset="-122"/>
-                <a:cs typeface="微軟正黑體" pitchFamily="34" charset="-120"/>
-              </a:rPr>
-              <a:t>五、學習心得</a:t>
-            </a:r>
-            <a:endParaRPr lang="en-US" sz="1500" dirty="0"/>
-          </a:p>
-        </p:txBody>
-      </p:sp>
-      <p:sp>
-        <p:nvSpPr>
-          <p:cNvPr id="3" name="Text 1"/>
-          <p:cNvSpPr/>
-          <p:nvPr/>
-        </p:nvSpPr>
-        <p:spPr>
-          <a:xfrm>
-            <a:off x="640080" y="1600200"/>
-            <a:ext cx="10911535" cy="640080"/>
-          </a:xfrm>
-          <a:prstGeom prst="rect">
-            <a:avLst/>
-          </a:prstGeom>
-          <a:noFill/>
-          <a:ln/>
-        </p:spPr>
-        <p:txBody>
-          <a:bodyPr wrap="square" lIns="0" tIns="0" rIns="0" bIns="0" rtlCol="0" anchor="ctr"/>
-          <a:lstStyle/>
-          <a:p>
-            <a:pPr marL="0" indent="0">
-              <a:buNone/>
-            </a:pPr>
-            <a:r>
-              <a:rPr lang="zh-TW" altLang="en-US" sz="2400" dirty="0">
-                <a:solidFill>
-                  <a:srgbClr val="D6D9F0"/>
-                </a:solidFill>
-                <a:latin typeface="微軟正黑體" pitchFamily="34" charset="0"/>
-                <a:ea typeface="微軟正黑體" pitchFamily="34" charset="-122"/>
-                <a:cs typeface="微軟正黑體" pitchFamily="34" charset="-120"/>
-              </a:rPr>
-              <a:t>過程中，我遇到的困難，以及解決的過程</a:t>
-            </a:r>
-            <a:endParaRPr lang="en-US" sz="2400" dirty="0"/>
-          </a:p>
-        </p:txBody>
-      </p:sp>
-      <p:sp>
-        <p:nvSpPr>
-          <p:cNvPr id="11" name="Text 9"/>
-          <p:cNvSpPr/>
-          <p:nvPr/>
-        </p:nvSpPr>
-        <p:spPr>
-          <a:xfrm>
-            <a:off x="11185855" y="6291072"/>
-            <a:ext cx="548640" cy="329184"/>
-          </a:xfrm>
-          <a:prstGeom prst="rect">
-            <a:avLst/>
-          </a:prstGeom>
-          <a:noFill/>
-          <a:ln/>
-        </p:spPr>
-        <p:txBody>
-          <a:bodyPr wrap="square" lIns="0" tIns="0" rIns="0" bIns="0" rtlCol="0" anchor="ctr"/>
-          <a:lstStyle/>
-          <a:p>
-            <a:pPr marL="0" indent="0" algn="r">
-              <a:buNone/>
-            </a:pPr>
-            <a:fld id="{A86A1260-C8FD-40A2-9BE6-25908C1A0423}" type="slidenum">
-              <a:rPr lang="en-US" sz="1100" dirty="0">
-                <a:solidFill>
-                  <a:srgbClr val="7A80AE"/>
-                </a:solidFill>
-                <a:latin typeface="微軟正黑體" pitchFamily="34" charset="0"/>
-                <a:ea typeface="微軟正黑體" pitchFamily="34" charset="-122"/>
-                <a:cs typeface="微軟正黑體" pitchFamily="34" charset="-120"/>
-              </a:rPr>
-              <a:t>32</a:t>
-            </a:fld>
-            <a:endParaRPr lang="en-US" sz="1100" dirty="0"/>
-          </a:p>
-        </p:txBody>
-      </p:sp>
-    </p:spTree>
-  </p:cSld>
-  <p:clrMapOvr>
-    <a:masterClrMapping/>
-  </p:clrMapOvr>
-</p:sld>
-</file>
-
-<file path=ppt/slides/slide24.xml><?xml version="1.0" encoding="utf-8"?>
-<p:sld xmlns:a="http://schemas.openxmlformats.org/drawingml/2006/main" xmlns:r="http://schemas.openxmlformats.org/officeDocument/2006/relationships" xmlns:p="http://schemas.openxmlformats.org/presentationml/2006/main">
-  <p:cSld name="Slide 33">
     <p:bg>
       <p:bgPr>
         <a:solidFill>
@@ -16187,7 +15690,7 @@
       </p:grpSpPr>
       <p:sp>
         <p:nvSpPr>
-          <p:cNvPr id="2" name="Text 0"/>
+          <p:cNvPr id="101" name="s101"/>
           <p:cNvSpPr/>
           <p:nvPr/>
         </p:nvSpPr>
@@ -16198,13 +15701,15 @@
           </a:xfrm>
           <a:prstGeom prst="roundRect">
             <a:avLst>
-              <a:gd name="adj" fmla="val 44444"/>
+              <a:gd name="adj" fmla="val 44000"/>
             </a:avLst>
           </a:prstGeom>
           <a:solidFill>
             <a:srgbClr val="D6D9F0"/>
           </a:solidFill>
-          <a:ln/>
+          <a:ln>
+            <a:noFill/>
+          </a:ln>
         </p:spPr>
         <p:txBody>
           <a:bodyPr wrap="square" lIns="0" tIns="0" rIns="0" bIns="0" rtlCol="0" anchor="ctr"/>
@@ -16214,36 +15719,36 @@
               <a:buNone/>
             </a:pPr>
             <a:r>
-              <a:rPr lang="en-US" sz="1200" b="1" dirty="0">
+              <a:rPr lang="zh-TW" altLang="en-US" sz="1200" b="1" dirty="0">
                 <a:solidFill>
                   <a:srgbClr val="2B2D5C"/>
                 </a:solidFill>
                 <a:latin typeface="微軟正黑體" pitchFamily="34" charset="0"/>
                 <a:ea typeface="微軟正黑體" pitchFamily="34" charset="-122"/>
-                <a:cs typeface="微軟正黑體" pitchFamily="34" charset="-120"/>
-              </a:rPr>
-              <a:t>六、職涯規劃</a:t>
-            </a:r>
-            <a:endParaRPr lang="en-US" sz="1200" dirty="0"/>
-          </a:p>
-        </p:txBody>
-      </p:sp>
-      <p:sp>
-        <p:nvSpPr>
-          <p:cNvPr id="3" name="Text 1"/>
-          <p:cNvSpPr/>
-          <p:nvPr/>
-        </p:nvSpPr>
-        <p:spPr>
-          <a:xfrm>
-            <a:off x="640080" y="914400"/>
-            <a:ext cx="10911535" cy="731520"/>
-          </a:xfrm>
-          <a:prstGeom prst="rect">
-            <a:avLst/>
-          </a:prstGeom>
-          <a:noFill/>
-          <a:ln/>
+              </a:rPr>
+              <a:t>五、學習心得</a:t>
+            </a:r>
+          </a:p>
+        </p:txBody>
+      </p:sp>
+      <p:sp>
+        <p:nvSpPr>
+          <p:cNvPr id="102" name="s102"/>
+          <p:cNvSpPr/>
+          <p:nvPr/>
+        </p:nvSpPr>
+        <p:spPr>
+          <a:xfrm>
+            <a:off x="640080" y="896112"/>
+            <a:ext cx="10911535" cy="658368"/>
+          </a:xfrm>
+          <a:prstGeom prst="rect">
+            <a:avLst/>
+          </a:prstGeom>
+          <a:noFill/>
+          <a:ln>
+            <a:noFill/>
+          </a:ln>
         </p:spPr>
         <p:txBody>
           <a:bodyPr wrap="square" lIns="0" tIns="0" rIns="0" bIns="0" rtlCol="0" anchor="ctr"/>
@@ -16253,656 +15758,720 @@
               <a:buNone/>
             </a:pPr>
             <a:r>
-              <a:rPr lang="en-US" sz="3200" b="1" dirty="0">
+              <a:rPr lang="zh-TW" altLang="en-US" sz="2900" b="1" dirty="0">
                 <a:solidFill>
                   <a:srgbClr val="2B2D5C"/>
                 </a:solidFill>
                 <a:latin typeface="微軟正黑體" pitchFamily="34" charset="0"/>
                 <a:ea typeface="微軟正黑體" pitchFamily="34" charset="-122"/>
-                <a:cs typeface="微軟正黑體" pitchFamily="34" charset="-120"/>
-              </a:rPr>
-              <a:t>職涯規劃</a:t>
-            </a:r>
-            <a:endParaRPr lang="en-US" sz="3200" dirty="0"/>
-          </a:p>
-        </p:txBody>
-      </p:sp>
-      <p:sp>
-        <p:nvSpPr>
-          <p:cNvPr id="4" name="Shape 2"/>
-          <p:cNvSpPr/>
-          <p:nvPr/>
-        </p:nvSpPr>
-        <p:spPr>
-          <a:xfrm>
-            <a:off x="640080" y="1965960"/>
-            <a:ext cx="3393338" cy="3931920"/>
+              </a:rPr>
+              <a:t>這四個多月，我第一次完整走完從需求到上線</a:t>
+            </a:r>
+          </a:p>
+        </p:txBody>
+      </p:sp>
+      <p:sp>
+        <p:nvSpPr>
+          <p:cNvPr id="103" name="s103"/>
+          <p:cNvSpPr/>
+          <p:nvPr/>
+        </p:nvSpPr>
+        <p:spPr>
+          <a:xfrm>
+            <a:off x="640080" y="1536192"/>
+            <a:ext cx="10911535" cy="310896"/>
+          </a:xfrm>
+          <a:prstGeom prst="rect">
+            <a:avLst/>
+          </a:prstGeom>
+          <a:noFill/>
+          <a:ln>
+            <a:noFill/>
+          </a:ln>
+        </p:spPr>
+        <p:txBody>
+          <a:bodyPr wrap="square" lIns="0" tIns="0" rIns="0" bIns="0" rtlCol="0" anchor="ctr"/>
+          <a:lstStyle/>
+          <a:p>
+            <a:pPr marL="0" indent="0" algn="l">
+              <a:buNone/>
+            </a:pPr>
+            <a:r>
+              <a:rPr lang="zh-TW" altLang="en-US" sz="1300" b="0" dirty="0">
+                <a:solidFill>
+                  <a:srgbClr val="6E7191"/>
+                </a:solidFill>
+                <a:latin typeface="微軟正黑體" pitchFamily="34" charset="0"/>
+                <a:ea typeface="微軟正黑體" pitchFamily="34" charset="-122"/>
+              </a:rPr>
+              <a:t>用 4F 回顧這段過程</a:t>
+            </a:r>
+          </a:p>
+        </p:txBody>
+      </p:sp>
+      <p:sp>
+        <p:nvSpPr>
+          <p:cNvPr id="104" name="s104"/>
+          <p:cNvSpPr/>
+          <p:nvPr/>
+        </p:nvSpPr>
+        <p:spPr>
+          <a:xfrm>
+            <a:off x="640080" y="2057400"/>
+            <a:ext cx="2480996" cy="2487168"/>
           </a:xfrm>
           <a:prstGeom prst="roundRect">
             <a:avLst>
-              <a:gd name="adj" fmla="val 1617"/>
+              <a:gd name="adj" fmla="val 7000"/>
+            </a:avLst>
+          </a:prstGeom>
+          <a:solidFill>
+            <a:srgbClr val="ECEEF8"/>
+          </a:solidFill>
+          <a:ln>
+            <a:noFill/>
+          </a:ln>
+        </p:spPr>
+        <p:txBody>
+          <a:bodyPr wrap="square" lIns="0" tIns="0" rIns="0" bIns="0" rtlCol="0" anchor="t"/>
+          <a:lstStyle/>
+          <a:p/>
+        </p:txBody>
+      </p:sp>
+      <p:sp>
+        <p:nvSpPr>
+          <p:cNvPr id="105" name="s105"/>
+          <p:cNvSpPr/>
+          <p:nvPr/>
+        </p:nvSpPr>
+        <p:spPr>
+          <a:xfrm>
+            <a:off x="841248" y="2249424"/>
+            <a:ext cx="2078660" cy="548640"/>
+          </a:xfrm>
+          <a:prstGeom prst="rect">
+            <a:avLst/>
+          </a:prstGeom>
+          <a:noFill/>
+          <a:ln>
+            <a:noFill/>
+          </a:ln>
+        </p:spPr>
+        <p:txBody>
+          <a:bodyPr wrap="square" lIns="0" tIns="0" rIns="0" bIns="0" rtlCol="0" anchor="ctr"/>
+          <a:lstStyle/>
+          <a:p>
+            <a:pPr marL="0" indent="0" algn="ctr">
+              <a:buNone/>
+            </a:pPr>
+            <a:r>
+              <a:rPr lang="zh-TW" altLang="en-US" sz="2200" b="1" dirty="0">
+                <a:solidFill>
+                  <a:srgbClr val="2B2D5C"/>
+                </a:solidFill>
+                <a:latin typeface="微軟正黑體" pitchFamily="34" charset="0"/>
+                <a:ea typeface="微軟正黑體" pitchFamily="34" charset="-122"/>
+              </a:rPr>
+              <a:t>Facts</a:t>
+            </a:r>
+          </a:p>
+        </p:txBody>
+      </p:sp>
+      <p:sp>
+        <p:nvSpPr>
+          <p:cNvPr id="106" name="s106"/>
+          <p:cNvSpPr/>
+          <p:nvPr/>
+        </p:nvSpPr>
+        <p:spPr>
+          <a:xfrm>
+            <a:off x="841248" y="2779776"/>
+            <a:ext cx="2078660" cy="365760"/>
+          </a:xfrm>
+          <a:prstGeom prst="rect">
+            <a:avLst/>
+          </a:prstGeom>
+          <a:noFill/>
+          <a:ln>
+            <a:noFill/>
+          </a:ln>
+        </p:spPr>
+        <p:txBody>
+          <a:bodyPr wrap="square" lIns="0" tIns="0" rIns="0" bIns="0" rtlCol="0" anchor="ctr"/>
+          <a:lstStyle/>
+          <a:p>
+            <a:pPr marL="0" indent="0" algn="ctr">
+              <a:buNone/>
+            </a:pPr>
+            <a:r>
+              <a:rPr lang="zh-TW" altLang="en-US" sz="1400" b="1" dirty="0">
+                <a:solidFill>
+                  <a:srgbClr val="D95F2B"/>
+                </a:solidFill>
+                <a:latin typeface="微軟正黑體" pitchFamily="34" charset="0"/>
+                <a:ea typeface="微軟正黑體" pitchFamily="34" charset="-122"/>
+              </a:rPr>
+              <a:t>事實</a:t>
+            </a:r>
+          </a:p>
+        </p:txBody>
+      </p:sp>
+      <p:sp>
+        <p:nvSpPr>
+          <p:cNvPr id="107" name="s107"/>
+          <p:cNvSpPr/>
+          <p:nvPr/>
+        </p:nvSpPr>
+        <p:spPr>
+          <a:xfrm>
+            <a:off x="877824" y="3200400"/>
+            <a:ext cx="2005508" cy="1097280"/>
+          </a:xfrm>
+          <a:prstGeom prst="rect">
+            <a:avLst/>
+          </a:prstGeom>
+          <a:noFill/>
+          <a:ln>
+            <a:noFill/>
+          </a:ln>
+        </p:spPr>
+        <p:txBody>
+          <a:bodyPr wrap="square" lIns="0" tIns="0" rIns="0" bIns="0" rtlCol="0" anchor="t"/>
+          <a:lstStyle/>
+          <a:p>
+            <a:pPr marL="0" indent="0" algn="ctr">
+              <a:buNone/>
+            </a:pPr>
+            <a:r>
+              <a:rPr lang="zh-TW" altLang="en-US" sz="1250" b="0" dirty="0">
+                <a:solidFill>
+                  <a:srgbClr val="2B2D5C"/>
+                </a:solidFill>
+                <a:latin typeface="微軟正黑體" pitchFamily="34" charset="0"/>
+                <a:ea typeface="微軟正黑體" pitchFamily="34" charset="-122"/>
+              </a:rPr>
+              <a:t>神秘客評分系統上線、PRD 機器人進入跨部門測試、四門 AI 課完成內部試教。</a:t>
+            </a:r>
+          </a:p>
+        </p:txBody>
+      </p:sp>
+      <p:sp>
+        <p:nvSpPr>
+          <p:cNvPr id="108" name="s108"/>
+          <p:cNvSpPr/>
+          <p:nvPr/>
+        </p:nvSpPr>
+        <p:spPr>
+          <a:xfrm>
+            <a:off x="3450260" y="2057400"/>
+            <a:ext cx="2480996" cy="2487168"/>
+          </a:xfrm>
+          <a:prstGeom prst="roundRect">
+            <a:avLst>
+              <a:gd name="adj" fmla="val 7000"/>
+            </a:avLst>
+          </a:prstGeom>
+          <a:solidFill>
+            <a:srgbClr val="F2E2DA"/>
+          </a:solidFill>
+          <a:ln>
+            <a:noFill/>
+          </a:ln>
+        </p:spPr>
+        <p:txBody>
+          <a:bodyPr wrap="square" lIns="0" tIns="0" rIns="0" bIns="0" rtlCol="0" anchor="t"/>
+          <a:lstStyle/>
+          <a:p/>
+        </p:txBody>
+      </p:sp>
+      <p:sp>
+        <p:nvSpPr>
+          <p:cNvPr id="109" name="s109"/>
+          <p:cNvSpPr/>
+          <p:nvPr/>
+        </p:nvSpPr>
+        <p:spPr>
+          <a:xfrm>
+            <a:off x="3651428" y="2249424"/>
+            <a:ext cx="2078660" cy="548640"/>
+          </a:xfrm>
+          <a:prstGeom prst="rect">
+            <a:avLst/>
+          </a:prstGeom>
+          <a:noFill/>
+          <a:ln>
+            <a:noFill/>
+          </a:ln>
+        </p:spPr>
+        <p:txBody>
+          <a:bodyPr wrap="square" lIns="0" tIns="0" rIns="0" bIns="0" rtlCol="0" anchor="ctr"/>
+          <a:lstStyle/>
+          <a:p>
+            <a:pPr marL="0" indent="0" algn="ctr">
+              <a:buNone/>
+            </a:pPr>
+            <a:r>
+              <a:rPr lang="zh-TW" altLang="en-US" sz="2200" b="1" dirty="0">
+                <a:solidFill>
+                  <a:srgbClr val="2B2D5C"/>
+                </a:solidFill>
+                <a:latin typeface="微軟正黑體" pitchFamily="34" charset="0"/>
+                <a:ea typeface="微軟正黑體" pitchFamily="34" charset="-122"/>
+              </a:rPr>
+              <a:t>Feelings</a:t>
+            </a:r>
+          </a:p>
+        </p:txBody>
+      </p:sp>
+      <p:sp>
+        <p:nvSpPr>
+          <p:cNvPr id="110" name="s110"/>
+          <p:cNvSpPr/>
+          <p:nvPr/>
+        </p:nvSpPr>
+        <p:spPr>
+          <a:xfrm>
+            <a:off x="3651428" y="2779776"/>
+            <a:ext cx="2078660" cy="365760"/>
+          </a:xfrm>
+          <a:prstGeom prst="rect">
+            <a:avLst/>
+          </a:prstGeom>
+          <a:noFill/>
+          <a:ln>
+            <a:noFill/>
+          </a:ln>
+        </p:spPr>
+        <p:txBody>
+          <a:bodyPr wrap="square" lIns="0" tIns="0" rIns="0" bIns="0" rtlCol="0" anchor="ctr"/>
+          <a:lstStyle/>
+          <a:p>
+            <a:pPr marL="0" indent="0" algn="ctr">
+              <a:buNone/>
+            </a:pPr>
+            <a:r>
+              <a:rPr lang="zh-TW" altLang="en-US" sz="1400" b="1" dirty="0">
+                <a:solidFill>
+                  <a:srgbClr val="D95F2B"/>
+                </a:solidFill>
+                <a:latin typeface="微軟正黑體" pitchFamily="34" charset="0"/>
+                <a:ea typeface="微軟正黑體" pitchFamily="34" charset="-122"/>
+              </a:rPr>
+              <a:t>感受</a:t>
+            </a:r>
+          </a:p>
+        </p:txBody>
+      </p:sp>
+      <p:sp>
+        <p:nvSpPr>
+          <p:cNvPr id="111" name="s111"/>
+          <p:cNvSpPr/>
+          <p:nvPr/>
+        </p:nvSpPr>
+        <p:spPr>
+          <a:xfrm>
+            <a:off x="3688004" y="3200400"/>
+            <a:ext cx="2005508" cy="1097280"/>
+          </a:xfrm>
+          <a:prstGeom prst="rect">
+            <a:avLst/>
+          </a:prstGeom>
+          <a:noFill/>
+          <a:ln>
+            <a:noFill/>
+          </a:ln>
+        </p:spPr>
+        <p:txBody>
+          <a:bodyPr wrap="square" lIns="0" tIns="0" rIns="0" bIns="0" rtlCol="0" anchor="t"/>
+          <a:lstStyle/>
+          <a:p>
+            <a:pPr marL="0" indent="0" algn="ctr">
+              <a:buNone/>
+            </a:pPr>
+            <a:r>
+              <a:rPr lang="zh-TW" altLang="en-US" sz="1250" b="0" dirty="0">
+                <a:solidFill>
+                  <a:srgbClr val="2B2D5C"/>
+                </a:solidFill>
+                <a:latin typeface="微軟正黑體" pitchFamily="34" charset="0"/>
+                <a:ea typeface="微軟正黑體" pitchFamily="34" charset="-122"/>
+              </a:rPr>
+              <a:t>一開始是失控感——東西能跑，但不是我掌控的。</a:t>
+            </a:r>
+          </a:p>
+        </p:txBody>
+      </p:sp>
+      <p:sp>
+        <p:nvSpPr>
+          <p:cNvPr id="112" name="s112"/>
+          <p:cNvSpPr/>
+          <p:nvPr/>
+        </p:nvSpPr>
+        <p:spPr>
+          <a:xfrm>
+            <a:off x="6260440" y="2057400"/>
+            <a:ext cx="2480996" cy="2487168"/>
+          </a:xfrm>
+          <a:prstGeom prst="roundRect">
+            <a:avLst>
+              <a:gd name="adj" fmla="val 7000"/>
+            </a:avLst>
+          </a:prstGeom>
+          <a:solidFill>
+            <a:srgbClr val="F7F1CE"/>
+          </a:solidFill>
+          <a:ln>
+            <a:noFill/>
+          </a:ln>
+        </p:spPr>
+        <p:txBody>
+          <a:bodyPr wrap="square" lIns="0" tIns="0" rIns="0" bIns="0" rtlCol="0" anchor="t"/>
+          <a:lstStyle/>
+          <a:p/>
+        </p:txBody>
+      </p:sp>
+      <p:sp>
+        <p:nvSpPr>
+          <p:cNvPr id="113" name="s113"/>
+          <p:cNvSpPr/>
+          <p:nvPr/>
+        </p:nvSpPr>
+        <p:spPr>
+          <a:xfrm>
+            <a:off x="6461608" y="2249424"/>
+            <a:ext cx="2078660" cy="548640"/>
+          </a:xfrm>
+          <a:prstGeom prst="rect">
+            <a:avLst/>
+          </a:prstGeom>
+          <a:noFill/>
+          <a:ln>
+            <a:noFill/>
+          </a:ln>
+        </p:spPr>
+        <p:txBody>
+          <a:bodyPr wrap="square" lIns="0" tIns="0" rIns="0" bIns="0" rtlCol="0" anchor="ctr"/>
+          <a:lstStyle/>
+          <a:p>
+            <a:pPr marL="0" indent="0" algn="ctr">
+              <a:buNone/>
+            </a:pPr>
+            <a:r>
+              <a:rPr lang="zh-TW" altLang="en-US" sz="2200" b="1" dirty="0">
+                <a:solidFill>
+                  <a:srgbClr val="2B2D5C"/>
+                </a:solidFill>
+                <a:latin typeface="微軟正黑體" pitchFamily="34" charset="0"/>
+                <a:ea typeface="微軟正黑體" pitchFamily="34" charset="-122"/>
+              </a:rPr>
+              <a:t>Findings</a:t>
+            </a:r>
+          </a:p>
+        </p:txBody>
+      </p:sp>
+      <p:sp>
+        <p:nvSpPr>
+          <p:cNvPr id="114" name="s114"/>
+          <p:cNvSpPr/>
+          <p:nvPr/>
+        </p:nvSpPr>
+        <p:spPr>
+          <a:xfrm>
+            <a:off x="6461608" y="2779776"/>
+            <a:ext cx="2078660" cy="365760"/>
+          </a:xfrm>
+          <a:prstGeom prst="rect">
+            <a:avLst/>
+          </a:prstGeom>
+          <a:noFill/>
+          <a:ln>
+            <a:noFill/>
+          </a:ln>
+        </p:spPr>
+        <p:txBody>
+          <a:bodyPr wrap="square" lIns="0" tIns="0" rIns="0" bIns="0" rtlCol="0" anchor="ctr"/>
+          <a:lstStyle/>
+          <a:p>
+            <a:pPr marL="0" indent="0" algn="ctr">
+              <a:buNone/>
+            </a:pPr>
+            <a:r>
+              <a:rPr lang="zh-TW" altLang="en-US" sz="1400" b="1" dirty="0">
+                <a:solidFill>
+                  <a:srgbClr val="D95F2B"/>
+                </a:solidFill>
+                <a:latin typeface="微軟正黑體" pitchFamily="34" charset="0"/>
+                <a:ea typeface="微軟正黑體" pitchFamily="34" charset="-122"/>
+              </a:rPr>
+              <a:t>發現</a:t>
+            </a:r>
+          </a:p>
+        </p:txBody>
+      </p:sp>
+      <p:sp>
+        <p:nvSpPr>
+          <p:cNvPr id="115" name="s115"/>
+          <p:cNvSpPr/>
+          <p:nvPr/>
+        </p:nvSpPr>
+        <p:spPr>
+          <a:xfrm>
+            <a:off x="6498184" y="3200400"/>
+            <a:ext cx="2005508" cy="1097280"/>
+          </a:xfrm>
+          <a:prstGeom prst="rect">
+            <a:avLst/>
+          </a:prstGeom>
+          <a:noFill/>
+          <a:ln>
+            <a:noFill/>
+          </a:ln>
+        </p:spPr>
+        <p:txBody>
+          <a:bodyPr wrap="square" lIns="0" tIns="0" rIns="0" bIns="0" rtlCol="0" anchor="t"/>
+          <a:lstStyle/>
+          <a:p>
+            <a:pPr marL="0" indent="0" algn="ctr">
+              <a:buNone/>
+            </a:pPr>
+            <a:r>
+              <a:rPr lang="zh-TW" altLang="en-US" sz="1250" b="0" dirty="0">
+                <a:solidFill>
+                  <a:srgbClr val="2B2D5C"/>
+                </a:solidFill>
+                <a:latin typeface="微軟正黑體" pitchFamily="34" charset="0"/>
+                <a:ea typeface="微軟正黑體" pitchFamily="34" charset="-122"/>
+              </a:rPr>
+              <a:t>交付不只是寫功能；判斷力比下指令重要；需求文件是結果不是起點。</a:t>
+            </a:r>
+          </a:p>
+        </p:txBody>
+      </p:sp>
+      <p:sp>
+        <p:nvSpPr>
+          <p:cNvPr id="116" name="s116"/>
+          <p:cNvSpPr/>
+          <p:nvPr/>
+        </p:nvSpPr>
+        <p:spPr>
+          <a:xfrm>
+            <a:off x="9070619" y="2057400"/>
+            <a:ext cx="2480996" cy="2487168"/>
+          </a:xfrm>
+          <a:prstGeom prst="roundRect">
+            <a:avLst>
+              <a:gd name="adj" fmla="val 7000"/>
             </a:avLst>
           </a:prstGeom>
           <a:solidFill>
             <a:srgbClr val="D6D9F0"/>
           </a:solidFill>
-          <a:ln/>
-          <a:effectLst>
-            <a:outerShdw blurRad="101600" dist="25400" dir="5400000" algn="bl" rotWithShape="0">
-              <a:srgbClr val="9AA0BF">
-                <a:alpha val="22000"/>
-              </a:srgbClr>
-            </a:outerShdw>
-          </a:effectLst>
-        </p:spPr>
-        <p:txBody>
-          <a:bodyPr/>
-          <a:lstStyle/>
-          <a:p>
-            <a:endParaRPr lang="zh-TW" altLang="en-US"/>
-          </a:p>
-        </p:txBody>
-      </p:sp>
-      <p:sp>
-        <p:nvSpPr>
-          <p:cNvPr id="5" name="Text 3"/>
-          <p:cNvSpPr/>
-          <p:nvPr/>
-        </p:nvSpPr>
-        <p:spPr>
-          <a:xfrm>
-            <a:off x="914400" y="2148840"/>
-            <a:ext cx="2844698" cy="566928"/>
-          </a:xfrm>
-          <a:prstGeom prst="rect">
-            <a:avLst/>
-          </a:prstGeom>
-          <a:noFill/>
-          <a:ln/>
+          <a:ln>
+            <a:noFill/>
+          </a:ln>
+        </p:spPr>
+        <p:txBody>
+          <a:bodyPr wrap="square" lIns="0" tIns="0" rIns="0" bIns="0" rtlCol="0" anchor="t"/>
+          <a:lstStyle/>
+          <a:p/>
+        </p:txBody>
+      </p:sp>
+      <p:sp>
+        <p:nvSpPr>
+          <p:cNvPr id="117" name="s117"/>
+          <p:cNvSpPr/>
+          <p:nvPr/>
+        </p:nvSpPr>
+        <p:spPr>
+          <a:xfrm>
+            <a:off x="9271787" y="2249424"/>
+            <a:ext cx="2078660" cy="548640"/>
+          </a:xfrm>
+          <a:prstGeom prst="rect">
+            <a:avLst/>
+          </a:prstGeom>
+          <a:noFill/>
+          <a:ln>
+            <a:noFill/>
+          </a:ln>
         </p:spPr>
         <p:txBody>
           <a:bodyPr wrap="square" lIns="0" tIns="0" rIns="0" bIns="0" rtlCol="0" anchor="ctr"/>
           <a:lstStyle/>
           <a:p>
-            <a:pPr marL="0" indent="0">
-              <a:buNone/>
-            </a:pPr>
-            <a:r>
-              <a:rPr lang="en-US" sz="2600" b="1" dirty="0">
+            <a:pPr marL="0" indent="0" algn="ctr">
+              <a:buNone/>
+            </a:pPr>
+            <a:r>
+              <a:rPr lang="zh-TW" altLang="en-US" sz="2200" b="1" dirty="0">
                 <a:solidFill>
                   <a:srgbClr val="2B2D5C"/>
                 </a:solidFill>
                 <a:latin typeface="微軟正黑體" pitchFamily="34" charset="0"/>
                 <a:ea typeface="微軟正黑體" pitchFamily="34" charset="-122"/>
-                <a:cs typeface="微軟正黑體" pitchFamily="34" charset="-120"/>
-              </a:rPr>
-              <a:t>短期</a:t>
-            </a:r>
-            <a:endParaRPr lang="en-US" sz="2600" dirty="0"/>
-          </a:p>
-        </p:txBody>
-      </p:sp>
-      <p:sp>
-        <p:nvSpPr>
-          <p:cNvPr id="6" name="Text 4"/>
-          <p:cNvSpPr/>
-          <p:nvPr/>
-        </p:nvSpPr>
-        <p:spPr>
-          <a:xfrm>
-            <a:off x="914400" y="2697480"/>
-            <a:ext cx="2844698" cy="365760"/>
-          </a:xfrm>
-          <a:prstGeom prst="rect">
-            <a:avLst/>
-          </a:prstGeom>
-          <a:noFill/>
-          <a:ln/>
+              </a:rPr>
+              <a:t>Future</a:t>
+            </a:r>
+          </a:p>
+        </p:txBody>
+      </p:sp>
+      <p:sp>
+        <p:nvSpPr>
+          <p:cNvPr id="118" name="s118"/>
+          <p:cNvSpPr/>
+          <p:nvPr/>
+        </p:nvSpPr>
+        <p:spPr>
+          <a:xfrm>
+            <a:off x="9271787" y="2779776"/>
+            <a:ext cx="2078660" cy="365760"/>
+          </a:xfrm>
+          <a:prstGeom prst="rect">
+            <a:avLst/>
+          </a:prstGeom>
+          <a:noFill/>
+          <a:ln>
+            <a:noFill/>
+          </a:ln>
         </p:spPr>
         <p:txBody>
           <a:bodyPr wrap="square" lIns="0" tIns="0" rIns="0" bIns="0" rtlCol="0" anchor="ctr"/>
           <a:lstStyle/>
           <a:p>
-            <a:pPr marL="0" indent="0">
-              <a:buNone/>
-            </a:pPr>
-            <a:r>
-              <a:rPr lang="en-US" sz="1400" dirty="0">
-                <a:solidFill>
-                  <a:srgbClr val="4A4F7A"/>
-                </a:solidFill>
-                <a:latin typeface="微軟正黑體" pitchFamily="34" charset="0"/>
-                <a:ea typeface="微軟正黑體" pitchFamily="34" charset="-122"/>
-                <a:cs typeface="微軟正黑體" pitchFamily="34" charset="-120"/>
-              </a:rPr>
-              <a:t>半年</a:t>
-            </a:r>
-            <a:endParaRPr lang="en-US" sz="1400" dirty="0"/>
-          </a:p>
-        </p:txBody>
-      </p:sp>
-      <p:sp>
-        <p:nvSpPr>
-          <p:cNvPr id="7" name="Text 5"/>
-          <p:cNvSpPr/>
-          <p:nvPr/>
-        </p:nvSpPr>
-        <p:spPr>
-          <a:xfrm>
-            <a:off x="932688" y="3154680"/>
-            <a:ext cx="2808122" cy="2606040"/>
-          </a:xfrm>
-          <a:prstGeom prst="rect">
-            <a:avLst/>
-          </a:prstGeom>
-          <a:noFill/>
-          <a:ln/>
+            <a:pPr marL="0" indent="0" algn="ctr">
+              <a:buNone/>
+            </a:pPr>
+            <a:r>
+              <a:rPr lang="zh-TW" altLang="en-US" sz="1400" b="1" dirty="0">
+                <a:solidFill>
+                  <a:srgbClr val="D95F2B"/>
+                </a:solidFill>
+                <a:latin typeface="微軟正黑體" pitchFamily="34" charset="0"/>
+                <a:ea typeface="微軟正黑體" pitchFamily="34" charset="-122"/>
+              </a:rPr>
+              <a:t>未來</a:t>
+            </a:r>
+          </a:p>
+        </p:txBody>
+      </p:sp>
+      <p:sp>
+        <p:nvSpPr>
+          <p:cNvPr id="119" name="s119"/>
+          <p:cNvSpPr/>
+          <p:nvPr/>
+        </p:nvSpPr>
+        <p:spPr>
+          <a:xfrm>
+            <a:off x="9308363" y="3200400"/>
+            <a:ext cx="2005508" cy="1097280"/>
+          </a:xfrm>
+          <a:prstGeom prst="rect">
+            <a:avLst/>
+          </a:prstGeom>
+          <a:noFill/>
+          <a:ln>
+            <a:noFill/>
+          </a:ln>
         </p:spPr>
         <p:txBody>
           <a:bodyPr wrap="square" lIns="0" tIns="0" rIns="0" bIns="0" rtlCol="0" anchor="t"/>
           <a:lstStyle/>
           <a:p>
-            <a:pPr marL="342900" indent="-342900">
-              <a:lnSpc>
-                <a:spcPct val="130000"/>
-              </a:lnSpc>
-              <a:spcAft>
-                <a:spcPts val="700"/>
-              </a:spcAft>
-              <a:buSzPct val="100000"/>
-              <a:buChar char="•"/>
-            </a:pPr>
-            <a:r>
-              <a:rPr lang="en-US" sz="1200" dirty="0">
+            <a:pPr marL="0" indent="0" algn="ctr">
+              <a:buNone/>
+            </a:pPr>
+            <a:r>
+              <a:rPr lang="zh-TW" altLang="en-US" sz="1250" b="0" dirty="0">
                 <a:solidFill>
                   <a:srgbClr val="2B2D5C"/>
                 </a:solidFill>
                 <a:latin typeface="微軟正黑體" pitchFamily="34" charset="0"/>
                 <a:ea typeface="微軟正黑體" pitchFamily="34" charset="-122"/>
-                <a:cs typeface="微軟正黑體" pitchFamily="34" charset="-120"/>
-              </a:rPr>
-              <a:t>主動探索 AI 新工具與新潮流，維持技術敏感度</a:t>
-            </a:r>
-            <a:endParaRPr lang="en-US" sz="1200" dirty="0"/>
-          </a:p>
-          <a:p>
-            <a:pPr marL="342900" indent="-342900">
-              <a:lnSpc>
-                <a:spcPct val="130000"/>
-              </a:lnSpc>
-              <a:spcAft>
-                <a:spcPts val="700"/>
-              </a:spcAft>
-              <a:buSzPct val="100000"/>
-              <a:buChar char="•"/>
-            </a:pPr>
-            <a:r>
-              <a:rPr lang="en-US" sz="1200" dirty="0">
-                <a:solidFill>
-                  <a:srgbClr val="2B2D5C"/>
-                </a:solidFill>
-                <a:latin typeface="微軟正黑體" pitchFamily="34" charset="0"/>
-                <a:ea typeface="微軟正黑體" pitchFamily="34" charset="-122"/>
-                <a:cs typeface="微軟正黑體" pitchFamily="34" charset="-120"/>
-              </a:rPr>
-              <a:t>把兩套工具從「能用」做到「穩定」：權限、資料、錯誤處理與維運</a:t>
-            </a:r>
-            <a:endParaRPr lang="en-US" sz="1200" dirty="0"/>
-          </a:p>
-          <a:p>
-            <a:pPr marL="342900" indent="-342900">
-              <a:lnSpc>
-                <a:spcPct val="130000"/>
-              </a:lnSpc>
-              <a:spcAft>
-                <a:spcPts val="700"/>
-              </a:spcAft>
-              <a:buSzPct val="100000"/>
-              <a:buChar char="•"/>
-            </a:pPr>
-            <a:r>
-              <a:rPr lang="en-US" sz="1200" dirty="0">
-                <a:solidFill>
-                  <a:srgbClr val="2B2D5C"/>
-                </a:solidFill>
-                <a:latin typeface="微軟正黑體" pitchFamily="34" charset="0"/>
-                <a:ea typeface="微軟正黑體" pitchFamily="34" charset="-122"/>
-                <a:cs typeface="微軟正黑體" pitchFamily="34" charset="-120"/>
-              </a:rPr>
-              <a:t>對外課程正式開賣後擔任主力講師，並推動教材定稿</a:t>
-            </a:r>
-            <a:endParaRPr lang="en-US" sz="1200" dirty="0"/>
-          </a:p>
-          <a:p>
-            <a:pPr marL="342900" indent="-342900">
-              <a:lnSpc>
-                <a:spcPct val="130000"/>
-              </a:lnSpc>
-              <a:spcAft>
-                <a:spcPts val="700"/>
-              </a:spcAft>
-              <a:buSzPct val="100000"/>
-              <a:buChar char="•"/>
-            </a:pPr>
-            <a:r>
-              <a:rPr lang="en-US" sz="1200" dirty="0">
-                <a:solidFill>
-                  <a:srgbClr val="2B2D5C"/>
-                </a:solidFill>
-                <a:latin typeface="微軟正黑體" pitchFamily="34" charset="0"/>
-                <a:ea typeface="微軟正黑體" pitchFamily="34" charset="-122"/>
-                <a:cs typeface="微軟正黑體" pitchFamily="34" charset="-120"/>
-              </a:rPr>
-              <a:t>開始把兩個專案的經驗，沉澱成可複製的開發與導入方法</a:t>
-            </a:r>
-            <a:endParaRPr lang="en-US" sz="1200" dirty="0"/>
-          </a:p>
-        </p:txBody>
-      </p:sp>
-      <p:sp>
-        <p:nvSpPr>
-          <p:cNvPr id="8" name="Shape 6"/>
-          <p:cNvSpPr/>
-          <p:nvPr/>
-        </p:nvSpPr>
-        <p:spPr>
-          <a:xfrm>
-            <a:off x="4399178" y="1965960"/>
-            <a:ext cx="3393338" cy="3931920"/>
+              </a:rPr>
+              <a:t>把個人的解題經驗，沉澱成團隊可以複製的交付方式。</a:t>
+            </a:r>
+          </a:p>
+        </p:txBody>
+      </p:sp>
+      <p:sp>
+        <p:nvSpPr>
+          <p:cNvPr id="120" name="s120"/>
+          <p:cNvSpPr/>
+          <p:nvPr/>
+        </p:nvSpPr>
+        <p:spPr>
+          <a:xfrm>
+            <a:off x="640080" y="4983480"/>
+            <a:ext cx="10911535" cy="777240"/>
           </a:xfrm>
           <a:prstGeom prst="roundRect">
             <a:avLst>
-              <a:gd name="adj" fmla="val 1617"/>
+              <a:gd name="adj" fmla="val 8000"/>
             </a:avLst>
           </a:prstGeom>
           <a:solidFill>
-            <a:srgbClr val="F7F1CE"/>
+            <a:srgbClr val="2B2D5C"/>
           </a:solidFill>
-          <a:ln/>
-          <a:effectLst>
-            <a:outerShdw blurRad="101600" dist="25400" dir="5400000" algn="bl" rotWithShape="0">
-              <a:srgbClr val="9AA0BF">
-                <a:alpha val="22000"/>
-              </a:srgbClr>
-            </a:outerShdw>
-          </a:effectLst>
-        </p:spPr>
-        <p:txBody>
-          <a:bodyPr/>
-          <a:lstStyle/>
-          <a:p>
-            <a:endParaRPr lang="zh-TW" altLang="en-US"/>
-          </a:p>
-        </p:txBody>
-      </p:sp>
-      <p:sp>
-        <p:nvSpPr>
-          <p:cNvPr id="9" name="Text 7"/>
-          <p:cNvSpPr/>
-          <p:nvPr/>
-        </p:nvSpPr>
-        <p:spPr>
-          <a:xfrm>
-            <a:off x="4673498" y="2148840"/>
-            <a:ext cx="2844698" cy="566928"/>
-          </a:xfrm>
-          <a:prstGeom prst="rect">
-            <a:avLst/>
-          </a:prstGeom>
-          <a:noFill/>
-          <a:ln/>
+          <a:ln>
+            <a:noFill/>
+          </a:ln>
         </p:spPr>
         <p:txBody>
           <a:bodyPr wrap="square" lIns="0" tIns="0" rIns="0" bIns="0" rtlCol="0" anchor="ctr"/>
           <a:lstStyle/>
           <a:p>
-            <a:pPr marL="0" indent="0">
-              <a:buNone/>
-            </a:pPr>
-            <a:r>
-              <a:rPr lang="en-US" sz="2600" b="1" dirty="0">
-                <a:solidFill>
-                  <a:srgbClr val="2B2D5C"/>
-                </a:solidFill>
-                <a:latin typeface="微軟正黑體" pitchFamily="34" charset="0"/>
-                <a:ea typeface="微軟正黑體" pitchFamily="34" charset="-122"/>
-                <a:cs typeface="微軟正黑體" pitchFamily="34" charset="-120"/>
-              </a:rPr>
-              <a:t>中期</a:t>
-            </a:r>
-            <a:endParaRPr lang="en-US" sz="2600" dirty="0"/>
-          </a:p>
-        </p:txBody>
-      </p:sp>
-      <p:sp>
-        <p:nvSpPr>
-          <p:cNvPr id="10" name="Text 8"/>
-          <p:cNvSpPr/>
-          <p:nvPr/>
-        </p:nvSpPr>
-        <p:spPr>
-          <a:xfrm>
-            <a:off x="4673498" y="2697480"/>
-            <a:ext cx="2844698" cy="365760"/>
-          </a:xfrm>
-          <a:prstGeom prst="rect">
-            <a:avLst/>
-          </a:prstGeom>
-          <a:noFill/>
-          <a:ln/>
+            <a:pPr marL="0" indent="0" algn="ctr">
+              <a:buNone/>
+            </a:pPr>
+            <a:r>
+              <a:rPr lang="zh-TW" altLang="en-US" sz="1600" b="1" dirty="0">
+                <a:solidFill>
+                  <a:srgbClr val="FFFFFF"/>
+                </a:solidFill>
+                <a:latin typeface="微軟正黑體" pitchFamily="34" charset="0"/>
+                <a:ea typeface="微軟正黑體" pitchFamily="34" charset="-122"/>
+              </a:rPr>
+              <a:t>前面講的是我做到了什麼；這一章講的是我自己變成什麼樣子。</a:t>
+            </a:r>
+          </a:p>
+        </p:txBody>
+      </p:sp>
+      <p:sp>
+        <p:nvSpPr>
+          <p:cNvPr id="121" name="s121"/>
+          <p:cNvSpPr/>
+          <p:nvPr/>
+        </p:nvSpPr>
+        <p:spPr>
+          <a:xfrm>
+            <a:off x="11185855" y="6289243"/>
+            <a:ext cx="548640" cy="329184"/>
+          </a:xfrm>
+          <a:prstGeom prst="rect">
+            <a:avLst/>
+          </a:prstGeom>
+          <a:noFill/>
+          <a:ln>
+            <a:noFill/>
+          </a:ln>
         </p:spPr>
         <p:txBody>
           <a:bodyPr wrap="square" lIns="0" tIns="0" rIns="0" bIns="0" rtlCol="0" anchor="ctr"/>
           <a:lstStyle/>
           <a:p>
-            <a:pPr marL="0" indent="0">
-              <a:buNone/>
-            </a:pPr>
-            <a:r>
-              <a:rPr lang="en-US" sz="1400" dirty="0">
-                <a:solidFill>
-                  <a:srgbClr val="4A4F7A"/>
-                </a:solidFill>
-                <a:latin typeface="微軟正黑體" pitchFamily="34" charset="0"/>
-                <a:ea typeface="微軟正黑體" pitchFamily="34" charset="-122"/>
-                <a:cs typeface="微軟正黑體" pitchFamily="34" charset="-120"/>
-              </a:rPr>
-              <a:t>1 年</a:t>
-            </a:r>
-            <a:endParaRPr lang="en-US" sz="1400" dirty="0"/>
-          </a:p>
-        </p:txBody>
-      </p:sp>
-      <p:sp>
-        <p:nvSpPr>
-          <p:cNvPr id="11" name="Text 9"/>
-          <p:cNvSpPr/>
-          <p:nvPr/>
-        </p:nvSpPr>
-        <p:spPr>
-          <a:xfrm>
-            <a:off x="4691786" y="3154680"/>
-            <a:ext cx="2808122" cy="2606040"/>
-          </a:xfrm>
-          <a:prstGeom prst="rect">
-            <a:avLst/>
-          </a:prstGeom>
-          <a:noFill/>
-          <a:ln/>
-        </p:spPr>
-        <p:txBody>
-          <a:bodyPr wrap="square" lIns="0" tIns="0" rIns="0" bIns="0" rtlCol="0" anchor="t"/>
-          <a:lstStyle/>
-          <a:p>
-            <a:pPr marL="342900" indent="-342900">
-              <a:lnSpc>
-                <a:spcPct val="130000"/>
-              </a:lnSpc>
-              <a:spcAft>
-                <a:spcPts val="1000"/>
-              </a:spcAft>
-              <a:buSzPct val="100000"/>
-              <a:buChar char="•"/>
-            </a:pPr>
-            <a:r>
-              <a:rPr lang="en-US" sz="1300" dirty="0">
-                <a:solidFill>
-                  <a:srgbClr val="2B2D5C"/>
-                </a:solidFill>
-                <a:latin typeface="微軟正黑體" pitchFamily="34" charset="0"/>
-                <a:ea typeface="微軟正黑體" pitchFamily="34" charset="-122"/>
-                <a:cs typeface="微軟正黑體" pitchFamily="34" charset="-120"/>
-              </a:rPr>
-              <a:t>獨立負責一條完整產品線——從題目發想、需求訪談，到上線與維運</a:t>
-            </a:r>
-            <a:endParaRPr lang="en-US" sz="1300" dirty="0"/>
-          </a:p>
-          <a:p>
-            <a:pPr marL="342900" indent="-342900">
-              <a:lnSpc>
-                <a:spcPct val="130000"/>
-              </a:lnSpc>
-              <a:spcAft>
-                <a:spcPts val="1000"/>
-              </a:spcAft>
-              <a:buSzPct val="100000"/>
-              <a:buChar char="•"/>
-            </a:pPr>
-            <a:r>
-              <a:rPr lang="en-US" sz="1300" dirty="0">
-                <a:solidFill>
-                  <a:srgbClr val="2B2D5C"/>
-                </a:solidFill>
-                <a:latin typeface="微軟正黑體" pitchFamily="34" charset="0"/>
-                <a:ea typeface="微軟正黑體" pitchFamily="34" charset="-122"/>
-                <a:cs typeface="微軟正黑體" pitchFamily="34" charset="-120"/>
-              </a:rPr>
-              <a:t>把可複製的方法真正用在第三、第四個專案上，驗證它站得住</a:t>
-            </a:r>
-            <a:endParaRPr lang="en-US" sz="1300" dirty="0"/>
-          </a:p>
-        </p:txBody>
-      </p:sp>
-      <p:sp>
-        <p:nvSpPr>
-          <p:cNvPr id="12" name="Shape 10"/>
-          <p:cNvSpPr/>
-          <p:nvPr/>
-        </p:nvSpPr>
-        <p:spPr>
-          <a:xfrm>
-            <a:off x="8158277" y="1965960"/>
-            <a:ext cx="3393338" cy="3931920"/>
-          </a:xfrm>
-          <a:prstGeom prst="roundRect">
-            <a:avLst>
-              <a:gd name="adj" fmla="val 1617"/>
-            </a:avLst>
-          </a:prstGeom>
-          <a:solidFill>
-            <a:srgbClr val="6DCFA5"/>
-          </a:solidFill>
-          <a:ln/>
-          <a:effectLst>
-            <a:outerShdw blurRad="101600" dist="25400" dir="5400000" algn="bl" rotWithShape="0">
-              <a:srgbClr val="9AA0BF">
-                <a:alpha val="22000"/>
-              </a:srgbClr>
-            </a:outerShdw>
-          </a:effectLst>
-        </p:spPr>
-        <p:txBody>
-          <a:bodyPr/>
-          <a:lstStyle/>
-          <a:p>
-            <a:endParaRPr lang="zh-TW" altLang="en-US"/>
-          </a:p>
-        </p:txBody>
-      </p:sp>
-      <p:sp>
-        <p:nvSpPr>
-          <p:cNvPr id="13" name="Text 11"/>
-          <p:cNvSpPr/>
-          <p:nvPr/>
-        </p:nvSpPr>
-        <p:spPr>
-          <a:xfrm>
-            <a:off x="8432597" y="2148840"/>
-            <a:ext cx="2844698" cy="566928"/>
-          </a:xfrm>
-          <a:prstGeom prst="rect">
-            <a:avLst/>
-          </a:prstGeom>
-          <a:noFill/>
-          <a:ln/>
-        </p:spPr>
-        <p:txBody>
-          <a:bodyPr wrap="square" lIns="0" tIns="0" rIns="0" bIns="0" rtlCol="0" anchor="ctr"/>
-          <a:lstStyle/>
-          <a:p>
-            <a:pPr marL="0" indent="0">
-              <a:buNone/>
-            </a:pPr>
-            <a:r>
-              <a:rPr lang="en-US" sz="2600" b="1" dirty="0">
-                <a:solidFill>
-                  <a:srgbClr val="2B2D5C"/>
-                </a:solidFill>
-                <a:latin typeface="微軟正黑體" pitchFamily="34" charset="0"/>
-                <a:ea typeface="微軟正黑體" pitchFamily="34" charset="-122"/>
-                <a:cs typeface="微軟正黑體" pitchFamily="34" charset="-120"/>
-              </a:rPr>
-              <a:t>長期</a:t>
-            </a:r>
-            <a:endParaRPr lang="en-US" sz="2600" dirty="0"/>
-          </a:p>
-        </p:txBody>
-      </p:sp>
-      <p:sp>
-        <p:nvSpPr>
-          <p:cNvPr id="14" name="Text 12"/>
-          <p:cNvSpPr/>
-          <p:nvPr/>
-        </p:nvSpPr>
-        <p:spPr>
-          <a:xfrm>
-            <a:off x="8432597" y="2697480"/>
-            <a:ext cx="2844698" cy="365760"/>
-          </a:xfrm>
-          <a:prstGeom prst="rect">
-            <a:avLst/>
-          </a:prstGeom>
-          <a:noFill/>
-          <a:ln/>
-        </p:spPr>
-        <p:txBody>
-          <a:bodyPr wrap="square" lIns="0" tIns="0" rIns="0" bIns="0" rtlCol="0" anchor="ctr"/>
-          <a:lstStyle/>
-          <a:p>
-            <a:pPr marL="0" indent="0">
-              <a:buNone/>
-            </a:pPr>
-            <a:r>
-              <a:rPr lang="en-US" sz="1400" dirty="0">
-                <a:solidFill>
-                  <a:srgbClr val="4A4F7A"/>
-                </a:solidFill>
-                <a:latin typeface="微軟正黑體" pitchFamily="34" charset="0"/>
-                <a:ea typeface="微軟正黑體" pitchFamily="34" charset="-122"/>
-                <a:cs typeface="微軟正黑體" pitchFamily="34" charset="-120"/>
-              </a:rPr>
-              <a:t>3～5 年</a:t>
-            </a:r>
-            <a:endParaRPr lang="en-US" sz="1400" dirty="0"/>
-          </a:p>
-        </p:txBody>
-      </p:sp>
-      <p:sp>
-        <p:nvSpPr>
-          <p:cNvPr id="15" name="Text 13"/>
-          <p:cNvSpPr/>
-          <p:nvPr/>
-        </p:nvSpPr>
-        <p:spPr>
-          <a:xfrm>
-            <a:off x="8450885" y="3154680"/>
-            <a:ext cx="2808122" cy="2606040"/>
-          </a:xfrm>
-          <a:prstGeom prst="rect">
-            <a:avLst/>
-          </a:prstGeom>
-          <a:noFill/>
-          <a:ln/>
-        </p:spPr>
-        <p:txBody>
-          <a:bodyPr wrap="square" lIns="0" tIns="0" rIns="0" bIns="0" rtlCol="0" anchor="t"/>
-          <a:lstStyle/>
-          <a:p>
-            <a:pPr marL="342900" indent="-342900">
-              <a:lnSpc>
-                <a:spcPct val="130000"/>
-              </a:lnSpc>
-              <a:spcAft>
-                <a:spcPts val="1000"/>
-              </a:spcAft>
-              <a:buSzPct val="100000"/>
-              <a:buChar char="•"/>
-            </a:pPr>
-            <a:r>
-              <a:rPr lang="en-US" sz="1300" dirty="0">
-                <a:solidFill>
-                  <a:srgbClr val="2B2D5C"/>
-                </a:solidFill>
-                <a:latin typeface="微軟正黑體" pitchFamily="34" charset="0"/>
-                <a:ea typeface="微軟正黑體" pitchFamily="34" charset="-122"/>
-                <a:cs typeface="微軟正黑體" pitchFamily="34" charset="-120"/>
-              </a:rPr>
-              <a:t>成為能同時掌握「對外課程產品」與「對內系統落地」的產品負責人</a:t>
-            </a:r>
-            <a:endParaRPr lang="en-US" sz="1300" dirty="0"/>
-          </a:p>
-          <a:p>
-            <a:pPr marL="342900" indent="-342900">
-              <a:lnSpc>
-                <a:spcPct val="130000"/>
-              </a:lnSpc>
-              <a:spcAft>
-                <a:spcPts val="1000"/>
-              </a:spcAft>
-              <a:buSzPct val="100000"/>
-              <a:buChar char="•"/>
-            </a:pPr>
-            <a:r>
-              <a:rPr lang="en-US" sz="1300" dirty="0">
-                <a:solidFill>
-                  <a:srgbClr val="2B2D5C"/>
-                </a:solidFill>
-                <a:latin typeface="微軟正黑體" pitchFamily="34" charset="0"/>
-                <a:ea typeface="微軟正黑體" pitchFamily="34" charset="-122"/>
-                <a:cs typeface="微軟正黑體" pitchFamily="34" charset="-120"/>
-              </a:rPr>
-              <a:t>讓 AI 導入在公司內成為標準做法，而不是每次都從零開始的個案</a:t>
-            </a:r>
-            <a:endParaRPr lang="en-US" sz="1300" dirty="0"/>
-          </a:p>
-        </p:txBody>
-      </p:sp>
-      <p:sp>
-        <p:nvSpPr>
-          <p:cNvPr id="16" name="Text 14"/>
-          <p:cNvSpPr/>
-          <p:nvPr/>
-        </p:nvSpPr>
-        <p:spPr>
-          <a:xfrm>
-            <a:off x="11185855" y="6291072"/>
-            <a:ext cx="548640" cy="329184"/>
-          </a:xfrm>
-          <a:prstGeom prst="rect">
-            <a:avLst/>
-          </a:prstGeom>
-          <a:noFill/>
-          <a:ln/>
-        </p:spPr>
-        <p:txBody>
-          <a:bodyPr wrap="square" lIns="0" tIns="0" rIns="0" bIns="0" rtlCol="0" anchor="ctr"/>
-          <a:lstStyle/>
-          <a:p>
             <a:pPr marL="0" indent="0" algn="r">
               <a:buNone/>
             </a:pPr>
-            <a:fld id="{CDE47514-61BF-448B-9016-C6B12BFBAF8D}" type="slidenum">
-              <a:rPr lang="en-US" sz="1100" dirty="0">
+            <a:fld id="{6A6D2639-37E4-451F-9B37-33120E13EBCA}" type="slidenum">
+              <a:rPr lang="zh-TW" altLang="en-US" sz="1100" b="0" dirty="0">
                 <a:solidFill>
                   <a:srgbClr val="6E7191"/>
                 </a:solidFill>
                 <a:latin typeface="微軟正黑體" pitchFamily="34" charset="0"/>
                 <a:ea typeface="微軟正黑體" pitchFamily="34" charset="-122"/>
-                <a:cs typeface="微軟正黑體" pitchFamily="34" charset="-120"/>
-              </a:rPr>
-              <a:t>33</a:t>
+              </a:rPr>
+              <a:t>1</a:t>
             </a:fld>
-            <a:endParaRPr lang="en-US" sz="1100" dirty="0"/>
           </a:p>
         </p:txBody>
       </p:sp>
@@ -16914,7 +16483,7 @@
 </p:sld>
 </file>
 
-<file path=ppt/slides/slide25.xml><?xml version="1.0" encoding="utf-8"?>
+<file path=ppt/slides/slide28.xml><?xml version="1.0" encoding="utf-8"?>
 <p:sld xmlns:a="http://schemas.openxmlformats.org/drawingml/2006/main" xmlns:r="http://schemas.openxmlformats.org/officeDocument/2006/relationships" xmlns:p="http://schemas.openxmlformats.org/presentationml/2006/main">
   <p:cSld name="Slide 34">
     <p:bg>
@@ -16976,7 +16545,7 @@
                 <a:ea typeface="微軟正黑體" pitchFamily="34" charset="-122"/>
                 <a:cs typeface="微軟正黑體" pitchFamily="34" charset="-120"/>
               </a:rPr>
-              <a:t>七、對公司的建議</a:t>
+              <a:t>六、對公司的建議</a:t>
             </a:r>
             <a:endParaRPr lang="en-US" sz="1200" dirty="0"/>
           </a:p>
@@ -17582,7 +17151,7 @@
                 <a:ea typeface="微軟正黑體" pitchFamily="34" charset="-122"/>
                 <a:cs typeface="微軟正黑體" pitchFamily="34" charset="-120"/>
               </a:rPr>
-              <a:t>34</a:t>
+              <a:t>28</a:t>
             </a:fld>
             <a:endParaRPr lang="en-US" sz="1100" dirty="0"/>
           </a:p>
@@ -17596,7 +17165,7 @@
 </p:sld>
 </file>
 
-<file path=ppt/slides/slide26.xml><?xml version="1.0" encoding="utf-8"?>
+<file path=ppt/slides/slide29.xml><?xml version="1.0" encoding="utf-8"?>
 <p:sld xmlns:a="http://schemas.openxmlformats.org/drawingml/2006/main" xmlns:r="http://schemas.openxmlformats.org/officeDocument/2006/relationships" xmlns:p="http://schemas.openxmlformats.org/presentationml/2006/main">
   <p:cSld name="Slide 35">
     <p:bg>
@@ -17732,1386 +17301,9 @@
                 <a:ea typeface="微軟正黑體" pitchFamily="34" charset="-122"/>
                 <a:cs typeface="微軟正黑體" pitchFamily="34" charset="-120"/>
               </a:rPr>
-              <a:t>35</a:t>
+              <a:t>29</a:t>
             </a:fld>
             <a:endParaRPr lang="en-US" sz="1100" dirty="0"/>
-          </a:p>
-        </p:txBody>
-      </p:sp>
-    </p:spTree>
-  </p:cSld>
-  <p:clrMapOvr>
-    <a:masterClrMapping/>
-  </p:clrMapOvr>
-</p:sld>
-</file>
-
-<file path=ppt/slides/slide27.xml><?xml version="1.0" encoding="utf-8"?>
-<p:sld xmlns:a="http://schemas.openxmlformats.org/drawingml/2006/main" xmlns:r="http://schemas.openxmlformats.org/officeDocument/2006/relationships" xmlns:p="http://schemas.openxmlformats.org/presentationml/2006/main">
-  <p:cSld name="Slide 32">
-    <p:bg>
-      <p:bgPr>
-        <a:solidFill>
-          <a:srgbClr val="FFFFFF"/>
-        </a:solidFill>
-        <a:effectLst/>
-      </p:bgPr>
-    </p:bg>
-    <p:spTree>
-      <p:nvGrpSpPr>
-        <p:cNvPr id="1" name=""/>
-        <p:cNvGrpSpPr/>
-        <p:nvPr/>
-      </p:nvGrpSpPr>
-      <p:grpSpPr>
-        <a:xfrm>
-          <a:off x="0" y="0"/>
-          <a:ext cx="0" cy="0"/>
-          <a:chOff x="0" y="0"/>
-          <a:chExt cx="0" cy="0"/>
-        </a:xfrm>
-      </p:grpSpPr>
-      <p:sp>
-        <p:nvSpPr>
-          <p:cNvPr id="117" name="s117"/>
-          <p:cNvSpPr/>
-          <p:nvPr/>
-        </p:nvSpPr>
-        <p:spPr>
-          <a:xfrm>
-            <a:off x="640080" y="475488"/>
-            <a:ext cx="2286000" cy="329184"/>
-          </a:xfrm>
-          <a:prstGeom prst="roundRect">
-            <a:avLst>
-              <a:gd name="adj" fmla="val 44000"/>
-            </a:avLst>
-          </a:prstGeom>
-          <a:solidFill>
-            <a:srgbClr val="D6D9F0"/>
-          </a:solidFill>
-          <a:ln>
-            <a:noFill/>
-          </a:ln>
-        </p:spPr>
-        <p:txBody>
-          <a:bodyPr wrap="square" lIns="0" tIns="0" rIns="0" bIns="0" rtlCol="0" anchor="ctr"/>
-          <a:lstStyle/>
-          <a:p>
-            <a:pPr marL="0" indent="0" algn="ctr">
-              <a:buNone/>
-            </a:pPr>
-            <a:r>
-              <a:rPr lang="zh-TW" altLang="en-US" sz="1200" b="1" i="0" dirty="0">
-                <a:solidFill>
-                  <a:srgbClr val="2B2D5C"/>
-                </a:solidFill>
-                <a:latin typeface="微軟正黑體" pitchFamily="34" charset="0"/>
-                <a:ea typeface="微軟正黑體" pitchFamily="34" charset="-122"/>
-              </a:rPr>
-              <a:t>五、學習心得</a:t>
-            </a:r>
-          </a:p>
-        </p:txBody>
-      </p:sp>
-      <p:sp>
-        <p:nvSpPr>
-          <p:cNvPr id="118" name="s118"/>
-          <p:cNvSpPr/>
-          <p:nvPr/>
-        </p:nvSpPr>
-        <p:spPr>
-          <a:xfrm>
-            <a:off x="640080" y="914400"/>
-            <a:ext cx="10911535" cy="731520"/>
-          </a:xfrm>
-          <a:prstGeom prst="rect">
-            <a:avLst/>
-          </a:prstGeom>
-          <a:noFill/>
-          <a:ln>
-            <a:noFill/>
-          </a:ln>
-        </p:spPr>
-        <p:txBody>
-          <a:bodyPr wrap="square" lIns="0" tIns="0" rIns="0" bIns="0" rtlCol="0" anchor="ctr"/>
-          <a:lstStyle/>
-          <a:p>
-            <a:pPr marL="0" indent="0" algn="l">
-              <a:buNone/>
-            </a:pPr>
-            <a:r>
-              <a:rPr lang="zh-TW" altLang="en-US" sz="3000" b="1" i="0" dirty="0">
-                <a:solidFill>
-                  <a:srgbClr val="2B2D5C"/>
-                </a:solidFill>
-                <a:latin typeface="微軟正黑體" pitchFamily="34" charset="0"/>
-                <a:ea typeface="微軟正黑體" pitchFamily="34" charset="-122"/>
-              </a:rPr>
-              <a:t>困難三：提需求的人，說不清楚自己的問題</a:t>
-            </a:r>
-          </a:p>
-        </p:txBody>
-      </p:sp>
-      <p:sp>
-        <p:nvSpPr>
-          <p:cNvPr id="119" name="s119"/>
-          <p:cNvSpPr/>
-          <p:nvPr/>
-        </p:nvSpPr>
-        <p:spPr>
-          <a:xfrm>
-            <a:off x="640080" y="1737360"/>
-            <a:ext cx="5272888" cy="1325880"/>
-          </a:xfrm>
-          <a:prstGeom prst="roundRect">
-            <a:avLst>
-              <a:gd name="adj" fmla="val 5000"/>
-            </a:avLst>
-          </a:prstGeom>
-          <a:solidFill>
-            <a:srgbClr val="ECEEF8"/>
-          </a:solidFill>
-          <a:ln>
-            <a:noFill/>
-          </a:ln>
-        </p:spPr>
-        <p:txBody>
-          <a:bodyPr wrap="square" lIns="310896" tIns="201168" rIns="310896" bIns="201168" rtlCol="0" anchor="ctr"/>
-          <a:lstStyle/>
-          <a:p>
-            <a:pPr marL="0" indent="0" algn="l">
-              <a:buNone/>
-            </a:pPr>
-            <a:r>
-              <a:rPr lang="zh-TW" altLang="en-US" sz="1400" b="1" i="0" dirty="0">
-                <a:solidFill>
-                  <a:srgbClr val="4A4F7A"/>
-                </a:solidFill>
-                <a:latin typeface="微軟正黑體" pitchFamily="34" charset="0"/>
-                <a:ea typeface="微軟正黑體" pitchFamily="34" charset="-122"/>
-              </a:rPr>
-              <a:t>我原本以為</a:t>
-            </a:r>
-          </a:p>
-          <a:p>
-            <a:pPr marL="0" indent="0" algn="l">
-              <a:spcBef>
-                <a:spcPts val="500"/>
-              </a:spcBef>
-              <a:buNone/>
-            </a:pPr>
-            <a:r>
-              <a:rPr lang="zh-TW" altLang="en-US" sz="1350" b="0" i="0" dirty="0">
-                <a:solidFill>
-                  <a:srgbClr val="2B2D5C"/>
-                </a:solidFill>
-                <a:latin typeface="微軟正黑體" pitchFamily="34" charset="0"/>
-                <a:ea typeface="微軟正黑體" pitchFamily="34" charset="-122"/>
-              </a:rPr>
-              <a:t>需求文件寫什麼，我就照著做什麼。</a:t>
-            </a:r>
-          </a:p>
-        </p:txBody>
-      </p:sp>
-      <p:sp>
-        <p:nvSpPr>
-          <p:cNvPr id="120" name="s120"/>
-          <p:cNvSpPr/>
-          <p:nvPr/>
-        </p:nvSpPr>
-        <p:spPr>
-          <a:xfrm>
-            <a:off x="6278728" y="1737360"/>
-            <a:ext cx="5272888" cy="1325880"/>
-          </a:xfrm>
-          <a:prstGeom prst="roundRect">
-            <a:avLst>
-              <a:gd name="adj" fmla="val 5000"/>
-            </a:avLst>
-          </a:prstGeom>
-          <a:solidFill>
-            <a:srgbClr val="F2E2DA"/>
-          </a:solidFill>
-          <a:ln>
-            <a:noFill/>
-          </a:ln>
-        </p:spPr>
-        <p:txBody>
-          <a:bodyPr wrap="square" lIns="310896" tIns="201168" rIns="310896" bIns="201168" rtlCol="0" anchor="ctr"/>
-          <a:lstStyle/>
-          <a:p>
-            <a:pPr marL="0" indent="0" algn="l">
-              <a:buNone/>
-            </a:pPr>
-            <a:r>
-              <a:rPr lang="zh-TW" altLang="en-US" sz="1400" b="1" i="0" dirty="0">
-                <a:solidFill>
-                  <a:srgbClr val="D95F2B"/>
-                </a:solidFill>
-                <a:latin typeface="微軟正黑體" pitchFamily="34" charset="0"/>
-                <a:ea typeface="微軟正黑體" pitchFamily="34" charset="-122"/>
-              </a:rPr>
-              <a:t>實際撞到的</a:t>
-            </a:r>
-          </a:p>
-          <a:p>
-            <a:pPr marL="0" indent="0" algn="l">
-              <a:spcBef>
-                <a:spcPts val="500"/>
-              </a:spcBef>
-              <a:buNone/>
-            </a:pPr>
-            <a:r>
-              <a:rPr lang="zh-TW" altLang="en-US" sz="1350" b="0" i="0" dirty="0">
-                <a:solidFill>
-                  <a:srgbClr val="2B2D5C"/>
-                </a:solidFill>
-                <a:latin typeface="微軟正黑體" pitchFamily="34" charset="0"/>
-                <a:ea typeface="微軟正黑體" pitchFamily="34" charset="-122"/>
-              </a:rPr>
-              <a:t>向解題小組提需求的人，常常沒辦法解釋清楚自己真正卡在哪。神秘客系統的申覆功能不在任何一份需求文件上，是我把整個流程走過一遍之後才發現非做不可。</a:t>
-            </a:r>
-          </a:p>
-        </p:txBody>
-      </p:sp>
-      <p:sp>
-        <p:nvSpPr>
-          <p:cNvPr id="121" name="s121"/>
-          <p:cNvSpPr/>
-          <p:nvPr/>
-        </p:nvSpPr>
-        <p:spPr>
-          <a:xfrm>
-            <a:off x="640080" y="3154680"/>
-            <a:ext cx="10911535" cy="1188720"/>
-          </a:xfrm>
-          <a:prstGeom prst="roundRect">
-            <a:avLst>
-              <a:gd name="adj" fmla="val 5000"/>
-            </a:avLst>
-          </a:prstGeom>
-          <a:solidFill>
-            <a:srgbClr val="F7F1CE"/>
-          </a:solidFill>
-          <a:ln>
-            <a:noFill/>
-          </a:ln>
-        </p:spPr>
-        <p:txBody>
-          <a:bodyPr wrap="square" lIns="310896" tIns="201168" rIns="310896" bIns="201168" rtlCol="0" anchor="ctr"/>
-          <a:lstStyle/>
-          <a:p>
-            <a:pPr marL="0" indent="0" algn="l">
-              <a:buNone/>
-            </a:pPr>
-            <a:r>
-              <a:rPr lang="zh-TW" altLang="en-US" sz="1400" b="1" i="0" dirty="0">
-                <a:solidFill>
-                  <a:srgbClr val="D95F2B"/>
-                </a:solidFill>
-                <a:latin typeface="微軟正黑體" pitchFamily="34" charset="0"/>
-                <a:ea typeface="微軟正黑體" pitchFamily="34" charset="-122"/>
-              </a:rPr>
-              <a:t>我怎麼處理</a:t>
-            </a:r>
-          </a:p>
-          <a:p>
-            <a:pPr marL="0" indent="0" algn="l">
-              <a:spcBef>
-                <a:spcPts val="500"/>
-              </a:spcBef>
-              <a:buNone/>
-            </a:pPr>
-            <a:r>
-              <a:rPr lang="zh-TW" altLang="en-US" sz="1350" b="0" i="0" dirty="0">
-                <a:solidFill>
-                  <a:srgbClr val="2B2D5C"/>
-                </a:solidFill>
-                <a:latin typeface="微軟正黑體" pitchFamily="34" charset="0"/>
-                <a:ea typeface="微軟正黑體" pitchFamily="34" charset="-122"/>
-              </a:rPr>
-              <a:t>先去理解業務，再定規格。後來乾脆把這件事本身做成工具——PRD 機器人就是在用大量反問，幫人把說不清楚的想法問出來。</a:t>
-            </a:r>
-          </a:p>
-        </p:txBody>
-      </p:sp>
-      <p:sp>
-        <p:nvSpPr>
-          <p:cNvPr id="122" name="s122"/>
-          <p:cNvSpPr/>
-          <p:nvPr/>
-        </p:nvSpPr>
-        <p:spPr>
-          <a:xfrm>
-            <a:off x="658368" y="4434840"/>
-            <a:ext cx="10911535" cy="329184"/>
-          </a:xfrm>
-          <a:prstGeom prst="rect">
-            <a:avLst/>
-          </a:prstGeom>
-          <a:noFill/>
-          <a:ln>
-            <a:noFill/>
-          </a:ln>
-        </p:spPr>
-        <p:txBody>
-          <a:bodyPr wrap="square" lIns="0" tIns="0" rIns="0" bIns="0" rtlCol="0" anchor="ctr"/>
-          <a:lstStyle/>
-          <a:p>
-            <a:pPr marL="0" indent="0" algn="l">
-              <a:buNone/>
-            </a:pPr>
-            <a:r>
-              <a:rPr lang="zh-TW" altLang="en-US" sz="1250" b="1" i="0" dirty="0">
-                <a:solidFill>
-                  <a:srgbClr val="D95F2B"/>
-                </a:solidFill>
-                <a:latin typeface="微軟正黑體" pitchFamily="34" charset="0"/>
-                <a:ea typeface="微軟正黑體" pitchFamily="34" charset="-122"/>
-              </a:rPr>
-              <a:t>為此我補了　</a:t>
-            </a:r>
-            <a:r>
-              <a:rPr lang="zh-TW" altLang="en-US" sz="1250" b="0" i="0" dirty="0">
-                <a:solidFill>
-                  <a:srgbClr val="4A4F7A"/>
-                </a:solidFill>
-                <a:latin typeface="微軟正黑體" pitchFamily="34" charset="0"/>
-                <a:ea typeface="微軟正黑體" pitchFamily="34" charset="-122"/>
-              </a:rPr>
-              <a:t>Claude Design、Figma Make、原型設計工具</a:t>
-            </a:r>
-          </a:p>
-        </p:txBody>
-      </p:sp>
-      <p:sp>
-        <p:nvSpPr>
-          <p:cNvPr id="123" name="s123"/>
-          <p:cNvSpPr/>
-          <p:nvPr/>
-        </p:nvSpPr>
-        <p:spPr>
-          <a:xfrm>
-            <a:off x="640080" y="4846320"/>
-            <a:ext cx="10911535" cy="1097280"/>
-          </a:xfrm>
-          <a:prstGeom prst="roundRect">
-            <a:avLst>
-              <a:gd name="adj" fmla="val 5000"/>
-            </a:avLst>
-          </a:prstGeom>
-          <a:solidFill>
-            <a:srgbClr val="2B2D5C"/>
-          </a:solidFill>
-          <a:ln>
-            <a:noFill/>
-          </a:ln>
-        </p:spPr>
-        <p:txBody>
-          <a:bodyPr wrap="square" lIns="329184" tIns="164592" rIns="329184" bIns="164592" rtlCol="0" anchor="ctr"/>
-          <a:lstStyle/>
-          <a:p>
-            <a:pPr marL="0" indent="0" algn="l">
-              <a:buNone/>
-            </a:pPr>
-            <a:r>
-              <a:rPr lang="zh-TW" altLang="en-US" sz="1150" b="1" i="0" dirty="0">
-                <a:solidFill>
-                  <a:srgbClr val="D6D9F0"/>
-                </a:solidFill>
-                <a:latin typeface="微軟正黑體" pitchFamily="34" charset="0"/>
-                <a:ea typeface="微軟正黑體" pitchFamily="34" charset="-122"/>
-              </a:rPr>
-              <a:t>學到什麼</a:t>
-            </a:r>
-          </a:p>
-          <a:p>
-            <a:pPr marL="0" indent="0" algn="l">
-              <a:spcBef>
-                <a:spcPts val="400"/>
-              </a:spcBef>
-              <a:buNone/>
-            </a:pPr>
-            <a:r>
-              <a:rPr lang="zh-TW" altLang="en-US" sz="1500" b="1" i="0" dirty="0">
-                <a:solidFill>
-                  <a:srgbClr val="FFFFFF"/>
-                </a:solidFill>
-                <a:latin typeface="微軟正黑體" pitchFamily="34" charset="0"/>
-                <a:ea typeface="微軟正黑體" pitchFamily="34" charset="-122"/>
-              </a:rPr>
-              <a:t>需求文件是討論的結果，不是起點；而且東西做完不等於結束。</a:t>
-            </a:r>
-          </a:p>
-          <a:p>
-            <a:pPr marL="0" indent="0" algn="l">
-              <a:spcBef>
-                <a:spcPts val="500"/>
-              </a:spcBef>
-              <a:buNone/>
-            </a:pPr>
-            <a:r>
-              <a:rPr lang="zh-TW" altLang="en-US" sz="1250" b="0" i="0" dirty="0">
-                <a:solidFill>
-                  <a:srgbClr val="D6D9F0"/>
-                </a:solidFill>
-                <a:latin typeface="微軟正黑體" pitchFamily="34" charset="0"/>
-                <a:ea typeface="微軟正黑體" pitchFamily="34" charset="-122"/>
-              </a:rPr>
-              <a:t>這四個多月我補的東西，沒有一項是有人要求我去學的。下班後我也在用 AI 幫自己開發 TRPG 規則書——對我來說這不是工作要求，是習慣。</a:t>
-            </a:r>
-          </a:p>
-        </p:txBody>
-      </p:sp>
-      <p:sp>
-        <p:nvSpPr>
-          <p:cNvPr id="124" name="s124"/>
-          <p:cNvSpPr/>
-          <p:nvPr/>
-        </p:nvSpPr>
-        <p:spPr>
-          <a:xfrm>
-            <a:off x="11185855" y="6289243"/>
-            <a:ext cx="548640" cy="329184"/>
-          </a:xfrm>
-          <a:prstGeom prst="rect">
-            <a:avLst/>
-          </a:prstGeom>
-          <a:noFill/>
-          <a:ln>
-            <a:noFill/>
-          </a:ln>
-        </p:spPr>
-        <p:txBody>
-          <a:bodyPr wrap="square" lIns="0" tIns="0" rIns="0" bIns="0" rtlCol="0" anchor="ctr"/>
-          <a:lstStyle/>
-          <a:p>
-            <a:pPr marL="0" indent="0" algn="r">
-              <a:buNone/>
-            </a:pPr>
-            <a:fld id="{EAFA4187-D208-4BF4-8389-CFB616CCEB49}" type="slidenum">
-              <a:rPr lang="zh-TW" altLang="en-US" sz="1100" b="0" i="0" dirty="0">
-                <a:solidFill>
-                  <a:srgbClr val="6E7191"/>
-                </a:solidFill>
-                <a:latin typeface="微軟正黑體" pitchFamily="34" charset="0"/>
-                <a:ea typeface="微軟正黑體" pitchFamily="34" charset="-122"/>
-              </a:rPr>
-              <a:t>1</a:t>
-            </a:fld>
-          </a:p>
-        </p:txBody>
-      </p:sp>
-    </p:spTree>
-  </p:cSld>
-  <p:clrMapOvr>
-    <a:masterClrMapping/>
-  </p:clrMapOvr>
-</p:sld>
-</file>
-
-<file path=ppt/slides/slide28.xml><?xml version="1.0" encoding="utf-8"?>
-<p:sld xmlns:a="http://schemas.openxmlformats.org/drawingml/2006/main" xmlns:r="http://schemas.openxmlformats.org/officeDocument/2006/relationships" xmlns:p="http://schemas.openxmlformats.org/presentationml/2006/main">
-  <p:cSld name="Slide 32">
-    <p:bg>
-      <p:bgPr>
-        <a:solidFill>
-          <a:srgbClr val="FFFFFF"/>
-        </a:solidFill>
-        <a:effectLst/>
-      </p:bgPr>
-    </p:bg>
-    <p:spTree>
-      <p:nvGrpSpPr>
-        <p:cNvPr id="1" name=""/>
-        <p:cNvGrpSpPr/>
-        <p:nvPr/>
-      </p:nvGrpSpPr>
-      <p:grpSpPr>
-        <a:xfrm>
-          <a:off x="0" y="0"/>
-          <a:ext cx="0" cy="0"/>
-          <a:chOff x="0" y="0"/>
-          <a:chExt cx="0" cy="0"/>
-        </a:xfrm>
-      </p:grpSpPr>
-      <p:sp>
-        <p:nvSpPr>
-          <p:cNvPr id="109" name="s109"/>
-          <p:cNvSpPr/>
-          <p:nvPr/>
-        </p:nvSpPr>
-        <p:spPr>
-          <a:xfrm>
-            <a:off x="640080" y="475488"/>
-            <a:ext cx="2286000" cy="329184"/>
-          </a:xfrm>
-          <a:prstGeom prst="roundRect">
-            <a:avLst>
-              <a:gd name="adj" fmla="val 44000"/>
-            </a:avLst>
-          </a:prstGeom>
-          <a:solidFill>
-            <a:srgbClr val="D6D9F0"/>
-          </a:solidFill>
-          <a:ln>
-            <a:noFill/>
-          </a:ln>
-        </p:spPr>
-        <p:txBody>
-          <a:bodyPr wrap="square" lIns="0" tIns="0" rIns="0" bIns="0" rtlCol="0" anchor="ctr"/>
-          <a:lstStyle/>
-          <a:p>
-            <a:pPr marL="0" indent="0" algn="ctr">
-              <a:buNone/>
-            </a:pPr>
-            <a:r>
-              <a:rPr lang="zh-TW" altLang="en-US" sz="1200" b="1" i="0" dirty="0">
-                <a:solidFill>
-                  <a:srgbClr val="2B2D5C"/>
-                </a:solidFill>
-                <a:latin typeface="微軟正黑體" pitchFamily="34" charset="0"/>
-                <a:ea typeface="微軟正黑體" pitchFamily="34" charset="-122"/>
-              </a:rPr>
-              <a:t>五、學習心得</a:t>
-            </a:r>
-          </a:p>
-        </p:txBody>
-      </p:sp>
-      <p:sp>
-        <p:nvSpPr>
-          <p:cNvPr id="110" name="s110"/>
-          <p:cNvSpPr/>
-          <p:nvPr/>
-        </p:nvSpPr>
-        <p:spPr>
-          <a:xfrm>
-            <a:off x="640080" y="914400"/>
-            <a:ext cx="10911535" cy="731520"/>
-          </a:xfrm>
-          <a:prstGeom prst="rect">
-            <a:avLst/>
-          </a:prstGeom>
-          <a:noFill/>
-          <a:ln>
-            <a:noFill/>
-          </a:ln>
-        </p:spPr>
-        <p:txBody>
-          <a:bodyPr wrap="square" lIns="0" tIns="0" rIns="0" bIns="0" rtlCol="0" anchor="ctr"/>
-          <a:lstStyle/>
-          <a:p>
-            <a:pPr marL="0" indent="0" algn="l">
-              <a:buNone/>
-            </a:pPr>
-            <a:r>
-              <a:rPr lang="zh-TW" altLang="en-US" sz="3000" b="1" i="0" dirty="0">
-                <a:solidFill>
-                  <a:srgbClr val="2B2D5C"/>
-                </a:solidFill>
-                <a:latin typeface="微軟正黑體" pitchFamily="34" charset="0"/>
-                <a:ea typeface="微軟正黑體" pitchFamily="34" charset="-122"/>
-              </a:rPr>
-              <a:t>困難二：知道 AI 做得差，但說不出哪裡差</a:t>
-            </a:r>
-          </a:p>
-        </p:txBody>
-      </p:sp>
-      <p:sp>
-        <p:nvSpPr>
-          <p:cNvPr id="111" name="s111"/>
-          <p:cNvSpPr/>
-          <p:nvPr/>
-        </p:nvSpPr>
-        <p:spPr>
-          <a:xfrm>
-            <a:off x="640080" y="1737360"/>
-            <a:ext cx="5272888" cy="1325880"/>
-          </a:xfrm>
-          <a:prstGeom prst="roundRect">
-            <a:avLst>
-              <a:gd name="adj" fmla="val 5000"/>
-            </a:avLst>
-          </a:prstGeom>
-          <a:solidFill>
-            <a:srgbClr val="ECEEF8"/>
-          </a:solidFill>
-          <a:ln>
-            <a:noFill/>
-          </a:ln>
-        </p:spPr>
-        <p:txBody>
-          <a:bodyPr wrap="square" lIns="310896" tIns="201168" rIns="310896" bIns="201168" rtlCol="0" anchor="ctr"/>
-          <a:lstStyle/>
-          <a:p>
-            <a:pPr marL="0" indent="0" algn="l">
-              <a:buNone/>
-            </a:pPr>
-            <a:r>
-              <a:rPr lang="zh-TW" altLang="en-US" sz="1400" b="1" i="0" dirty="0">
-                <a:solidFill>
-                  <a:srgbClr val="4A4F7A"/>
-                </a:solidFill>
-                <a:latin typeface="微軟正黑體" pitchFamily="34" charset="0"/>
-                <a:ea typeface="微軟正黑體" pitchFamily="34" charset="-122"/>
-              </a:rPr>
-              <a:t>我原本以為</a:t>
-            </a:r>
-          </a:p>
-          <a:p>
-            <a:pPr marL="0" indent="0" algn="l">
-              <a:spcBef>
-                <a:spcPts val="500"/>
-              </a:spcBef>
-              <a:buNone/>
-            </a:pPr>
-            <a:r>
-              <a:rPr lang="zh-TW" altLang="en-US" sz="1350" b="0" i="0" dirty="0">
-                <a:solidFill>
-                  <a:srgbClr val="2B2D5C"/>
-                </a:solidFill>
-                <a:latin typeface="微軟正黑體" pitchFamily="34" charset="0"/>
-                <a:ea typeface="微軟正黑體" pitchFamily="34" charset="-122"/>
-              </a:rPr>
-              <a:t>AI 產出不好，再叫它改一次就行了。</a:t>
-            </a:r>
-          </a:p>
-        </p:txBody>
-      </p:sp>
-      <p:sp>
-        <p:nvSpPr>
-          <p:cNvPr id="112" name="s112"/>
-          <p:cNvSpPr/>
-          <p:nvPr/>
-        </p:nvSpPr>
-        <p:spPr>
-          <a:xfrm>
-            <a:off x="6278728" y="1737360"/>
-            <a:ext cx="5272888" cy="1325880"/>
-          </a:xfrm>
-          <a:prstGeom prst="roundRect">
-            <a:avLst>
-              <a:gd name="adj" fmla="val 5000"/>
-            </a:avLst>
-          </a:prstGeom>
-          <a:solidFill>
-            <a:srgbClr val="F2E2DA"/>
-          </a:solidFill>
-          <a:ln>
-            <a:noFill/>
-          </a:ln>
-        </p:spPr>
-        <p:txBody>
-          <a:bodyPr wrap="square" lIns="310896" tIns="201168" rIns="310896" bIns="201168" rtlCol="0" anchor="ctr"/>
-          <a:lstStyle/>
-          <a:p>
-            <a:pPr marL="0" indent="0" algn="l">
-              <a:buNone/>
-            </a:pPr>
-            <a:r>
-              <a:rPr lang="zh-TW" altLang="en-US" sz="1400" b="1" i="0" dirty="0">
-                <a:solidFill>
-                  <a:srgbClr val="D95F2B"/>
-                </a:solidFill>
-                <a:latin typeface="微軟正黑體" pitchFamily="34" charset="0"/>
-                <a:ea typeface="微軟正黑體" pitchFamily="34" charset="-122"/>
-              </a:rPr>
-              <a:t>實際撞到的</a:t>
-            </a:r>
-          </a:p>
-          <a:p>
-            <a:pPr marL="0" indent="0" algn="l">
-              <a:spcBef>
-                <a:spcPts val="500"/>
-              </a:spcBef>
-              <a:buNone/>
-            </a:pPr>
-            <a:r>
-              <a:rPr lang="zh-TW" altLang="en-US" sz="1350" b="0" i="0" dirty="0">
-                <a:solidFill>
-                  <a:srgbClr val="2B2D5C"/>
-                </a:solidFill>
-                <a:latin typeface="微軟正黑體" pitchFamily="34" charset="0"/>
-                <a:ea typeface="微軟正黑體" pitchFamily="34" charset="-122"/>
-              </a:rPr>
-              <a:t>做 PRD 機器人的時候，我常常看得出結果很差，但講不出為什麼差——所以也不知道要改哪裡。反覆重新生成，其實只是在碰運氣。</a:t>
-            </a:r>
-          </a:p>
-        </p:txBody>
-      </p:sp>
-      <p:sp>
-        <p:nvSpPr>
-          <p:cNvPr id="113" name="s113"/>
-          <p:cNvSpPr/>
-          <p:nvPr/>
-        </p:nvSpPr>
-        <p:spPr>
-          <a:xfrm>
-            <a:off x="640080" y="3154680"/>
-            <a:ext cx="10911535" cy="1188720"/>
-          </a:xfrm>
-          <a:prstGeom prst="roundRect">
-            <a:avLst>
-              <a:gd name="adj" fmla="val 5000"/>
-            </a:avLst>
-          </a:prstGeom>
-          <a:solidFill>
-            <a:srgbClr val="F7F1CE"/>
-          </a:solidFill>
-          <a:ln>
-            <a:noFill/>
-          </a:ln>
-        </p:spPr>
-        <p:txBody>
-          <a:bodyPr wrap="square" lIns="310896" tIns="201168" rIns="310896" bIns="201168" rtlCol="0" anchor="ctr"/>
-          <a:lstStyle/>
-          <a:p>
-            <a:pPr marL="0" indent="0" algn="l">
-              <a:buNone/>
-            </a:pPr>
-            <a:r>
-              <a:rPr lang="zh-TW" altLang="en-US" sz="1400" b="1" i="0" dirty="0">
-                <a:solidFill>
-                  <a:srgbClr val="D95F2B"/>
-                </a:solidFill>
-                <a:latin typeface="微軟正黑體" pitchFamily="34" charset="0"/>
-                <a:ea typeface="微軟正黑體" pitchFamily="34" charset="-122"/>
-              </a:rPr>
-              <a:t>我怎麼處理</a:t>
-            </a:r>
-          </a:p>
-          <a:p>
-            <a:pPr marL="0" indent="0" algn="l">
-              <a:spcBef>
-                <a:spcPts val="500"/>
-              </a:spcBef>
-              <a:buNone/>
-            </a:pPr>
-            <a:r>
-              <a:rPr lang="zh-TW" altLang="en-US" sz="1350" b="0" i="0" dirty="0">
-                <a:solidFill>
-                  <a:srgbClr val="2B2D5C"/>
-                </a:solidFill>
-                <a:latin typeface="微軟正黑體" pitchFamily="34" charset="0"/>
-                <a:ea typeface="微軟正黑體" pitchFamily="34" charset="-122"/>
-              </a:rPr>
-              <a:t>回頭去補模型本身的原理：生圖那邊讀生成模型怎麼理解描述、提示詞結構怎麼影響結果；文字這邊拆解它問了什麼、漏了什麼。把「感覺不對」翻譯成「具體哪一段不對」。</a:t>
-            </a:r>
-          </a:p>
-        </p:txBody>
-      </p:sp>
-      <p:sp>
-        <p:nvSpPr>
-          <p:cNvPr id="114" name="s114"/>
-          <p:cNvSpPr/>
-          <p:nvPr/>
-        </p:nvSpPr>
-        <p:spPr>
-          <a:xfrm>
-            <a:off x="658368" y="4434840"/>
-            <a:ext cx="10911535" cy="329184"/>
-          </a:xfrm>
-          <a:prstGeom prst="rect">
-            <a:avLst/>
-          </a:prstGeom>
-          <a:noFill/>
-          <a:ln>
-            <a:noFill/>
-          </a:ln>
-        </p:spPr>
-        <p:txBody>
-          <a:bodyPr wrap="square" lIns="0" tIns="0" rIns="0" bIns="0" rtlCol="0" anchor="ctr"/>
-          <a:lstStyle/>
-          <a:p>
-            <a:pPr marL="0" indent="0" algn="l">
-              <a:buNone/>
-            </a:pPr>
-            <a:r>
-              <a:rPr lang="zh-TW" altLang="en-US" sz="1250" b="1" i="0" dirty="0">
-                <a:solidFill>
-                  <a:srgbClr val="D95F2B"/>
-                </a:solidFill>
-                <a:latin typeface="微軟正黑體" pitchFamily="34" charset="0"/>
-                <a:ea typeface="微軟正黑體" pitchFamily="34" charset="-122"/>
-              </a:rPr>
-              <a:t>為此我補了　</a:t>
-            </a:r>
-            <a:r>
-              <a:rPr lang="zh-TW" altLang="en-US" sz="1250" b="0" i="0" dirty="0">
-                <a:solidFill>
-                  <a:srgbClr val="4A4F7A"/>
-                </a:solidFill>
-                <a:latin typeface="微軟正黑體" pitchFamily="34" charset="0"/>
-                <a:ea typeface="微軟正黑體" pitchFamily="34" charset="-122"/>
-              </a:rPr>
-              <a:t>AI 生圖模型的生成理論、Claude Skills、提示詞結構拆解</a:t>
-            </a:r>
-          </a:p>
-        </p:txBody>
-      </p:sp>
-      <p:sp>
-        <p:nvSpPr>
-          <p:cNvPr id="115" name="s115"/>
-          <p:cNvSpPr/>
-          <p:nvPr/>
-        </p:nvSpPr>
-        <p:spPr>
-          <a:xfrm>
-            <a:off x="640080" y="4846320"/>
-            <a:ext cx="10911535" cy="1097280"/>
-          </a:xfrm>
-          <a:prstGeom prst="roundRect">
-            <a:avLst>
-              <a:gd name="adj" fmla="val 5000"/>
-            </a:avLst>
-          </a:prstGeom>
-          <a:solidFill>
-            <a:srgbClr val="2B2D5C"/>
-          </a:solidFill>
-          <a:ln>
-            <a:noFill/>
-          </a:ln>
-        </p:spPr>
-        <p:txBody>
-          <a:bodyPr wrap="square" lIns="329184" tIns="164592" rIns="329184" bIns="164592" rtlCol="0" anchor="ctr"/>
-          <a:lstStyle/>
-          <a:p>
-            <a:pPr marL="0" indent="0" algn="l">
-              <a:buNone/>
-            </a:pPr>
-            <a:r>
-              <a:rPr lang="zh-TW" altLang="en-US" sz="1150" b="1" i="0" dirty="0">
-                <a:solidFill>
-                  <a:srgbClr val="D6D9F0"/>
-                </a:solidFill>
-                <a:latin typeface="微軟正黑體" pitchFamily="34" charset="0"/>
-                <a:ea typeface="微軟正黑體" pitchFamily="34" charset="-122"/>
-              </a:rPr>
-              <a:t>學到什麼</a:t>
-            </a:r>
-          </a:p>
-          <a:p>
-            <a:pPr marL="0" indent="0" algn="l">
-              <a:spcBef>
-                <a:spcPts val="400"/>
-              </a:spcBef>
-              <a:buNone/>
-            </a:pPr>
-            <a:r>
-              <a:rPr lang="zh-TW" altLang="en-US" sz="1500" b="1" i="0" dirty="0">
-                <a:solidFill>
-                  <a:srgbClr val="FFFFFF"/>
-                </a:solidFill>
-                <a:latin typeface="微軟正黑體" pitchFamily="34" charset="0"/>
-                <a:ea typeface="微軟正黑體" pitchFamily="34" charset="-122"/>
-              </a:rPr>
-              <a:t>跟 AI 一起工作，真正的門檻不是會不會下指令，是能不能判斷它給的東西對不對。</a:t>
-            </a:r>
-          </a:p>
-          <a:p>
-            <a:pPr marL="0" indent="0" algn="l">
-              <a:spcBef>
-                <a:spcPts val="500"/>
-              </a:spcBef>
-              <a:buNone/>
-            </a:pPr>
-            <a:r>
-              <a:rPr lang="zh-TW" altLang="en-US" sz="1250" b="0" i="0" dirty="0">
-                <a:solidFill>
-                  <a:srgbClr val="D6D9F0"/>
-                </a:solidFill>
-                <a:latin typeface="微軟正黑體" pitchFamily="34" charset="0"/>
-                <a:ea typeface="微軟正黑體" pitchFamily="34" charset="-122"/>
-              </a:rPr>
-              <a:t>這件事後來直接變成我教材的核心——AI 圖片生成課我刻意不給一堆可複製的提示詞範本，而是教怎麼描述、怎麼修正，因為範本會過期，方法不會。</a:t>
-            </a:r>
-          </a:p>
-        </p:txBody>
-      </p:sp>
-      <p:sp>
-        <p:nvSpPr>
-          <p:cNvPr id="116" name="s116"/>
-          <p:cNvSpPr/>
-          <p:nvPr/>
-        </p:nvSpPr>
-        <p:spPr>
-          <a:xfrm>
-            <a:off x="11185855" y="6289243"/>
-            <a:ext cx="548640" cy="329184"/>
-          </a:xfrm>
-          <a:prstGeom prst="rect">
-            <a:avLst/>
-          </a:prstGeom>
-          <a:noFill/>
-          <a:ln>
-            <a:noFill/>
-          </a:ln>
-        </p:spPr>
-        <p:txBody>
-          <a:bodyPr wrap="square" lIns="0" tIns="0" rIns="0" bIns="0" rtlCol="0" anchor="ctr"/>
-          <a:lstStyle/>
-          <a:p>
-            <a:pPr marL="0" indent="0" algn="r">
-              <a:buNone/>
-            </a:pPr>
-            <a:fld id="{E9C06B96-71F9-4BDB-AB6B-A95A1C9F3DAB}" type="slidenum">
-              <a:rPr lang="zh-TW" altLang="en-US" sz="1100" b="0" i="0" dirty="0">
-                <a:solidFill>
-                  <a:srgbClr val="6E7191"/>
-                </a:solidFill>
-                <a:latin typeface="微軟正黑體" pitchFamily="34" charset="0"/>
-                <a:ea typeface="微軟正黑體" pitchFamily="34" charset="-122"/>
-              </a:rPr>
-              <a:t>1</a:t>
-            </a:fld>
-          </a:p>
-        </p:txBody>
-      </p:sp>
-    </p:spTree>
-  </p:cSld>
-  <p:clrMapOvr>
-    <a:masterClrMapping/>
-  </p:clrMapOvr>
-</p:sld>
-</file>
-
-<file path=ppt/slides/slide29.xml><?xml version="1.0" encoding="utf-8"?>
-<p:sld xmlns:a="http://schemas.openxmlformats.org/drawingml/2006/main" xmlns:r="http://schemas.openxmlformats.org/officeDocument/2006/relationships" xmlns:p="http://schemas.openxmlformats.org/presentationml/2006/main">
-  <p:cSld name="Slide 32">
-    <p:bg>
-      <p:bgPr>
-        <a:solidFill>
-          <a:srgbClr val="FFFFFF"/>
-        </a:solidFill>
-        <a:effectLst/>
-      </p:bgPr>
-    </p:bg>
-    <p:spTree>
-      <p:nvGrpSpPr>
-        <p:cNvPr id="1" name=""/>
-        <p:cNvGrpSpPr/>
-        <p:nvPr/>
-      </p:nvGrpSpPr>
-      <p:grpSpPr>
-        <a:xfrm>
-          <a:off x="0" y="0"/>
-          <a:ext cx="0" cy="0"/>
-          <a:chOff x="0" y="0"/>
-          <a:chExt cx="0" cy="0"/>
-        </a:xfrm>
-      </p:grpSpPr>
-      <p:sp>
-        <p:nvSpPr>
-          <p:cNvPr id="101" name="s101"/>
-          <p:cNvSpPr/>
-          <p:nvPr/>
-        </p:nvSpPr>
-        <p:spPr>
-          <a:xfrm>
-            <a:off x="640080" y="475488"/>
-            <a:ext cx="2286000" cy="329184"/>
-          </a:xfrm>
-          <a:prstGeom prst="roundRect">
-            <a:avLst>
-              <a:gd name="adj" fmla="val 44000"/>
-            </a:avLst>
-          </a:prstGeom>
-          <a:solidFill>
-            <a:srgbClr val="D6D9F0"/>
-          </a:solidFill>
-          <a:ln>
-            <a:noFill/>
-          </a:ln>
-        </p:spPr>
-        <p:txBody>
-          <a:bodyPr wrap="square" lIns="0" tIns="0" rIns="0" bIns="0" rtlCol="0" anchor="ctr"/>
-          <a:lstStyle/>
-          <a:p>
-            <a:pPr marL="0" indent="0" algn="ctr">
-              <a:buNone/>
-            </a:pPr>
-            <a:r>
-              <a:rPr lang="zh-TW" altLang="en-US" sz="1200" b="1" i="0" dirty="0">
-                <a:solidFill>
-                  <a:srgbClr val="2B2D5C"/>
-                </a:solidFill>
-                <a:latin typeface="微軟正黑體" pitchFamily="34" charset="0"/>
-                <a:ea typeface="微軟正黑體" pitchFamily="34" charset="-122"/>
-              </a:rPr>
-              <a:t>五、學習心得</a:t>
-            </a:r>
-          </a:p>
-        </p:txBody>
-      </p:sp>
-      <p:sp>
-        <p:nvSpPr>
-          <p:cNvPr id="102" name="s102"/>
-          <p:cNvSpPr/>
-          <p:nvPr/>
-        </p:nvSpPr>
-        <p:spPr>
-          <a:xfrm>
-            <a:off x="640080" y="914400"/>
-            <a:ext cx="10911535" cy="731520"/>
-          </a:xfrm>
-          <a:prstGeom prst="rect">
-            <a:avLst/>
-          </a:prstGeom>
-          <a:noFill/>
-          <a:ln>
-            <a:noFill/>
-          </a:ln>
-        </p:spPr>
-        <p:txBody>
-          <a:bodyPr wrap="square" lIns="0" tIns="0" rIns="0" bIns="0" rtlCol="0" anchor="ctr"/>
-          <a:lstStyle/>
-          <a:p>
-            <a:pPr marL="0" indent="0" algn="l">
-              <a:buNone/>
-            </a:pPr>
-            <a:r>
-              <a:rPr lang="zh-TW" altLang="en-US" sz="3000" b="1" i="0" dirty="0">
-                <a:solidFill>
-                  <a:srgbClr val="2B2D5C"/>
-                </a:solidFill>
-                <a:latin typeface="微軟正黑體" pitchFamily="34" charset="0"/>
-                <a:ea typeface="微軟正黑體" pitchFamily="34" charset="-122"/>
-              </a:rPr>
-              <a:t>困難一：我不會的東西，比我以為的多</a:t>
-            </a:r>
-          </a:p>
-        </p:txBody>
-      </p:sp>
-      <p:sp>
-        <p:nvSpPr>
-          <p:cNvPr id="103" name="s103"/>
-          <p:cNvSpPr/>
-          <p:nvPr/>
-        </p:nvSpPr>
-        <p:spPr>
-          <a:xfrm>
-            <a:off x="640080" y="1783080"/>
-            <a:ext cx="5272888" cy="1371600"/>
-          </a:xfrm>
-          <a:prstGeom prst="roundRect">
-            <a:avLst>
-              <a:gd name="adj" fmla="val 5000"/>
-            </a:avLst>
-          </a:prstGeom>
-          <a:solidFill>
-            <a:srgbClr val="ECEEF8"/>
-          </a:solidFill>
-          <a:ln>
-            <a:noFill/>
-          </a:ln>
-        </p:spPr>
-        <p:txBody>
-          <a:bodyPr wrap="square" lIns="310896" tIns="201168" rIns="310896" bIns="201168" rtlCol="0" anchor="ctr"/>
-          <a:lstStyle/>
-          <a:p>
-            <a:pPr marL="0" indent="0" algn="l">
-              <a:buNone/>
-            </a:pPr>
-            <a:r>
-              <a:rPr lang="zh-TW" altLang="en-US" sz="1400" b="1" i="0" dirty="0">
-                <a:solidFill>
-                  <a:srgbClr val="4A4F7A"/>
-                </a:solidFill>
-                <a:latin typeface="微軟正黑體" pitchFamily="34" charset="0"/>
-                <a:ea typeface="微軟正黑體" pitchFamily="34" charset="-122"/>
-              </a:rPr>
-              <a:t>我原本以為</a:t>
-            </a:r>
-          </a:p>
-          <a:p>
-            <a:pPr marL="0" indent="0" algn="l">
-              <a:spcBef>
-                <a:spcPts val="500"/>
-              </a:spcBef>
-              <a:buNone/>
-            </a:pPr>
-            <a:r>
-              <a:rPr lang="zh-TW" altLang="en-US" sz="1350" b="0" i="0" dirty="0">
-                <a:solidFill>
-                  <a:srgbClr val="2B2D5C"/>
-                </a:solidFill>
-                <a:latin typeface="微軟正黑體" pitchFamily="34" charset="0"/>
-                <a:ea typeface="微軟正黑體" pitchFamily="34" charset="-122"/>
-              </a:rPr>
-              <a:t>做過產品、用過不少 AI 工具，開發一套內部系統應該不會太難。</a:t>
-            </a:r>
-          </a:p>
-        </p:txBody>
-      </p:sp>
-      <p:sp>
-        <p:nvSpPr>
-          <p:cNvPr id="104" name="s104"/>
-          <p:cNvSpPr/>
-          <p:nvPr/>
-        </p:nvSpPr>
-        <p:spPr>
-          <a:xfrm>
-            <a:off x="6278728" y="1783080"/>
-            <a:ext cx="5272888" cy="1371600"/>
-          </a:xfrm>
-          <a:prstGeom prst="roundRect">
-            <a:avLst>
-              <a:gd name="adj" fmla="val 5000"/>
-            </a:avLst>
-          </a:prstGeom>
-          <a:solidFill>
-            <a:srgbClr val="F2E2DA"/>
-          </a:solidFill>
-          <a:ln>
-            <a:noFill/>
-          </a:ln>
-        </p:spPr>
-        <p:txBody>
-          <a:bodyPr wrap="square" lIns="310896" tIns="201168" rIns="310896" bIns="201168" rtlCol="0" anchor="ctr"/>
-          <a:lstStyle/>
-          <a:p>
-            <a:pPr marL="0" indent="0" algn="l">
-              <a:buNone/>
-            </a:pPr>
-            <a:r>
-              <a:rPr lang="zh-TW" altLang="en-US" sz="1400" b="1" i="0" dirty="0">
-                <a:solidFill>
-                  <a:srgbClr val="D95F2B"/>
-                </a:solidFill>
-                <a:latin typeface="微軟正黑體" pitchFamily="34" charset="0"/>
-                <a:ea typeface="微軟正黑體" pitchFamily="34" charset="-122"/>
-              </a:rPr>
-              <a:t>實際撞到的</a:t>
-            </a:r>
-          </a:p>
-          <a:p>
-            <a:pPr marL="0" indent="0" algn="l">
-              <a:spcBef>
-                <a:spcPts val="500"/>
-              </a:spcBef>
-              <a:buNone/>
-            </a:pPr>
-            <a:r>
-              <a:rPr lang="zh-TW" altLang="en-US" sz="1350" b="0" i="0" dirty="0">
-                <a:solidFill>
-                  <a:srgbClr val="2B2D5C"/>
-                </a:solidFill>
-                <a:latin typeface="微軟正黑體" pitchFamily="34" charset="0"/>
-                <a:ea typeface="微軟正黑體" pitchFamily="34" charset="-122"/>
-              </a:rPr>
-              <a:t>第一個月連 GitLab、PR、merge 這些協作的基本概念都不熟——卡的不是寫不出功能，是連怎麼把東西交出去、怎麼跟別人的版本合併都要從頭學。</a:t>
-            </a:r>
-          </a:p>
-        </p:txBody>
-      </p:sp>
-      <p:sp>
-        <p:nvSpPr>
-          <p:cNvPr id="105" name="s105"/>
-          <p:cNvSpPr/>
-          <p:nvPr/>
-        </p:nvSpPr>
-        <p:spPr>
-          <a:xfrm>
-            <a:off x="640080" y="3291840"/>
-            <a:ext cx="10911535" cy="1325880"/>
-          </a:xfrm>
-          <a:prstGeom prst="roundRect">
-            <a:avLst>
-              <a:gd name="adj" fmla="val 5000"/>
-            </a:avLst>
-          </a:prstGeom>
-          <a:solidFill>
-            <a:srgbClr val="F7F1CE"/>
-          </a:solidFill>
-          <a:ln>
-            <a:noFill/>
-          </a:ln>
-        </p:spPr>
-        <p:txBody>
-          <a:bodyPr wrap="square" lIns="310896" tIns="201168" rIns="310896" bIns="201168" rtlCol="0" anchor="ctr"/>
-          <a:lstStyle/>
-          <a:p>
-            <a:pPr marL="0" indent="0" algn="l">
-              <a:buNone/>
-            </a:pPr>
-            <a:r>
-              <a:rPr lang="zh-TW" altLang="en-US" sz="1400" b="1" i="0" dirty="0">
-                <a:solidFill>
-                  <a:srgbClr val="D95F2B"/>
-                </a:solidFill>
-                <a:latin typeface="微軟正黑體" pitchFamily="34" charset="0"/>
-                <a:ea typeface="微軟正黑體" pitchFamily="34" charset="-122"/>
-              </a:rPr>
-              <a:t>我怎麼處理</a:t>
-            </a:r>
-          </a:p>
-          <a:p>
-            <a:pPr marL="0" indent="0" algn="l">
-              <a:spcBef>
-                <a:spcPts val="500"/>
-              </a:spcBef>
-              <a:buNone/>
-            </a:pPr>
-            <a:r>
-              <a:rPr lang="zh-TW" altLang="en-US" sz="1350" b="0" i="0" dirty="0">
-                <a:solidFill>
-                  <a:srgbClr val="2B2D5C"/>
-                </a:solidFill>
-                <a:latin typeface="微軟正黑體" pitchFamily="34" charset="0"/>
-                <a:ea typeface="微軟正黑體" pitchFamily="34" charset="-122"/>
-              </a:rPr>
-              <a:t>沒有停下專案去上一套完整的課，而是邊做邊補：每次卡住就查、就問、就試，把每一次卡關當成一次補課。四個多月後，神秘客評分系統從無到有完成並正式上線。</a:t>
-            </a:r>
-          </a:p>
-        </p:txBody>
-      </p:sp>
-      <p:sp>
-        <p:nvSpPr>
-          <p:cNvPr id="106" name="s106"/>
-          <p:cNvSpPr/>
-          <p:nvPr/>
-        </p:nvSpPr>
-        <p:spPr>
-          <a:xfrm>
-            <a:off x="658368" y="4690872"/>
-            <a:ext cx="10911535" cy="329184"/>
-          </a:xfrm>
-          <a:prstGeom prst="rect">
-            <a:avLst/>
-          </a:prstGeom>
-          <a:noFill/>
-          <a:ln>
-            <a:noFill/>
-          </a:ln>
-        </p:spPr>
-        <p:txBody>
-          <a:bodyPr wrap="square" lIns="0" tIns="0" rIns="0" bIns="0" rtlCol="0" anchor="ctr"/>
-          <a:lstStyle/>
-          <a:p>
-            <a:pPr marL="0" indent="0" algn="l">
-              <a:buNone/>
-            </a:pPr>
-            <a:r>
-              <a:rPr lang="zh-TW" altLang="en-US" sz="1250" b="1" i="0" dirty="0">
-                <a:solidFill>
-                  <a:srgbClr val="D95F2B"/>
-                </a:solidFill>
-                <a:latin typeface="微軟正黑體" pitchFamily="34" charset="0"/>
-                <a:ea typeface="微軟正黑體" pitchFamily="34" charset="-122"/>
-              </a:rPr>
-              <a:t>為此我補了　</a:t>
-            </a:r>
-            <a:r>
-              <a:rPr lang="zh-TW" altLang="en-US" sz="1250" b="0" i="0" dirty="0">
-                <a:solidFill>
-                  <a:srgbClr val="4A4F7A"/>
-                </a:solidFill>
-                <a:latin typeface="微軟正黑體" pitchFamily="34" charset="0"/>
-                <a:ea typeface="微軟正黑體" pitchFamily="34" charset="-122"/>
-              </a:rPr>
-              <a:t>Git／GitLab 協作流程、Claude Code、VS Code 開發環境</a:t>
-            </a:r>
-          </a:p>
-        </p:txBody>
-      </p:sp>
-      <p:sp>
-        <p:nvSpPr>
-          <p:cNvPr id="107" name="s107"/>
-          <p:cNvSpPr/>
-          <p:nvPr/>
-        </p:nvSpPr>
-        <p:spPr>
-          <a:xfrm>
-            <a:off x="640080" y="5120640"/>
-            <a:ext cx="10911535" cy="822960"/>
-          </a:xfrm>
-          <a:prstGeom prst="roundRect">
-            <a:avLst>
-              <a:gd name="adj" fmla="val 5000"/>
-            </a:avLst>
-          </a:prstGeom>
-          <a:solidFill>
-            <a:srgbClr val="2B2D5C"/>
-          </a:solidFill>
-          <a:ln>
-            <a:noFill/>
-          </a:ln>
-        </p:spPr>
-        <p:txBody>
-          <a:bodyPr wrap="square" lIns="329184" tIns="164592" rIns="329184" bIns="164592" rtlCol="0" anchor="ctr"/>
-          <a:lstStyle/>
-          <a:p>
-            <a:pPr marL="0" indent="0" algn="l">
-              <a:buNone/>
-            </a:pPr>
-            <a:r>
-              <a:rPr lang="zh-TW" altLang="en-US" sz="1150" b="1" i="0" dirty="0">
-                <a:solidFill>
-                  <a:srgbClr val="D6D9F0"/>
-                </a:solidFill>
-                <a:latin typeface="微軟正黑體" pitchFamily="34" charset="0"/>
-                <a:ea typeface="微軟正黑體" pitchFamily="34" charset="-122"/>
-              </a:rPr>
-              <a:t>學到什麼</a:t>
-            </a:r>
-          </a:p>
-          <a:p>
-            <a:pPr marL="0" indent="0" algn="l">
-              <a:spcBef>
-                <a:spcPts val="400"/>
-              </a:spcBef>
-              <a:buNone/>
-            </a:pPr>
-            <a:r>
-              <a:rPr lang="zh-TW" altLang="en-US" sz="1500" b="1" i="0" dirty="0">
-                <a:solidFill>
-                  <a:srgbClr val="FFFFFF"/>
-                </a:solidFill>
-                <a:latin typeface="微軟正黑體" pitchFamily="34" charset="0"/>
-                <a:ea typeface="微軟正黑體" pitchFamily="34" charset="-122"/>
-              </a:rPr>
-              <a:t>我學到的不是 Git 指令，是「遇到完全不會的東西時，怎麼在不停下專案的前提下把它補起來」。</a:t>
-            </a:r>
-          </a:p>
-        </p:txBody>
-      </p:sp>
-      <p:sp>
-        <p:nvSpPr>
-          <p:cNvPr id="108" name="s108"/>
-          <p:cNvSpPr/>
-          <p:nvPr/>
-        </p:nvSpPr>
-        <p:spPr>
-          <a:xfrm>
-            <a:off x="11185855" y="6289243"/>
-            <a:ext cx="548640" cy="329184"/>
-          </a:xfrm>
-          <a:prstGeom prst="rect">
-            <a:avLst/>
-          </a:prstGeom>
-          <a:noFill/>
-          <a:ln>
-            <a:noFill/>
-          </a:ln>
-        </p:spPr>
-        <p:txBody>
-          <a:bodyPr wrap="square" lIns="0" tIns="0" rIns="0" bIns="0" rtlCol="0" anchor="ctr"/>
-          <a:lstStyle/>
-          <a:p>
-            <a:pPr marL="0" indent="0" algn="r">
-              <a:buNone/>
-            </a:pPr>
-            <a:fld id="{376013C1-DC87-4031-BE85-C66DC33D244E}" type="slidenum">
-              <a:rPr lang="zh-TW" altLang="en-US" sz="1100" b="0" i="0" dirty="0">
-                <a:solidFill>
-                  <a:srgbClr val="6E7191"/>
-                </a:solidFill>
-                <a:latin typeface="微軟正黑體" pitchFamily="34" charset="0"/>
-                <a:ea typeface="微軟正黑體" pitchFamily="34" charset="-122"/>
-              </a:rPr>
-              <a:t>1</a:t>
-            </a:fld>
           </a:p>
         </p:txBody>
       </p:sp>
@@ -19959,6 +18151,1667 @@
 </p:sld>
 </file>
 
+<file path=ppt/slides/slide30.xml><?xml version="1.0" encoding="utf-8"?>
+<p:sld xmlns:a="http://schemas.openxmlformats.org/drawingml/2006/main" xmlns:r="http://schemas.openxmlformats.org/officeDocument/2006/relationships" xmlns:p="http://schemas.openxmlformats.org/presentationml/2006/main">
+  <p:cSld name="Slide 32">
+    <p:bg>
+      <p:bgPr>
+        <a:solidFill>
+          <a:srgbClr val="FFFFFF"/>
+        </a:solidFill>
+        <a:effectLst/>
+      </p:bgPr>
+    </p:bg>
+    <p:spTree>
+      <p:nvGrpSpPr>
+        <p:cNvPr id="1" name=""/>
+        <p:cNvGrpSpPr/>
+        <p:nvPr/>
+      </p:nvGrpSpPr>
+      <p:grpSpPr>
+        <a:xfrm>
+          <a:off x="0" y="0"/>
+          <a:ext cx="0" cy="0"/>
+          <a:chOff x="0" y="0"/>
+          <a:chExt cx="0" cy="0"/>
+        </a:xfrm>
+      </p:grpSpPr>
+      <p:sp>
+        <p:nvSpPr>
+          <p:cNvPr id="139" name="s139"/>
+          <p:cNvSpPr/>
+          <p:nvPr/>
+        </p:nvSpPr>
+        <p:spPr>
+          <a:xfrm>
+            <a:off x="640080" y="475488"/>
+            <a:ext cx="2286000" cy="329184"/>
+          </a:xfrm>
+          <a:prstGeom prst="roundRect">
+            <a:avLst>
+              <a:gd name="adj" fmla="val 44000"/>
+            </a:avLst>
+          </a:prstGeom>
+          <a:solidFill>
+            <a:srgbClr val="D6D9F0"/>
+          </a:solidFill>
+          <a:ln>
+            <a:noFill/>
+          </a:ln>
+        </p:spPr>
+        <p:txBody>
+          <a:bodyPr wrap="square" lIns="0" tIns="0" rIns="0" bIns="0" rtlCol="0" anchor="ctr"/>
+          <a:lstStyle/>
+          <a:p>
+            <a:pPr marL="0" indent="0" algn="ctr">
+              <a:buNone/>
+            </a:pPr>
+            <a:r>
+              <a:rPr lang="zh-TW" altLang="en-US" sz="1200" b="1" dirty="0">
+                <a:solidFill>
+                  <a:srgbClr val="2B2D5C"/>
+                </a:solidFill>
+                <a:latin typeface="微軟正黑體" pitchFamily="34" charset="0"/>
+                <a:ea typeface="微軟正黑體" pitchFamily="34" charset="-122"/>
+              </a:rPr>
+              <a:t>五、學習心得</a:t>
+            </a:r>
+          </a:p>
+        </p:txBody>
+      </p:sp>
+      <p:sp>
+        <p:nvSpPr>
+          <p:cNvPr id="140" name="s140"/>
+          <p:cNvSpPr/>
+          <p:nvPr/>
+        </p:nvSpPr>
+        <p:spPr>
+          <a:xfrm>
+            <a:off x="640080" y="896112"/>
+            <a:ext cx="10911535" cy="658368"/>
+          </a:xfrm>
+          <a:prstGeom prst="rect">
+            <a:avLst/>
+          </a:prstGeom>
+          <a:noFill/>
+          <a:ln>
+            <a:noFill/>
+          </a:ln>
+        </p:spPr>
+        <p:txBody>
+          <a:bodyPr wrap="square" lIns="0" tIns="0" rIns="0" bIns="0" rtlCol="0" anchor="ctr"/>
+          <a:lstStyle/>
+          <a:p>
+            <a:pPr marL="0" indent="0" algn="l">
+              <a:buNone/>
+            </a:pPr>
+            <a:r>
+              <a:rPr lang="zh-TW" altLang="en-US" sz="2900" b="1" dirty="0">
+                <a:solidFill>
+                  <a:srgbClr val="2B2D5C"/>
+                </a:solidFill>
+                <a:latin typeface="微軟正黑體" pitchFamily="34" charset="0"/>
+                <a:ea typeface="微軟正黑體" pitchFamily="34" charset="-122"/>
+              </a:rPr>
+              <a:t>Findings ＋ Future</a:t>
+            </a:r>
+          </a:p>
+        </p:txBody>
+      </p:sp>
+      <p:sp>
+        <p:nvSpPr>
+          <p:cNvPr id="141" name="s141"/>
+          <p:cNvSpPr/>
+          <p:nvPr/>
+        </p:nvSpPr>
+        <p:spPr>
+          <a:xfrm>
+            <a:off x="640080" y="1536192"/>
+            <a:ext cx="10911535" cy="310896"/>
+          </a:xfrm>
+          <a:prstGeom prst="rect">
+            <a:avLst/>
+          </a:prstGeom>
+          <a:noFill/>
+          <a:ln>
+            <a:noFill/>
+          </a:ln>
+        </p:spPr>
+        <p:txBody>
+          <a:bodyPr wrap="square" lIns="0" tIns="0" rIns="0" bIns="0" rtlCol="0" anchor="ctr"/>
+          <a:lstStyle/>
+          <a:p>
+            <a:pPr marL="0" indent="0" algn="l">
+              <a:buNone/>
+            </a:pPr>
+            <a:r>
+              <a:rPr lang="zh-TW" altLang="en-US" sz="1300" b="0" dirty="0">
+                <a:solidFill>
+                  <a:srgbClr val="6E7191"/>
+                </a:solidFill>
+                <a:latin typeface="微軟正黑體" pitchFamily="34" charset="0"/>
+                <a:ea typeface="微軟正黑體" pitchFamily="34" charset="-122"/>
+              </a:rPr>
+              <a:t>我補的不只是工具，是一套完整交付的方法</a:t>
+            </a:r>
+          </a:p>
+        </p:txBody>
+      </p:sp>
+      <p:sp>
+        <p:nvSpPr>
+          <p:cNvPr id="142" name="s142"/>
+          <p:cNvSpPr/>
+          <p:nvPr/>
+        </p:nvSpPr>
+        <p:spPr>
+          <a:xfrm>
+            <a:off x="640080" y="1874520"/>
+            <a:ext cx="5272888" cy="3429000"/>
+          </a:xfrm>
+          <a:prstGeom prst="roundRect">
+            <a:avLst>
+              <a:gd name="adj" fmla="val 4000"/>
+            </a:avLst>
+          </a:prstGeom>
+          <a:solidFill>
+            <a:srgbClr val="F7F1CE"/>
+          </a:solidFill>
+          <a:ln>
+            <a:noFill/>
+          </a:ln>
+        </p:spPr>
+        <p:txBody>
+          <a:bodyPr wrap="square" lIns="0" tIns="0" rIns="0" bIns="0" rtlCol="0" anchor="t"/>
+          <a:lstStyle/>
+          <a:p/>
+        </p:txBody>
+      </p:sp>
+      <p:sp>
+        <p:nvSpPr>
+          <p:cNvPr id="143" name="s143"/>
+          <p:cNvSpPr/>
+          <p:nvPr/>
+        </p:nvSpPr>
+        <p:spPr>
+          <a:xfrm>
+            <a:off x="914400" y="2029968"/>
+            <a:ext cx="4724248" cy="347472"/>
+          </a:xfrm>
+          <a:prstGeom prst="rect">
+            <a:avLst/>
+          </a:prstGeom>
+          <a:noFill/>
+          <a:ln>
+            <a:noFill/>
+          </a:ln>
+        </p:spPr>
+        <p:txBody>
+          <a:bodyPr wrap="square" lIns="0" tIns="0" rIns="0" bIns="0" rtlCol="0" anchor="ctr"/>
+          <a:lstStyle/>
+          <a:p>
+            <a:pPr marL="0" indent="0" algn="l">
+              <a:buNone/>
+            </a:pPr>
+            <a:r>
+              <a:rPr lang="zh-TW" altLang="en-US" sz="1400" b="1" dirty="0">
+                <a:solidFill>
+                  <a:srgbClr val="D95F2B"/>
+                </a:solidFill>
+                <a:latin typeface="微軟正黑體" pitchFamily="34" charset="0"/>
+                <a:ea typeface="微軟正黑體" pitchFamily="34" charset="-122"/>
+              </a:rPr>
+              <a:t>Findings｜三個關鍵發現</a:t>
+            </a:r>
+          </a:p>
+        </p:txBody>
+      </p:sp>
+      <p:sp>
+        <p:nvSpPr>
+          <p:cNvPr id="144" name="s144"/>
+          <p:cNvSpPr/>
+          <p:nvPr/>
+        </p:nvSpPr>
+        <p:spPr>
+          <a:xfrm>
+            <a:off x="914400" y="2450592"/>
+            <a:ext cx="310896" cy="310896"/>
+          </a:xfrm>
+          <a:prstGeom prst="ellipse">
+            <a:avLst/>
+          </a:prstGeom>
+          <a:solidFill>
+            <a:srgbClr val="2B2D5C"/>
+          </a:solidFill>
+          <a:ln>
+            <a:noFill/>
+          </a:ln>
+        </p:spPr>
+        <p:txBody>
+          <a:bodyPr wrap="square" lIns="0" tIns="0" rIns="0" bIns="0" rtlCol="0" anchor="ctr"/>
+          <a:lstStyle/>
+          <a:p>
+            <a:pPr marL="0" indent="0" algn="ctr">
+              <a:buNone/>
+            </a:pPr>
+            <a:r>
+              <a:rPr lang="zh-TW" altLang="en-US" sz="1200" b="1" dirty="0">
+                <a:solidFill>
+                  <a:srgbClr val="FFFFFF"/>
+                </a:solidFill>
+                <a:latin typeface="微軟正黑體" pitchFamily="34" charset="0"/>
+                <a:ea typeface="微軟正黑體" pitchFamily="34" charset="-122"/>
+              </a:rPr>
+              <a:t>1</a:t>
+            </a:r>
+          </a:p>
+        </p:txBody>
+      </p:sp>
+      <p:sp>
+        <p:nvSpPr>
+          <p:cNvPr id="145" name="s145"/>
+          <p:cNvSpPr/>
+          <p:nvPr/>
+        </p:nvSpPr>
+        <p:spPr>
+          <a:xfrm>
+            <a:off x="1298448" y="2423160"/>
+            <a:ext cx="4340200" cy="329184"/>
+          </a:xfrm>
+          <a:prstGeom prst="rect">
+            <a:avLst/>
+          </a:prstGeom>
+          <a:noFill/>
+          <a:ln>
+            <a:noFill/>
+          </a:ln>
+        </p:spPr>
+        <p:txBody>
+          <a:bodyPr wrap="square" lIns="0" tIns="0" rIns="0" bIns="0" rtlCol="0" anchor="ctr"/>
+          <a:lstStyle/>
+          <a:p>
+            <a:pPr marL="0" indent="0" algn="l">
+              <a:buNone/>
+            </a:pPr>
+            <a:r>
+              <a:rPr lang="zh-TW" altLang="en-US" sz="1350" b="1" dirty="0">
+                <a:solidFill>
+                  <a:srgbClr val="2B2D5C"/>
+                </a:solidFill>
+                <a:latin typeface="微軟正黑體" pitchFamily="34" charset="0"/>
+                <a:ea typeface="微軟正黑體" pitchFamily="34" charset="-122"/>
+              </a:rPr>
+              <a:t>交付不等於寫完功能</a:t>
+            </a:r>
+          </a:p>
+        </p:txBody>
+      </p:sp>
+      <p:sp>
+        <p:nvSpPr>
+          <p:cNvPr id="146" name="s146"/>
+          <p:cNvSpPr/>
+          <p:nvPr/>
+        </p:nvSpPr>
+        <p:spPr>
+          <a:xfrm>
+            <a:off x="1298448" y="2752344"/>
+            <a:ext cx="4340200" cy="694944"/>
+          </a:xfrm>
+          <a:prstGeom prst="rect">
+            <a:avLst/>
+          </a:prstGeom>
+          <a:noFill/>
+          <a:ln>
+            <a:noFill/>
+          </a:ln>
+        </p:spPr>
+        <p:txBody>
+          <a:bodyPr wrap="square" lIns="0" tIns="0" rIns="0" bIns="0" rtlCol="0" anchor="t"/>
+          <a:lstStyle/>
+          <a:p>
+            <a:pPr marL="0" indent="0" algn="l">
+              <a:buNone/>
+            </a:pPr>
+            <a:r>
+              <a:rPr lang="zh-TW" altLang="en-US" sz="1150" b="0" dirty="0">
+                <a:solidFill>
+                  <a:srgbClr val="4A4F7A"/>
+                </a:solidFill>
+                <a:latin typeface="微軟正黑體" pitchFamily="34" charset="0"/>
+                <a:ea typeface="微軟正黑體" pitchFamily="34" charset="-122"/>
+              </a:rPr>
+              <a:t>還包含需求釐清、版本協作、環境設定、問題排查，以及對最終結果負責。</a:t>
+            </a:r>
+          </a:p>
+        </p:txBody>
+      </p:sp>
+      <p:sp>
+        <p:nvSpPr>
+          <p:cNvPr id="147" name="s147"/>
+          <p:cNvSpPr/>
+          <p:nvPr/>
+        </p:nvSpPr>
+        <p:spPr>
+          <a:xfrm>
+            <a:off x="914400" y="3493008"/>
+            <a:ext cx="310896" cy="310896"/>
+          </a:xfrm>
+          <a:prstGeom prst="ellipse">
+            <a:avLst/>
+          </a:prstGeom>
+          <a:solidFill>
+            <a:srgbClr val="2B2D5C"/>
+          </a:solidFill>
+          <a:ln>
+            <a:noFill/>
+          </a:ln>
+        </p:spPr>
+        <p:txBody>
+          <a:bodyPr wrap="square" lIns="0" tIns="0" rIns="0" bIns="0" rtlCol="0" anchor="ctr"/>
+          <a:lstStyle/>
+          <a:p>
+            <a:pPr marL="0" indent="0" algn="ctr">
+              <a:buNone/>
+            </a:pPr>
+            <a:r>
+              <a:rPr lang="zh-TW" altLang="en-US" sz="1200" b="1" dirty="0">
+                <a:solidFill>
+                  <a:srgbClr val="FFFFFF"/>
+                </a:solidFill>
+                <a:latin typeface="微軟正黑體" pitchFamily="34" charset="0"/>
+                <a:ea typeface="微軟正黑體" pitchFamily="34" charset="-122"/>
+              </a:rPr>
+              <a:t>2</a:t>
+            </a:r>
+          </a:p>
+        </p:txBody>
+      </p:sp>
+      <p:sp>
+        <p:nvSpPr>
+          <p:cNvPr id="148" name="s148"/>
+          <p:cNvSpPr/>
+          <p:nvPr/>
+        </p:nvSpPr>
+        <p:spPr>
+          <a:xfrm>
+            <a:off x="1298448" y="3465576"/>
+            <a:ext cx="4340200" cy="329184"/>
+          </a:xfrm>
+          <a:prstGeom prst="rect">
+            <a:avLst/>
+          </a:prstGeom>
+          <a:noFill/>
+          <a:ln>
+            <a:noFill/>
+          </a:ln>
+        </p:spPr>
+        <p:txBody>
+          <a:bodyPr wrap="square" lIns="0" tIns="0" rIns="0" bIns="0" rtlCol="0" anchor="ctr"/>
+          <a:lstStyle/>
+          <a:p>
+            <a:pPr marL="0" indent="0" algn="l">
+              <a:buNone/>
+            </a:pPr>
+            <a:r>
+              <a:rPr lang="zh-TW" altLang="en-US" sz="1350" b="1" dirty="0">
+                <a:solidFill>
+                  <a:srgbClr val="2B2D5C"/>
+                </a:solidFill>
+                <a:latin typeface="微軟正黑體" pitchFamily="34" charset="0"/>
+                <a:ea typeface="微軟正黑體" pitchFamily="34" charset="-122"/>
+              </a:rPr>
+              <a:t>用 AI 的門檻不是會不會下指令</a:t>
+            </a:r>
+          </a:p>
+        </p:txBody>
+      </p:sp>
+      <p:sp>
+        <p:nvSpPr>
+          <p:cNvPr id="149" name="s149"/>
+          <p:cNvSpPr/>
+          <p:nvPr/>
+        </p:nvSpPr>
+        <p:spPr>
+          <a:xfrm>
+            <a:off x="1298448" y="3794760"/>
+            <a:ext cx="4340200" cy="694944"/>
+          </a:xfrm>
+          <a:prstGeom prst="rect">
+            <a:avLst/>
+          </a:prstGeom>
+          <a:noFill/>
+          <a:ln>
+            <a:noFill/>
+          </a:ln>
+        </p:spPr>
+        <p:txBody>
+          <a:bodyPr wrap="square" lIns="0" tIns="0" rIns="0" bIns="0" rtlCol="0" anchor="t"/>
+          <a:lstStyle/>
+          <a:p>
+            <a:pPr marL="0" indent="0" algn="l">
+              <a:buNone/>
+            </a:pPr>
+            <a:r>
+              <a:rPr lang="zh-TW" altLang="en-US" sz="1150" b="0" dirty="0">
+                <a:solidFill>
+                  <a:srgbClr val="4A4F7A"/>
+                </a:solidFill>
+                <a:latin typeface="微軟正黑體" pitchFamily="34" charset="0"/>
+                <a:ea typeface="微軟正黑體" pitchFamily="34" charset="-122"/>
+              </a:rPr>
+              <a:t>是能不能判斷它給的東西對不對。這後來成為我教材的核心：不給可複製的提示詞範本，只教怎麼描述與修正。</a:t>
+            </a:r>
+          </a:p>
+        </p:txBody>
+      </p:sp>
+      <p:sp>
+        <p:nvSpPr>
+          <p:cNvPr id="150" name="s150"/>
+          <p:cNvSpPr/>
+          <p:nvPr/>
+        </p:nvSpPr>
+        <p:spPr>
+          <a:xfrm>
+            <a:off x="914400" y="4535424"/>
+            <a:ext cx="310896" cy="310896"/>
+          </a:xfrm>
+          <a:prstGeom prst="ellipse">
+            <a:avLst/>
+          </a:prstGeom>
+          <a:solidFill>
+            <a:srgbClr val="2B2D5C"/>
+          </a:solidFill>
+          <a:ln>
+            <a:noFill/>
+          </a:ln>
+        </p:spPr>
+        <p:txBody>
+          <a:bodyPr wrap="square" lIns="0" tIns="0" rIns="0" bIns="0" rtlCol="0" anchor="ctr"/>
+          <a:lstStyle/>
+          <a:p>
+            <a:pPr marL="0" indent="0" algn="ctr">
+              <a:buNone/>
+            </a:pPr>
+            <a:r>
+              <a:rPr lang="zh-TW" altLang="en-US" sz="1200" b="1" dirty="0">
+                <a:solidFill>
+                  <a:srgbClr val="FFFFFF"/>
+                </a:solidFill>
+                <a:latin typeface="微軟正黑體" pitchFamily="34" charset="0"/>
+                <a:ea typeface="微軟正黑體" pitchFamily="34" charset="-122"/>
+              </a:rPr>
+              <a:t>3</a:t>
+            </a:r>
+          </a:p>
+        </p:txBody>
+      </p:sp>
+      <p:sp>
+        <p:nvSpPr>
+          <p:cNvPr id="151" name="s151"/>
+          <p:cNvSpPr/>
+          <p:nvPr/>
+        </p:nvSpPr>
+        <p:spPr>
+          <a:xfrm>
+            <a:off x="1298448" y="4507992"/>
+            <a:ext cx="4340200" cy="329184"/>
+          </a:xfrm>
+          <a:prstGeom prst="rect">
+            <a:avLst/>
+          </a:prstGeom>
+          <a:noFill/>
+          <a:ln>
+            <a:noFill/>
+          </a:ln>
+        </p:spPr>
+        <p:txBody>
+          <a:bodyPr wrap="square" lIns="0" tIns="0" rIns="0" bIns="0" rtlCol="0" anchor="ctr"/>
+          <a:lstStyle/>
+          <a:p>
+            <a:pPr marL="0" indent="0" algn="l">
+              <a:buNone/>
+            </a:pPr>
+            <a:r>
+              <a:rPr lang="zh-TW" altLang="en-US" sz="1350" b="1" dirty="0">
+                <a:solidFill>
+                  <a:srgbClr val="2B2D5C"/>
+                </a:solidFill>
+                <a:latin typeface="微軟正黑體" pitchFamily="34" charset="0"/>
+                <a:ea typeface="微軟正黑體" pitchFamily="34" charset="-122"/>
+              </a:rPr>
+              <a:t>需求文件是結果，不是起點</a:t>
+            </a:r>
+          </a:p>
+        </p:txBody>
+      </p:sp>
+      <p:sp>
+        <p:nvSpPr>
+          <p:cNvPr id="152" name="s152"/>
+          <p:cNvSpPr/>
+          <p:nvPr/>
+        </p:nvSpPr>
+        <p:spPr>
+          <a:xfrm>
+            <a:off x="1298448" y="4837176"/>
+            <a:ext cx="4340200" cy="694944"/>
+          </a:xfrm>
+          <a:prstGeom prst="rect">
+            <a:avLst/>
+          </a:prstGeom>
+          <a:noFill/>
+          <a:ln>
+            <a:noFill/>
+          </a:ln>
+        </p:spPr>
+        <p:txBody>
+          <a:bodyPr wrap="square" lIns="0" tIns="0" rIns="0" bIns="0" rtlCol="0" anchor="t"/>
+          <a:lstStyle/>
+          <a:p>
+            <a:pPr marL="0" indent="0" algn="l">
+              <a:buNone/>
+            </a:pPr>
+            <a:r>
+              <a:rPr lang="zh-TW" altLang="en-US" sz="1150" b="0" dirty="0">
+                <a:solidFill>
+                  <a:srgbClr val="4A4F7A"/>
+                </a:solidFill>
+                <a:latin typeface="微軟正黑體" pitchFamily="34" charset="0"/>
+                <a:ea typeface="微軟正黑體" pitchFamily="34" charset="-122"/>
+              </a:rPr>
+              <a:t>神秘客的申覆功能不在任何一份文件上，是我走過整個流程才發現非做不可。</a:t>
+            </a:r>
+          </a:p>
+        </p:txBody>
+      </p:sp>
+      <p:sp>
+        <p:nvSpPr>
+          <p:cNvPr id="153" name="s153"/>
+          <p:cNvSpPr/>
+          <p:nvPr/>
+        </p:nvSpPr>
+        <p:spPr>
+          <a:xfrm>
+            <a:off x="6278728" y="1874520"/>
+            <a:ext cx="5272888" cy="3429000"/>
+          </a:xfrm>
+          <a:prstGeom prst="roundRect">
+            <a:avLst>
+              <a:gd name="adj" fmla="val 4000"/>
+            </a:avLst>
+          </a:prstGeom>
+          <a:solidFill>
+            <a:srgbClr val="ECEEF8"/>
+          </a:solidFill>
+          <a:ln>
+            <a:noFill/>
+          </a:ln>
+        </p:spPr>
+        <p:txBody>
+          <a:bodyPr wrap="square" lIns="0" tIns="0" rIns="0" bIns="0" rtlCol="0" anchor="t"/>
+          <a:lstStyle/>
+          <a:p/>
+        </p:txBody>
+      </p:sp>
+      <p:sp>
+        <p:nvSpPr>
+          <p:cNvPr id="154" name="s154"/>
+          <p:cNvSpPr/>
+          <p:nvPr/>
+        </p:nvSpPr>
+        <p:spPr>
+          <a:xfrm>
+            <a:off x="6553048" y="2029968"/>
+            <a:ext cx="4724248" cy="347472"/>
+          </a:xfrm>
+          <a:prstGeom prst="rect">
+            <a:avLst/>
+          </a:prstGeom>
+          <a:noFill/>
+          <a:ln>
+            <a:noFill/>
+          </a:ln>
+        </p:spPr>
+        <p:txBody>
+          <a:bodyPr wrap="square" lIns="0" tIns="0" rIns="0" bIns="0" rtlCol="0" anchor="ctr"/>
+          <a:lstStyle/>
+          <a:p>
+            <a:pPr marL="0" indent="0" algn="l">
+              <a:buNone/>
+            </a:pPr>
+            <a:r>
+              <a:rPr lang="zh-TW" altLang="en-US" sz="1400" b="1" dirty="0">
+                <a:solidFill>
+                  <a:srgbClr val="D95F2B"/>
+                </a:solidFill>
+                <a:latin typeface="微軟正黑體" pitchFamily="34" charset="0"/>
+                <a:ea typeface="微軟正黑體" pitchFamily="34" charset="-122"/>
+              </a:rPr>
+              <a:t>Future｜把學習轉成下一階段行動</a:t>
+            </a:r>
+          </a:p>
+        </p:txBody>
+      </p:sp>
+      <p:sp>
+        <p:nvSpPr>
+          <p:cNvPr id="155" name="s155"/>
+          <p:cNvSpPr/>
+          <p:nvPr/>
+        </p:nvSpPr>
+        <p:spPr>
+          <a:xfrm>
+            <a:off x="6553048" y="2423160"/>
+            <a:ext cx="1143000" cy="329184"/>
+          </a:xfrm>
+          <a:prstGeom prst="rect">
+            <a:avLst/>
+          </a:prstGeom>
+          <a:noFill/>
+          <a:ln>
+            <a:noFill/>
+          </a:ln>
+        </p:spPr>
+        <p:txBody>
+          <a:bodyPr wrap="square" lIns="0" tIns="0" rIns="0" bIns="0" rtlCol="0" anchor="ctr"/>
+          <a:lstStyle/>
+          <a:p>
+            <a:pPr marL="0" indent="0" algn="l">
+              <a:buNone/>
+            </a:pPr>
+            <a:r>
+              <a:rPr lang="zh-TW" altLang="en-US" sz="1350" b="1" dirty="0">
+                <a:solidFill>
+                  <a:srgbClr val="D95F2B"/>
+                </a:solidFill>
+                <a:latin typeface="微軟正黑體" pitchFamily="34" charset="0"/>
+                <a:ea typeface="微軟正黑體" pitchFamily="34" charset="-122"/>
+              </a:rPr>
+              <a:t>半年內</a:t>
+            </a:r>
+          </a:p>
+        </p:txBody>
+      </p:sp>
+      <p:sp>
+        <p:nvSpPr>
+          <p:cNvPr id="156" name="s156"/>
+          <p:cNvSpPr/>
+          <p:nvPr/>
+        </p:nvSpPr>
+        <p:spPr>
+          <a:xfrm>
+            <a:off x="6553048" y="2752344"/>
+            <a:ext cx="4724248" cy="694944"/>
+          </a:xfrm>
+          <a:prstGeom prst="rect">
+            <a:avLst/>
+          </a:prstGeom>
+          <a:noFill/>
+          <a:ln>
+            <a:noFill/>
+          </a:ln>
+        </p:spPr>
+        <p:txBody>
+          <a:bodyPr wrap="square" lIns="0" tIns="0" rIns="0" bIns="0" rtlCol="0" anchor="t"/>
+          <a:lstStyle/>
+          <a:p>
+            <a:pPr marL="0" indent="0" algn="l">
+              <a:buNone/>
+            </a:pPr>
+            <a:r>
+              <a:rPr lang="zh-TW" altLang="en-US" sz="1150" b="0" dirty="0">
+                <a:solidFill>
+                  <a:srgbClr val="2B2D5C"/>
+                </a:solidFill>
+                <a:latin typeface="微軟正黑體" pitchFamily="34" charset="0"/>
+                <a:ea typeface="微軟正黑體" pitchFamily="34" charset="-122"/>
+              </a:rPr>
+              <a:t>兩套系統從「能用」推到「穩定」——權限、資料、錯誤處理與維運；對外課程開賣後擔任主力講師，並推動教材定稿。</a:t>
+            </a:r>
+          </a:p>
+        </p:txBody>
+      </p:sp>
+      <p:sp>
+        <p:nvSpPr>
+          <p:cNvPr id="157" name="s157"/>
+          <p:cNvSpPr/>
+          <p:nvPr/>
+        </p:nvSpPr>
+        <p:spPr>
+          <a:xfrm>
+            <a:off x="6553048" y="3465576"/>
+            <a:ext cx="1143000" cy="329184"/>
+          </a:xfrm>
+          <a:prstGeom prst="rect">
+            <a:avLst/>
+          </a:prstGeom>
+          <a:noFill/>
+          <a:ln>
+            <a:noFill/>
+          </a:ln>
+        </p:spPr>
+        <p:txBody>
+          <a:bodyPr wrap="square" lIns="0" tIns="0" rIns="0" bIns="0" rtlCol="0" anchor="ctr"/>
+          <a:lstStyle/>
+          <a:p>
+            <a:pPr marL="0" indent="0" algn="l">
+              <a:buNone/>
+            </a:pPr>
+            <a:r>
+              <a:rPr lang="zh-TW" altLang="en-US" sz="1350" b="1" dirty="0">
+                <a:solidFill>
+                  <a:srgbClr val="D95F2B"/>
+                </a:solidFill>
+                <a:latin typeface="微軟正黑體" pitchFamily="34" charset="0"/>
+                <a:ea typeface="微軟正黑體" pitchFamily="34" charset="-122"/>
+              </a:rPr>
+              <a:t>一年內</a:t>
+            </a:r>
+          </a:p>
+        </p:txBody>
+      </p:sp>
+      <p:sp>
+        <p:nvSpPr>
+          <p:cNvPr id="158" name="s158"/>
+          <p:cNvSpPr/>
+          <p:nvPr/>
+        </p:nvSpPr>
+        <p:spPr>
+          <a:xfrm>
+            <a:off x="6553048" y="3794760"/>
+            <a:ext cx="4724248" cy="694944"/>
+          </a:xfrm>
+          <a:prstGeom prst="rect">
+            <a:avLst/>
+          </a:prstGeom>
+          <a:noFill/>
+          <a:ln>
+            <a:noFill/>
+          </a:ln>
+        </p:spPr>
+        <p:txBody>
+          <a:bodyPr wrap="square" lIns="0" tIns="0" rIns="0" bIns="0" rtlCol="0" anchor="t"/>
+          <a:lstStyle/>
+          <a:p>
+            <a:pPr marL="0" indent="0" algn="l">
+              <a:buNone/>
+            </a:pPr>
+            <a:r>
+              <a:rPr lang="zh-TW" altLang="en-US" sz="1150" b="0" dirty="0">
+                <a:solidFill>
+                  <a:srgbClr val="2B2D5C"/>
+                </a:solidFill>
+                <a:latin typeface="微軟正黑體" pitchFamily="34" charset="0"/>
+                <a:ea typeface="微軟正黑體" pitchFamily="34" charset="-122"/>
+              </a:rPr>
+              <a:t>獨立負責一條完整產品線，從題目發想、需求訪談到上線維運。</a:t>
+            </a:r>
+          </a:p>
+        </p:txBody>
+      </p:sp>
+      <p:sp>
+        <p:nvSpPr>
+          <p:cNvPr id="159" name="s159"/>
+          <p:cNvSpPr/>
+          <p:nvPr/>
+        </p:nvSpPr>
+        <p:spPr>
+          <a:xfrm>
+            <a:off x="6553048" y="4507992"/>
+            <a:ext cx="1143000" cy="329184"/>
+          </a:xfrm>
+          <a:prstGeom prst="rect">
+            <a:avLst/>
+          </a:prstGeom>
+          <a:noFill/>
+          <a:ln>
+            <a:noFill/>
+          </a:ln>
+        </p:spPr>
+        <p:txBody>
+          <a:bodyPr wrap="square" lIns="0" tIns="0" rIns="0" bIns="0" rtlCol="0" anchor="ctr"/>
+          <a:lstStyle/>
+          <a:p>
+            <a:pPr marL="0" indent="0" algn="l">
+              <a:buNone/>
+            </a:pPr>
+            <a:r>
+              <a:rPr lang="zh-TW" altLang="en-US" sz="1350" b="1" dirty="0">
+                <a:solidFill>
+                  <a:srgbClr val="D95F2B"/>
+                </a:solidFill>
+                <a:latin typeface="微軟正黑體" pitchFamily="34" charset="0"/>
+                <a:ea typeface="微軟正黑體" pitchFamily="34" charset="-122"/>
+              </a:rPr>
+              <a:t>三至五年</a:t>
+            </a:r>
+          </a:p>
+        </p:txBody>
+      </p:sp>
+      <p:sp>
+        <p:nvSpPr>
+          <p:cNvPr id="160" name="s160"/>
+          <p:cNvSpPr/>
+          <p:nvPr/>
+        </p:nvSpPr>
+        <p:spPr>
+          <a:xfrm>
+            <a:off x="6553048" y="4837176"/>
+            <a:ext cx="4724248" cy="694944"/>
+          </a:xfrm>
+          <a:prstGeom prst="rect">
+            <a:avLst/>
+          </a:prstGeom>
+          <a:noFill/>
+          <a:ln>
+            <a:noFill/>
+          </a:ln>
+        </p:spPr>
+        <p:txBody>
+          <a:bodyPr wrap="square" lIns="0" tIns="0" rIns="0" bIns="0" rtlCol="0" anchor="t"/>
+          <a:lstStyle/>
+          <a:p>
+            <a:pPr marL="0" indent="0" algn="l">
+              <a:buNone/>
+            </a:pPr>
+            <a:r>
+              <a:rPr lang="zh-TW" altLang="en-US" sz="1150" b="0" dirty="0">
+                <a:solidFill>
+                  <a:srgbClr val="2B2D5C"/>
+                </a:solidFill>
+                <a:latin typeface="微軟正黑體" pitchFamily="34" charset="0"/>
+                <a:ea typeface="微軟正黑體" pitchFamily="34" charset="-122"/>
+              </a:rPr>
+              <a:t>成為能同時掌握對外課程產品與對內系統落地的產品負責人，讓 AI 導入成為公司可複製的標準做法。</a:t>
+            </a:r>
+          </a:p>
+        </p:txBody>
+      </p:sp>
+      <p:sp>
+        <p:nvSpPr>
+          <p:cNvPr id="161" name="s161"/>
+          <p:cNvSpPr/>
+          <p:nvPr/>
+        </p:nvSpPr>
+        <p:spPr>
+          <a:xfrm>
+            <a:off x="640080" y="5440680"/>
+            <a:ext cx="10911535" cy="566928"/>
+          </a:xfrm>
+          <a:prstGeom prst="roundRect">
+            <a:avLst>
+              <a:gd name="adj" fmla="val 8000"/>
+            </a:avLst>
+          </a:prstGeom>
+          <a:solidFill>
+            <a:srgbClr val="2B2D5C"/>
+          </a:solidFill>
+          <a:ln>
+            <a:noFill/>
+          </a:ln>
+        </p:spPr>
+        <p:txBody>
+          <a:bodyPr wrap="square" lIns="0" tIns="0" rIns="0" bIns="0" rtlCol="0" anchor="ctr"/>
+          <a:lstStyle/>
+          <a:p>
+            <a:pPr marL="0" indent="0" algn="ctr">
+              <a:buNone/>
+            </a:pPr>
+            <a:r>
+              <a:rPr lang="zh-TW" altLang="en-US" sz="1500" b="1" dirty="0">
+                <a:solidFill>
+                  <a:srgbClr val="FFFFFF"/>
+                </a:solidFill>
+                <a:latin typeface="微軟正黑體" pitchFamily="34" charset="0"/>
+                <a:ea typeface="微軟正黑體" pitchFamily="34" charset="-122"/>
+              </a:rPr>
+              <a:t>下一階段，我要把個人的解題經驗，沉澱成團隊可以複製的產品交付方式。</a:t>
+            </a:r>
+          </a:p>
+        </p:txBody>
+      </p:sp>
+      <p:sp>
+        <p:nvSpPr>
+          <p:cNvPr id="162" name="s162"/>
+          <p:cNvSpPr/>
+          <p:nvPr/>
+        </p:nvSpPr>
+        <p:spPr>
+          <a:xfrm>
+            <a:off x="11185855" y="6289243"/>
+            <a:ext cx="548640" cy="329184"/>
+          </a:xfrm>
+          <a:prstGeom prst="rect">
+            <a:avLst/>
+          </a:prstGeom>
+          <a:noFill/>
+          <a:ln>
+            <a:noFill/>
+          </a:ln>
+        </p:spPr>
+        <p:txBody>
+          <a:bodyPr wrap="square" lIns="0" tIns="0" rIns="0" bIns="0" rtlCol="0" anchor="ctr"/>
+          <a:lstStyle/>
+          <a:p>
+            <a:pPr marL="0" indent="0" algn="r">
+              <a:buNone/>
+            </a:pPr>
+            <a:fld id="{8815893A-3285-493A-8F9B-AA87048707E6}" type="slidenum">
+              <a:rPr lang="zh-TW" altLang="en-US" sz="1100" b="0" dirty="0">
+                <a:solidFill>
+                  <a:srgbClr val="6E7191"/>
+                </a:solidFill>
+                <a:latin typeface="微軟正黑體" pitchFamily="34" charset="0"/>
+                <a:ea typeface="微軟正黑體" pitchFamily="34" charset="-122"/>
+              </a:rPr>
+              <a:t>1</a:t>
+            </a:fld>
+          </a:p>
+        </p:txBody>
+      </p:sp>
+    </p:spTree>
+  </p:cSld>
+  <p:clrMapOvr>
+    <a:masterClrMapping/>
+  </p:clrMapOvr>
+</p:sld>
+</file>
+
+<file path=ppt/slides/slide31.xml><?xml version="1.0" encoding="utf-8"?>
+<p:sld xmlns:a="http://schemas.openxmlformats.org/drawingml/2006/main" xmlns:r="http://schemas.openxmlformats.org/officeDocument/2006/relationships" xmlns:p="http://schemas.openxmlformats.org/presentationml/2006/main">
+  <p:cSld name="Slide 32">
+    <p:bg>
+      <p:bgPr>
+        <a:solidFill>
+          <a:srgbClr val="FFFFFF"/>
+        </a:solidFill>
+        <a:effectLst/>
+      </p:bgPr>
+    </p:bg>
+    <p:spTree>
+      <p:nvGrpSpPr>
+        <p:cNvPr id="1" name=""/>
+        <p:cNvGrpSpPr/>
+        <p:nvPr/>
+      </p:nvGrpSpPr>
+      <p:grpSpPr>
+        <a:xfrm>
+          <a:off x="0" y="0"/>
+          <a:ext cx="0" cy="0"/>
+          <a:chOff x="0" y="0"/>
+          <a:chExt cx="0" cy="0"/>
+        </a:xfrm>
+      </p:grpSpPr>
+      <p:sp>
+        <p:nvSpPr>
+          <p:cNvPr id="122" name="s122"/>
+          <p:cNvSpPr/>
+          <p:nvPr/>
+        </p:nvSpPr>
+        <p:spPr>
+          <a:xfrm>
+            <a:off x="640080" y="475488"/>
+            <a:ext cx="2286000" cy="329184"/>
+          </a:xfrm>
+          <a:prstGeom prst="roundRect">
+            <a:avLst>
+              <a:gd name="adj" fmla="val 44000"/>
+            </a:avLst>
+          </a:prstGeom>
+          <a:solidFill>
+            <a:srgbClr val="D6D9F0"/>
+          </a:solidFill>
+          <a:ln>
+            <a:noFill/>
+          </a:ln>
+        </p:spPr>
+        <p:txBody>
+          <a:bodyPr wrap="square" lIns="0" tIns="0" rIns="0" bIns="0" rtlCol="0" anchor="ctr"/>
+          <a:lstStyle/>
+          <a:p>
+            <a:pPr marL="0" indent="0" algn="ctr">
+              <a:buNone/>
+            </a:pPr>
+            <a:r>
+              <a:rPr lang="zh-TW" altLang="en-US" sz="1200" b="1" dirty="0">
+                <a:solidFill>
+                  <a:srgbClr val="2B2D5C"/>
+                </a:solidFill>
+                <a:latin typeface="微軟正黑體" pitchFamily="34" charset="0"/>
+                <a:ea typeface="微軟正黑體" pitchFamily="34" charset="-122"/>
+              </a:rPr>
+              <a:t>五、學習心得</a:t>
+            </a:r>
+          </a:p>
+        </p:txBody>
+      </p:sp>
+      <p:sp>
+        <p:nvSpPr>
+          <p:cNvPr id="123" name="s123"/>
+          <p:cNvSpPr/>
+          <p:nvPr/>
+        </p:nvSpPr>
+        <p:spPr>
+          <a:xfrm>
+            <a:off x="640080" y="896112"/>
+            <a:ext cx="10911535" cy="658368"/>
+          </a:xfrm>
+          <a:prstGeom prst="rect">
+            <a:avLst/>
+          </a:prstGeom>
+          <a:noFill/>
+          <a:ln>
+            <a:noFill/>
+          </a:ln>
+        </p:spPr>
+        <p:txBody>
+          <a:bodyPr wrap="square" lIns="0" tIns="0" rIns="0" bIns="0" rtlCol="0" anchor="ctr"/>
+          <a:lstStyle/>
+          <a:p>
+            <a:pPr marL="0" indent="0" algn="l">
+              <a:buNone/>
+            </a:pPr>
+            <a:r>
+              <a:rPr lang="zh-TW" altLang="en-US" sz="2900" b="1" dirty="0">
+                <a:solidFill>
+                  <a:srgbClr val="2B2D5C"/>
+                </a:solidFill>
+                <a:latin typeface="微軟正黑體" pitchFamily="34" charset="0"/>
+                <a:ea typeface="微軟正黑體" pitchFamily="34" charset="-122"/>
+              </a:rPr>
+              <a:t>Facts ＋ Feelings：我做了什麼，以及過程中的感受</a:t>
+            </a:r>
+          </a:p>
+        </p:txBody>
+      </p:sp>
+      <p:sp>
+        <p:nvSpPr>
+          <p:cNvPr id="124" name="s124"/>
+          <p:cNvSpPr/>
+          <p:nvPr/>
+        </p:nvSpPr>
+        <p:spPr>
+          <a:xfrm>
+            <a:off x="640080" y="1572768"/>
+            <a:ext cx="10911535" cy="2395728"/>
+          </a:xfrm>
+          <a:prstGeom prst="roundRect">
+            <a:avLst>
+              <a:gd name="adj" fmla="val 4000"/>
+            </a:avLst>
+          </a:prstGeom>
+          <a:solidFill>
+            <a:srgbClr val="ECEEF8"/>
+          </a:solidFill>
+          <a:ln>
+            <a:noFill/>
+          </a:ln>
+        </p:spPr>
+        <p:txBody>
+          <a:bodyPr wrap="square" lIns="0" tIns="0" rIns="0" bIns="0" rtlCol="0" anchor="t"/>
+          <a:lstStyle/>
+          <a:p/>
+        </p:txBody>
+      </p:sp>
+      <p:sp>
+        <p:nvSpPr>
+          <p:cNvPr id="125" name="s125"/>
+          <p:cNvSpPr/>
+          <p:nvPr/>
+        </p:nvSpPr>
+        <p:spPr>
+          <a:xfrm>
+            <a:off x="950976" y="1755648"/>
+            <a:ext cx="10289743" cy="365760"/>
+          </a:xfrm>
+          <a:prstGeom prst="rect">
+            <a:avLst/>
+          </a:prstGeom>
+          <a:noFill/>
+          <a:ln>
+            <a:noFill/>
+          </a:ln>
+        </p:spPr>
+        <p:txBody>
+          <a:bodyPr wrap="square" lIns="0" tIns="0" rIns="0" bIns="0" rtlCol="0" anchor="ctr"/>
+          <a:lstStyle/>
+          <a:p>
+            <a:pPr marL="0" indent="0" algn="l">
+              <a:buNone/>
+            </a:pPr>
+            <a:r>
+              <a:rPr lang="zh-TW" altLang="en-US" sz="1400" b="1" dirty="0">
+                <a:solidFill>
+                  <a:srgbClr val="D95F2B"/>
+                </a:solidFill>
+                <a:latin typeface="微軟正黑體" pitchFamily="34" charset="0"/>
+                <a:ea typeface="微軟正黑體" pitchFamily="34" charset="-122"/>
+              </a:rPr>
+              <a:t>Facts｜實際發生了什麼</a:t>
+            </a:r>
+          </a:p>
+        </p:txBody>
+      </p:sp>
+      <p:sp>
+        <p:nvSpPr>
+          <p:cNvPr id="126" name="s126"/>
+          <p:cNvSpPr/>
+          <p:nvPr/>
+        </p:nvSpPr>
+        <p:spPr>
+          <a:xfrm>
+            <a:off x="950976" y="2157984"/>
+            <a:ext cx="201168" cy="365760"/>
+          </a:xfrm>
+          <a:prstGeom prst="rect">
+            <a:avLst/>
+          </a:prstGeom>
+          <a:noFill/>
+          <a:ln>
+            <a:noFill/>
+          </a:ln>
+        </p:spPr>
+        <p:txBody>
+          <a:bodyPr wrap="square" lIns="0" tIns="0" rIns="0" bIns="0" rtlCol="0" anchor="t"/>
+          <a:lstStyle/>
+          <a:p>
+            <a:pPr marL="0" indent="0" algn="l">
+              <a:buNone/>
+            </a:pPr>
+            <a:r>
+              <a:rPr lang="zh-TW" altLang="en-US" sz="1300" b="1" dirty="0">
+                <a:solidFill>
+                  <a:srgbClr val="D95F2B"/>
+                </a:solidFill>
+                <a:latin typeface="微軟正黑體" pitchFamily="34" charset="0"/>
+                <a:ea typeface="微軟正黑體" pitchFamily="34" charset="-122"/>
+              </a:rPr>
+              <a:t>•</a:t>
+            </a:r>
+          </a:p>
+        </p:txBody>
+      </p:sp>
+      <p:sp>
+        <p:nvSpPr>
+          <p:cNvPr id="127" name="s127"/>
+          <p:cNvSpPr/>
+          <p:nvPr/>
+        </p:nvSpPr>
+        <p:spPr>
+          <a:xfrm>
+            <a:off x="1207008" y="2157984"/>
+            <a:ext cx="9997135" cy="402336"/>
+          </a:xfrm>
+          <a:prstGeom prst="rect">
+            <a:avLst/>
+          </a:prstGeom>
+          <a:noFill/>
+          <a:ln>
+            <a:noFill/>
+          </a:ln>
+        </p:spPr>
+        <p:txBody>
+          <a:bodyPr wrap="square" lIns="0" tIns="0" rIns="0" bIns="0" rtlCol="0" anchor="t"/>
+          <a:lstStyle/>
+          <a:p>
+            <a:pPr marL="0" indent="0" algn="l">
+              <a:buNone/>
+            </a:pPr>
+            <a:r>
+              <a:rPr lang="zh-TW" altLang="en-US" sz="1250" b="0" dirty="0">
+                <a:solidFill>
+                  <a:srgbClr val="2B2D5C"/>
+                </a:solidFill>
+                <a:latin typeface="微軟正黑體" pitchFamily="34" charset="0"/>
+                <a:ea typeface="微軟正黑體" pitchFamily="34" charset="-122"/>
+              </a:rPr>
+              <a:t>神秘客評分系統：把散在五份以上 Excel 的流程整併進單一後台，完成三層權限、評分、報表匯出、檢討與申覆、帳號／身分組移轉等機制，已正式上線使用。</a:t>
+            </a:r>
+          </a:p>
+        </p:txBody>
+      </p:sp>
+      <p:sp>
+        <p:nvSpPr>
+          <p:cNvPr id="128" name="s128"/>
+          <p:cNvSpPr/>
+          <p:nvPr/>
+        </p:nvSpPr>
+        <p:spPr>
+          <a:xfrm>
+            <a:off x="950976" y="2587752"/>
+            <a:ext cx="201168" cy="365760"/>
+          </a:xfrm>
+          <a:prstGeom prst="rect">
+            <a:avLst/>
+          </a:prstGeom>
+          <a:noFill/>
+          <a:ln>
+            <a:noFill/>
+          </a:ln>
+        </p:spPr>
+        <p:txBody>
+          <a:bodyPr wrap="square" lIns="0" tIns="0" rIns="0" bIns="0" rtlCol="0" anchor="t"/>
+          <a:lstStyle/>
+          <a:p>
+            <a:pPr marL="0" indent="0" algn="l">
+              <a:buNone/>
+            </a:pPr>
+            <a:r>
+              <a:rPr lang="zh-TW" altLang="en-US" sz="1300" b="1" dirty="0">
+                <a:solidFill>
+                  <a:srgbClr val="D95F2B"/>
+                </a:solidFill>
+                <a:latin typeface="微軟正黑體" pitchFamily="34" charset="0"/>
+                <a:ea typeface="微軟正黑體" pitchFamily="34" charset="-122"/>
+              </a:rPr>
+              <a:t>•</a:t>
+            </a:r>
+          </a:p>
+        </p:txBody>
+      </p:sp>
+      <p:sp>
+        <p:nvSpPr>
+          <p:cNvPr id="129" name="s129"/>
+          <p:cNvSpPr/>
+          <p:nvPr/>
+        </p:nvSpPr>
+        <p:spPr>
+          <a:xfrm>
+            <a:off x="1207008" y="2587752"/>
+            <a:ext cx="9997135" cy="402336"/>
+          </a:xfrm>
+          <a:prstGeom prst="rect">
+            <a:avLst/>
+          </a:prstGeom>
+          <a:noFill/>
+          <a:ln>
+            <a:noFill/>
+          </a:ln>
+        </p:spPr>
+        <p:txBody>
+          <a:bodyPr wrap="square" lIns="0" tIns="0" rIns="0" bIns="0" rtlCol="0" anchor="t"/>
+          <a:lstStyle/>
+          <a:p>
+            <a:pPr marL="0" indent="0" algn="l">
+              <a:buNone/>
+            </a:pPr>
+            <a:r>
+              <a:rPr lang="zh-TW" altLang="en-US" sz="1250" b="0" dirty="0">
+                <a:solidFill>
+                  <a:srgbClr val="2B2D5C"/>
+                </a:solidFill>
+                <a:latin typeface="微軟正黑體" pitchFamily="34" charset="0"/>
+                <a:ea typeface="微軟正黑體" pitchFamily="34" charset="-122"/>
+              </a:rPr>
+              <a:t>PRD 機器人：以大量反問把模糊想法收斂成 PRD 初稿與技術文件，目前約 10 位跨部門同事測試中。</a:t>
+            </a:r>
+          </a:p>
+        </p:txBody>
+      </p:sp>
+      <p:sp>
+        <p:nvSpPr>
+          <p:cNvPr id="130" name="s130"/>
+          <p:cNvSpPr/>
+          <p:nvPr/>
+        </p:nvSpPr>
+        <p:spPr>
+          <a:xfrm>
+            <a:off x="950976" y="3017520"/>
+            <a:ext cx="201168" cy="365760"/>
+          </a:xfrm>
+          <a:prstGeom prst="rect">
+            <a:avLst/>
+          </a:prstGeom>
+          <a:noFill/>
+          <a:ln>
+            <a:noFill/>
+          </a:ln>
+        </p:spPr>
+        <p:txBody>
+          <a:bodyPr wrap="square" lIns="0" tIns="0" rIns="0" bIns="0" rtlCol="0" anchor="t"/>
+          <a:lstStyle/>
+          <a:p>
+            <a:pPr marL="0" indent="0" algn="l">
+              <a:buNone/>
+            </a:pPr>
+            <a:r>
+              <a:rPr lang="zh-TW" altLang="en-US" sz="1300" b="1" dirty="0">
+                <a:solidFill>
+                  <a:srgbClr val="D95F2B"/>
+                </a:solidFill>
+                <a:latin typeface="微軟正黑體" pitchFamily="34" charset="0"/>
+                <a:ea typeface="微軟正黑體" pitchFamily="34" charset="-122"/>
+              </a:rPr>
+              <a:t>•</a:t>
+            </a:r>
+          </a:p>
+        </p:txBody>
+      </p:sp>
+      <p:sp>
+        <p:nvSpPr>
+          <p:cNvPr id="131" name="s131"/>
+          <p:cNvSpPr/>
+          <p:nvPr/>
+        </p:nvSpPr>
+        <p:spPr>
+          <a:xfrm>
+            <a:off x="1207008" y="3017520"/>
+            <a:ext cx="9997135" cy="402336"/>
+          </a:xfrm>
+          <a:prstGeom prst="rect">
+            <a:avLst/>
+          </a:prstGeom>
+          <a:noFill/>
+          <a:ln>
+            <a:noFill/>
+          </a:ln>
+        </p:spPr>
+        <p:txBody>
+          <a:bodyPr wrap="square" lIns="0" tIns="0" rIns="0" bIns="0" rtlCol="0" anchor="t"/>
+          <a:lstStyle/>
+          <a:p>
+            <a:pPr marL="0" indent="0" algn="l">
+              <a:buNone/>
+            </a:pPr>
+            <a:r>
+              <a:rPr lang="zh-TW" altLang="en-US" sz="1250" b="0" dirty="0">
+                <a:solidFill>
+                  <a:srgbClr val="2B2D5C"/>
+                </a:solidFill>
+                <a:latin typeface="微軟正黑體" pitchFamily="34" charset="0"/>
+                <a:ea typeface="微軟正黑體" pitchFamily="34" charset="-122"/>
+              </a:rPr>
+              <a:t>對外四門 AI 應用課：教材撰寫 2 門、擔任講師 2 門，皆完成內部試教。</a:t>
+            </a:r>
+          </a:p>
+        </p:txBody>
+      </p:sp>
+      <p:sp>
+        <p:nvSpPr>
+          <p:cNvPr id="132" name="s132"/>
+          <p:cNvSpPr/>
+          <p:nvPr/>
+        </p:nvSpPr>
+        <p:spPr>
+          <a:xfrm>
+            <a:off x="950976" y="3447288"/>
+            <a:ext cx="201168" cy="365760"/>
+          </a:xfrm>
+          <a:prstGeom prst="rect">
+            <a:avLst/>
+          </a:prstGeom>
+          <a:noFill/>
+          <a:ln>
+            <a:noFill/>
+          </a:ln>
+        </p:spPr>
+        <p:txBody>
+          <a:bodyPr wrap="square" lIns="0" tIns="0" rIns="0" bIns="0" rtlCol="0" anchor="t"/>
+          <a:lstStyle/>
+          <a:p>
+            <a:pPr marL="0" indent="0" algn="l">
+              <a:buNone/>
+            </a:pPr>
+            <a:r>
+              <a:rPr lang="zh-TW" altLang="en-US" sz="1300" b="1" dirty="0">
+                <a:solidFill>
+                  <a:srgbClr val="D95F2B"/>
+                </a:solidFill>
+                <a:latin typeface="微軟正黑體" pitchFamily="34" charset="0"/>
+                <a:ea typeface="微軟正黑體" pitchFamily="34" charset="-122"/>
+              </a:rPr>
+              <a:t>•</a:t>
+            </a:r>
+          </a:p>
+        </p:txBody>
+      </p:sp>
+      <p:sp>
+        <p:nvSpPr>
+          <p:cNvPr id="133" name="s133"/>
+          <p:cNvSpPr/>
+          <p:nvPr/>
+        </p:nvSpPr>
+        <p:spPr>
+          <a:xfrm>
+            <a:off x="1207008" y="3447288"/>
+            <a:ext cx="9997135" cy="402336"/>
+          </a:xfrm>
+          <a:prstGeom prst="rect">
+            <a:avLst/>
+          </a:prstGeom>
+          <a:noFill/>
+          <a:ln>
+            <a:noFill/>
+          </a:ln>
+        </p:spPr>
+        <p:txBody>
+          <a:bodyPr wrap="square" lIns="0" tIns="0" rIns="0" bIns="0" rtlCol="0" anchor="t"/>
+          <a:lstStyle/>
+          <a:p>
+            <a:pPr marL="0" indent="0" algn="l">
+              <a:buNone/>
+            </a:pPr>
+            <a:r>
+              <a:rPr lang="zh-TW" altLang="en-US" sz="1250" b="0" dirty="0">
+                <a:solidFill>
+                  <a:srgbClr val="2B2D5C"/>
+                </a:solidFill>
+                <a:latin typeface="微軟正黑體" pitchFamily="34" charset="0"/>
+                <a:ea typeface="微軟正黑體" pitchFamily="34" charset="-122"/>
+              </a:rPr>
+              <a:t>這是我第一次完整走完：需求訪談 → 開發 → 版本協作 → 排錯 → 驗證 → 正式交付。</a:t>
+            </a:r>
+          </a:p>
+        </p:txBody>
+      </p:sp>
+      <p:sp>
+        <p:nvSpPr>
+          <p:cNvPr id="134" name="s134"/>
+          <p:cNvSpPr/>
+          <p:nvPr/>
+        </p:nvSpPr>
+        <p:spPr>
+          <a:xfrm>
+            <a:off x="640080" y="4114800"/>
+            <a:ext cx="10911535" cy="1828800"/>
+          </a:xfrm>
+          <a:prstGeom prst="roundRect">
+            <a:avLst>
+              <a:gd name="adj" fmla="val 5000"/>
+            </a:avLst>
+          </a:prstGeom>
+          <a:solidFill>
+            <a:srgbClr val="2B2D5C"/>
+          </a:solidFill>
+          <a:ln>
+            <a:noFill/>
+          </a:ln>
+        </p:spPr>
+        <p:txBody>
+          <a:bodyPr wrap="square" lIns="0" tIns="0" rIns="0" bIns="0" rtlCol="0" anchor="t"/>
+          <a:lstStyle/>
+          <a:p/>
+        </p:txBody>
+      </p:sp>
+      <p:sp>
+        <p:nvSpPr>
+          <p:cNvPr id="135" name="s135"/>
+          <p:cNvSpPr/>
+          <p:nvPr/>
+        </p:nvSpPr>
+        <p:spPr>
+          <a:xfrm>
+            <a:off x="969264" y="4279392"/>
+            <a:ext cx="10253167" cy="329184"/>
+          </a:xfrm>
+          <a:prstGeom prst="rect">
+            <a:avLst/>
+          </a:prstGeom>
+          <a:noFill/>
+          <a:ln>
+            <a:noFill/>
+          </a:ln>
+        </p:spPr>
+        <p:txBody>
+          <a:bodyPr wrap="square" lIns="0" tIns="0" rIns="0" bIns="0" rtlCol="0" anchor="ctr"/>
+          <a:lstStyle/>
+          <a:p>
+            <a:pPr marL="0" indent="0" algn="l">
+              <a:buNone/>
+            </a:pPr>
+            <a:r>
+              <a:rPr lang="zh-TW" altLang="en-US" sz="1300" b="1" dirty="0">
+                <a:solidFill>
+                  <a:srgbClr val="AEB4E4"/>
+                </a:solidFill>
+                <a:latin typeface="微軟正黑體" pitchFamily="34" charset="0"/>
+                <a:ea typeface="微軟正黑體" pitchFamily="34" charset="-122"/>
+              </a:rPr>
+              <a:t>Feelings｜過程中的感受</a:t>
+            </a:r>
+          </a:p>
+        </p:txBody>
+      </p:sp>
+      <p:sp>
+        <p:nvSpPr>
+          <p:cNvPr id="136" name="s136"/>
+          <p:cNvSpPr/>
+          <p:nvPr/>
+        </p:nvSpPr>
+        <p:spPr>
+          <a:xfrm>
+            <a:off x="969264" y="4626864"/>
+            <a:ext cx="10253167" cy="384048"/>
+          </a:xfrm>
+          <a:prstGeom prst="rect">
+            <a:avLst/>
+          </a:prstGeom>
+          <a:noFill/>
+          <a:ln>
+            <a:noFill/>
+          </a:ln>
+        </p:spPr>
+        <p:txBody>
+          <a:bodyPr wrap="square" lIns="0" tIns="0" rIns="0" bIns="0" rtlCol="0" anchor="ctr"/>
+          <a:lstStyle/>
+          <a:p>
+            <a:pPr marL="0" indent="0" algn="l">
+              <a:buNone/>
+            </a:pPr>
+            <a:r>
+              <a:rPr lang="zh-TW" altLang="en-US" sz="1600" b="1" dirty="0">
+                <a:solidFill>
+                  <a:srgbClr val="FFFFFF"/>
+                </a:solidFill>
+                <a:latin typeface="微軟正黑體" pitchFamily="34" charset="0"/>
+                <a:ea typeface="微軟正黑體" pitchFamily="34" charset="-122"/>
+              </a:rPr>
+              <a:t>一開始最強烈的是失控感——東西能跑，但不是我掌控的。</a:t>
+            </a:r>
+          </a:p>
+        </p:txBody>
+      </p:sp>
+      <p:sp>
+        <p:nvSpPr>
+          <p:cNvPr id="137" name="s137"/>
+          <p:cNvSpPr/>
+          <p:nvPr/>
+        </p:nvSpPr>
+        <p:spPr>
+          <a:xfrm>
+            <a:off x="969264" y="5029200"/>
+            <a:ext cx="10253167" cy="822960"/>
+          </a:xfrm>
+          <a:prstGeom prst="rect">
+            <a:avLst/>
+          </a:prstGeom>
+          <a:noFill/>
+          <a:ln>
+            <a:noFill/>
+          </a:ln>
+        </p:spPr>
+        <p:txBody>
+          <a:bodyPr wrap="square" lIns="0" tIns="0" rIns="0" bIns="0" rtlCol="0" anchor="t"/>
+          <a:lstStyle/>
+          <a:p>
+            <a:pPr marL="0" indent="0" algn="l">
+              <a:buNone/>
+            </a:pPr>
+            <a:r>
+              <a:rPr lang="zh-TW" altLang="en-US" sz="1250" b="0" dirty="0">
+                <a:solidFill>
+                  <a:srgbClr val="D6D9F0"/>
+                </a:solidFill>
+                <a:latin typeface="微軟正黑體" pitchFamily="34" charset="0"/>
+                <a:ea typeface="微軟正黑體" pitchFamily="34" charset="-122"/>
+              </a:rPr>
+              <a:t>我看得出 AI 給的結果很差，卻講不出為什麼差；改不動就只能反覆重新生成，說白了是在碰運氣。功能會動，我卻說不出它為什麼會動。</a:t>
+            </a:r>
+          </a:p>
+          <a:p>
+            <a:pPr marL="0" indent="0" algn="l">
+              <a:spcBef>
+                <a:spcPts val="300"/>
+              </a:spcBef>
+              <a:buNone/>
+            </a:pPr>
+            <a:r>
+              <a:rPr lang="zh-TW" altLang="en-US" sz="1250" b="0" dirty="0">
+                <a:solidFill>
+                  <a:srgbClr val="D6D9F0"/>
+                </a:solidFill>
+                <a:latin typeface="微軟正黑體" pitchFamily="34" charset="0"/>
+                <a:ea typeface="微軟正黑體" pitchFamily="34" charset="-122"/>
+              </a:rPr>
+              <a:t>轉折點是我不再只想著把眼前的錯誤修掉，而是回頭去補模型本身的原理。當我能說出「是這一段描述不夠具體」，而不是「感覺怪怪的」，主導權才回到我手上。</a:t>
+            </a:r>
+          </a:p>
+        </p:txBody>
+      </p:sp>
+      <p:sp>
+        <p:nvSpPr>
+          <p:cNvPr id="138" name="s138"/>
+          <p:cNvSpPr/>
+          <p:nvPr/>
+        </p:nvSpPr>
+        <p:spPr>
+          <a:xfrm>
+            <a:off x="11185855" y="6289243"/>
+            <a:ext cx="548640" cy="329184"/>
+          </a:xfrm>
+          <a:prstGeom prst="rect">
+            <a:avLst/>
+          </a:prstGeom>
+          <a:noFill/>
+          <a:ln>
+            <a:noFill/>
+          </a:ln>
+        </p:spPr>
+        <p:txBody>
+          <a:bodyPr wrap="square" lIns="0" tIns="0" rIns="0" bIns="0" rtlCol="0" anchor="ctr"/>
+          <a:lstStyle/>
+          <a:p>
+            <a:pPr marL="0" indent="0" algn="r">
+              <a:buNone/>
+            </a:pPr>
+            <a:fld id="{76840F52-F811-40E0-B42C-1158464B3875}" type="slidenum">
+              <a:rPr lang="zh-TW" altLang="en-US" sz="1100" b="0" dirty="0">
+                <a:solidFill>
+                  <a:srgbClr val="6E7191"/>
+                </a:solidFill>
+                <a:latin typeface="微軟正黑體" pitchFamily="34" charset="0"/>
+                <a:ea typeface="微軟正黑體" pitchFamily="34" charset="-122"/>
+              </a:rPr>
+              <a:t>1</a:t>
+            </a:fld>
+          </a:p>
+        </p:txBody>
+      </p:sp>
+    </p:spTree>
+  </p:cSld>
+  <p:clrMapOvr>
+    <a:masterClrMapping/>
+  </p:clrMapOvr>
+</p:sld>
+</file>
+
 <file path=ppt/slides/slide4.xml><?xml version="1.0" encoding="utf-8"?>
 <p:sld xmlns:a="http://schemas.openxmlformats.org/drawingml/2006/main" xmlns:r="http://schemas.openxmlformats.org/officeDocument/2006/relationships" xmlns:p="http://schemas.openxmlformats.org/presentationml/2006/main">
   <p:cSld name="Slide 4">
@@ -22721,7 +22574,7 @@
         </p:nvSpPr>
         <p:spPr>
           <a:xfrm>
-            <a:off x="640080" y="1874520"/>
+            <a:off x="6278728" y="1874520"/>
             <a:ext cx="5272888" cy="1920240"/>
           </a:xfrm>
           <a:prstGeom prst="roundRect">
@@ -22757,7 +22610,7 @@
         </p:nvSpPr>
         <p:spPr>
           <a:xfrm>
-            <a:off x="950976" y="2377440"/>
+            <a:off x="6589624" y="2377440"/>
             <a:ext cx="868680" cy="868680"/>
           </a:xfrm>
           <a:prstGeom prst="ellipse">
@@ -22784,7 +22637,7 @@
         </p:nvSpPr>
         <p:spPr>
           <a:xfrm>
-            <a:off x="950976" y="2377440"/>
+            <a:off x="6589624" y="2377440"/>
             <a:ext cx="868680" cy="868680"/>
           </a:xfrm>
           <a:prstGeom prst="rect">
@@ -22823,7 +22676,7 @@
         </p:nvSpPr>
         <p:spPr>
           <a:xfrm>
-            <a:off x="2057400" y="2258568"/>
+            <a:off x="7696048" y="2258568"/>
             <a:ext cx="3535528" cy="1143000"/>
           </a:xfrm>
           <a:prstGeom prst="rect">
@@ -22864,7 +22717,7 @@
         </p:nvSpPr>
         <p:spPr>
           <a:xfrm>
-            <a:off x="6278728" y="1874520"/>
+            <a:off x="640385" y="4023360"/>
             <a:ext cx="5272888" cy="1920240"/>
           </a:xfrm>
           <a:prstGeom prst="roundRect">
@@ -22900,7 +22753,7 @@
         </p:nvSpPr>
         <p:spPr>
           <a:xfrm>
-            <a:off x="6589624" y="2377440"/>
+            <a:off x="951281" y="4526280"/>
             <a:ext cx="868680" cy="868680"/>
           </a:xfrm>
           <a:prstGeom prst="ellipse">
@@ -22927,7 +22780,7 @@
         </p:nvSpPr>
         <p:spPr>
           <a:xfrm>
-            <a:off x="6589624" y="2377440"/>
+            <a:off x="951281" y="4526280"/>
             <a:ext cx="868680" cy="868680"/>
           </a:xfrm>
           <a:prstGeom prst="rect">
@@ -22966,7 +22819,7 @@
         </p:nvSpPr>
         <p:spPr>
           <a:xfrm>
-            <a:off x="7696048" y="2258568"/>
+            <a:off x="2057705" y="4407408"/>
             <a:ext cx="3535528" cy="1143000"/>
           </a:xfrm>
           <a:prstGeom prst="rect">
@@ -23008,7 +22861,7 @@
         </p:nvSpPr>
         <p:spPr>
           <a:xfrm>
-            <a:off x="640080" y="4023360"/>
+            <a:off x="640385" y="1874520"/>
             <a:ext cx="5272888" cy="1920240"/>
           </a:xfrm>
           <a:prstGeom prst="roundRect">
@@ -23044,7 +22897,7 @@
         </p:nvSpPr>
         <p:spPr>
           <a:xfrm>
-            <a:off x="950976" y="4526280"/>
+            <a:off x="951281" y="2377440"/>
             <a:ext cx="868680" cy="868680"/>
           </a:xfrm>
           <a:prstGeom prst="ellipse">
@@ -23071,7 +22924,7 @@
         </p:nvSpPr>
         <p:spPr>
           <a:xfrm>
-            <a:off x="950976" y="4526280"/>
+            <a:off x="951281" y="2377440"/>
             <a:ext cx="868680" cy="868680"/>
           </a:xfrm>
           <a:prstGeom prst="rect">
@@ -23110,7 +22963,7 @@
         </p:nvSpPr>
         <p:spPr>
           <a:xfrm>
-            <a:off x="2057400" y="4407408"/>
+            <a:off x="2057705" y="2258568"/>
             <a:ext cx="3535528" cy="1143000"/>
           </a:xfrm>
           <a:prstGeom prst="rect">
@@ -25325,7 +25178,7 @@
                 <a:ea typeface="微軟正黑體" pitchFamily="34" charset="-122"/>
                 <a:cs typeface="微軟正黑體" pitchFamily="34" charset="-120"/>
               </a:rPr>
-              <a:t>10</a:t>
+              <a:t>9</a:t>
             </a:fld>
             <a:endParaRPr lang="en-US" sz="1100" dirty="0"/>
           </a:p>
